--- a/skills/zia-mta-basemap/examples/twy-e-asbuilt-ducts/out/AUH-SK-AGL-TWYE-001 - TWY E Shop Drawings - ZIA Rev P08 FINAL.pptx
+++ b/skills/zia-mta-basemap/examples/twy-e-asbuilt-ducts/out/AUH-SK-AGL-TWYE-001 - TWY E Shop Drawings - ZIA Rev P08 FINAL.pptx
@@ -10,6 +10,7 @@
   <p:sldIdLst>
     <p:sldId id="296" r:id="rId2"/>
     <p:sldId id="302" r:id="rId3"/>
+    <p:sldId id="306" r:id="rId14"/>
     <p:sldId id="303" r:id="rId4"/>
     <p:sldId id="304" r:id="rId5"/>
     <p:sldId id="305" r:id="rId6"/>
@@ -53166,6 +53167,5223 @@
 </p:sld>
 </file>
 
+<file path=ppt/slides/slide8.xml><?xml version="1.0" encoding="utf-8"?>
+<p:sld xmlns:a="http://schemas.openxmlformats.org/drawingml/2006/main" xmlns:p="http://schemas.openxmlformats.org/presentationml/2006/main" xmlns:r="http://schemas.openxmlformats.org/officeDocument/2006/relationships">
+  <p:cSld>
+    <p:spTree>
+      <p:nvGrpSpPr>
+        <p:cNvPr id="1" name=""/>
+        <p:cNvGrpSpPr/>
+        <p:nvPr/>
+      </p:nvGrpSpPr>
+      <p:grpSpPr/>
+      <p:sp>
+        <p:nvSpPr>
+          <p:cNvPr id="2" name="TITLE"/>
+          <p:cNvSpPr txBox="1"/>
+          <p:nvPr/>
+        </p:nvSpPr>
+        <p:spPr>
+          <a:xfrm>
+            <a:off x="457200" y="274320"/>
+            <a:ext cx="12473200" cy="502920"/>
+          </a:xfrm>
+          <a:prstGeom prst="rect">
+            <a:avLst/>
+          </a:prstGeom>
+          <a:noFill/>
+        </p:spPr>
+        <p:txBody>
+          <a:bodyPr wrap="square" lIns="0" rIns="0" tIns="0" bIns="0">
+            <a:spAutoFit/>
+          </a:bodyPr>
+          <a:lstStyle/>
+          <a:p>
+            <a:pPr>
+              <a:spcAft>
+                <a:spcPts val="400"/>
+              </a:spcAft>
+            </a:pPr>
+            <a:r>
+              <a:rPr sz="2000" b="1" i="0">
+                <a:solidFill>
+                  <a:srgbClr val="1E2761"/>
+                </a:solidFill>
+                <a:latin typeface="Arial"/>
+              </a:rPr>
+              <a:t>AGL INSTALLATION — 5-DAY WORK SCHEDULE  ·  TWY E (E4–E6)  ·  REV P08 (FINAL SCOPE)</a:t>
+            </a:r>
+          </a:p>
+        </p:txBody>
+      </p:sp>
+      <p:pic>
+        <p:nvPicPr>
+          <p:cNvPr id="3" name="ADB SAFEGATE LOGO" descr="logo-adb.png"/>
+          <p:cNvPicPr>
+            <a:picLocks noChangeAspect="1"/>
+          </p:cNvPicPr>
+          <p:nvPr/>
+        </p:nvPicPr>
+        <p:blipFill>
+          <a:blip r:embed="rId2"/>
+          <a:stretch>
+            <a:fillRect/>
+          </a:stretch>
+        </p:blipFill>
+        <p:spPr>
+          <a:xfrm>
+            <a:off x="13372092" y="265430"/>
+            <a:ext cx="1258308" cy="434340"/>
+          </a:xfrm>
+          <a:prstGeom prst="rect">
+            <a:avLst/>
+          </a:prstGeom>
+        </p:spPr>
+      </p:pic>
+      <p:sp>
+        <p:nvSpPr>
+          <p:cNvPr id="4" name="DAY BOX 1"/>
+          <p:cNvSpPr/>
+          <p:nvPr/>
+        </p:nvSpPr>
+        <p:spPr>
+          <a:xfrm>
+            <a:off x="457200" y="914400"/>
+            <a:ext cx="2724912" cy="941070"/>
+          </a:xfrm>
+          <a:prstGeom prst="rect">
+            <a:avLst/>
+          </a:prstGeom>
+          <a:solidFill>
+            <a:srgbClr val="FFFFFF"/>
+          </a:solidFill>
+          <a:ln w="9525">
+            <a:solidFill>
+              <a:srgbClr val="D3D8DE"/>
+            </a:solidFill>
+          </a:ln>
+          <a:effectLst/>
+        </p:spPr>
+        <p:style>
+          <a:lnRef idx="1">
+            <a:schemeClr val="accent1"/>
+          </a:lnRef>
+          <a:fillRef idx="3">
+            <a:schemeClr val="accent1"/>
+          </a:fillRef>
+          <a:effectRef idx="2">
+            <a:schemeClr val="accent1"/>
+          </a:effectRef>
+          <a:fontRef idx="minor">
+            <a:schemeClr val="lt1"/>
+          </a:fontRef>
+        </p:style>
+        <p:txBody>
+          <a:bodyPr rtlCol="0" anchor="ctr" wrap="square"/>
+          <a:lstStyle/>
+          <a:p>
+            <a:pPr algn="ctr"/>
+          </a:p>
+        </p:txBody>
+      </p:sp>
+      <p:sp>
+        <p:nvSpPr>
+          <p:cNvPr id="5" name="DAY BAR 1"/>
+          <p:cNvSpPr/>
+          <p:nvPr/>
+        </p:nvSpPr>
+        <p:spPr>
+          <a:xfrm>
+            <a:off x="457200" y="914400"/>
+            <a:ext cx="2724912" cy="320040"/>
+          </a:xfrm>
+          <a:prstGeom prst="rect">
+            <a:avLst/>
+          </a:prstGeom>
+          <a:solidFill>
+            <a:srgbClr val="1E2761"/>
+          </a:solidFill>
+          <a:ln w="9525">
+            <a:solidFill>
+              <a:srgbClr val="1E2761"/>
+            </a:solidFill>
+          </a:ln>
+          <a:effectLst/>
+        </p:spPr>
+        <p:style>
+          <a:lnRef idx="1">
+            <a:schemeClr val="accent1"/>
+          </a:lnRef>
+          <a:fillRef idx="3">
+            <a:schemeClr val="accent1"/>
+          </a:fillRef>
+          <a:effectRef idx="2">
+            <a:schemeClr val="accent1"/>
+          </a:effectRef>
+          <a:fontRef idx="minor">
+            <a:schemeClr val="lt1"/>
+          </a:fontRef>
+        </p:style>
+        <p:txBody>
+          <a:bodyPr rtlCol="0" anchor="ctr" wrap="square"/>
+          <a:lstStyle/>
+          <a:p>
+            <a:pPr algn="ctr"/>
+            <a:r>
+              <a:rPr sz="1100" b="1" i="0">
+                <a:solidFill>
+                  <a:srgbClr val="FFFFFF"/>
+                </a:solidFill>
+                <a:latin typeface="Arial"/>
+              </a:rPr>
+              <a:t>DAY 1</a:t>
+            </a:r>
+          </a:p>
+        </p:txBody>
+      </p:sp>
+      <p:sp>
+        <p:nvSpPr>
+          <p:cNvPr id="6" name="DAY TXT 1"/>
+          <p:cNvSpPr txBox="1"/>
+          <p:nvPr/>
+        </p:nvSpPr>
+        <p:spPr>
+          <a:xfrm>
+            <a:off x="594360" y="1362456"/>
+            <a:ext cx="2450592" cy="640080"/>
+          </a:xfrm>
+          <a:prstGeom prst="rect">
+            <a:avLst/>
+          </a:prstGeom>
+          <a:noFill/>
+        </p:spPr>
+        <p:txBody>
+          <a:bodyPr wrap="square" lIns="0" rIns="0" tIns="0" bIns="0">
+            <a:spAutoFit/>
+          </a:bodyPr>
+          <a:lstStyle/>
+          <a:p>
+            <a:pPr>
+              <a:spcAft>
+                <a:spcPts val="400"/>
+              </a:spcAft>
+            </a:pPr>
+            <a:r>
+              <a:rPr sz="950" b="1" i="0">
+                <a:solidFill>
+                  <a:srgbClr val="1E2761"/>
+                </a:solidFill>
+                <a:latin typeface="Arial"/>
+              </a:rPr>
+              <a:t>SETTING-OUT &amp; SAW CUT START</a:t>
+            </a:r>
+          </a:p>
+          <a:p>
+            <a:pPr>
+              <a:spcAft>
+                <a:spcPts val="400"/>
+              </a:spcAft>
+            </a:pPr>
+            <a:r>
+              <a:rPr sz="850" b="0" i="0">
+                <a:solidFill>
+                  <a:srgbClr val="5F6368"/>
+                </a:solidFill>
+                <a:latin typeface="Arial"/>
+              </a:rPr>
+              <a:t>LOC-01</a:t>
+            </a:r>
+          </a:p>
+        </p:txBody>
+      </p:sp>
+      <p:sp>
+        <p:nvSpPr>
+          <p:cNvPr id="7" name="DAY BOX 2"/>
+          <p:cNvSpPr/>
+          <p:nvPr/>
+        </p:nvSpPr>
+        <p:spPr>
+          <a:xfrm>
+            <a:off x="3319272" y="914400"/>
+            <a:ext cx="2724912" cy="941070"/>
+          </a:xfrm>
+          <a:prstGeom prst="rect">
+            <a:avLst/>
+          </a:prstGeom>
+          <a:solidFill>
+            <a:srgbClr val="FFFFFF"/>
+          </a:solidFill>
+          <a:ln w="9525">
+            <a:solidFill>
+              <a:srgbClr val="D3D8DE"/>
+            </a:solidFill>
+          </a:ln>
+          <a:effectLst/>
+        </p:spPr>
+        <p:style>
+          <a:lnRef idx="1">
+            <a:schemeClr val="accent1"/>
+          </a:lnRef>
+          <a:fillRef idx="3">
+            <a:schemeClr val="accent1"/>
+          </a:fillRef>
+          <a:effectRef idx="2">
+            <a:schemeClr val="accent1"/>
+          </a:effectRef>
+          <a:fontRef idx="minor">
+            <a:schemeClr val="lt1"/>
+          </a:fontRef>
+        </p:style>
+        <p:txBody>
+          <a:bodyPr rtlCol="0" anchor="ctr" wrap="square"/>
+          <a:lstStyle/>
+          <a:p>
+            <a:pPr algn="ctr"/>
+          </a:p>
+        </p:txBody>
+      </p:sp>
+      <p:sp>
+        <p:nvSpPr>
+          <p:cNvPr id="8" name="DAY BAR 2"/>
+          <p:cNvSpPr/>
+          <p:nvPr/>
+        </p:nvSpPr>
+        <p:spPr>
+          <a:xfrm>
+            <a:off x="3319272" y="914400"/>
+            <a:ext cx="2724912" cy="320040"/>
+          </a:xfrm>
+          <a:prstGeom prst="rect">
+            <a:avLst/>
+          </a:prstGeom>
+          <a:solidFill>
+            <a:srgbClr val="1E2761"/>
+          </a:solidFill>
+          <a:ln w="9525">
+            <a:solidFill>
+              <a:srgbClr val="1E2761"/>
+            </a:solidFill>
+          </a:ln>
+          <a:effectLst/>
+        </p:spPr>
+        <p:style>
+          <a:lnRef idx="1">
+            <a:schemeClr val="accent1"/>
+          </a:lnRef>
+          <a:fillRef idx="3">
+            <a:schemeClr val="accent1"/>
+          </a:fillRef>
+          <a:effectRef idx="2">
+            <a:schemeClr val="accent1"/>
+          </a:effectRef>
+          <a:fontRef idx="minor">
+            <a:schemeClr val="lt1"/>
+          </a:fontRef>
+        </p:style>
+        <p:txBody>
+          <a:bodyPr rtlCol="0" anchor="ctr" wrap="square"/>
+          <a:lstStyle/>
+          <a:p>
+            <a:pPr algn="ctr"/>
+            <a:r>
+              <a:rPr sz="1100" b="1" i="0">
+                <a:solidFill>
+                  <a:srgbClr val="FFFFFF"/>
+                </a:solidFill>
+                <a:latin typeface="Arial"/>
+              </a:rPr>
+              <a:t>DAY 2</a:t>
+            </a:r>
+          </a:p>
+        </p:txBody>
+      </p:sp>
+      <p:sp>
+        <p:nvSpPr>
+          <p:cNvPr id="9" name="DAY TXT 2"/>
+          <p:cNvSpPr txBox="1"/>
+          <p:nvPr/>
+        </p:nvSpPr>
+        <p:spPr>
+          <a:xfrm>
+            <a:off x="3456432" y="1362456"/>
+            <a:ext cx="2450592" cy="640080"/>
+          </a:xfrm>
+          <a:prstGeom prst="rect">
+            <a:avLst/>
+          </a:prstGeom>
+          <a:noFill/>
+        </p:spPr>
+        <p:txBody>
+          <a:bodyPr wrap="square" lIns="0" rIns="0" tIns="0" bIns="0">
+            <a:spAutoFit/>
+          </a:bodyPr>
+          <a:lstStyle/>
+          <a:p>
+            <a:pPr>
+              <a:spcAft>
+                <a:spcPts val="400"/>
+              </a:spcAft>
+            </a:pPr>
+            <a:r>
+              <a:rPr sz="950" b="1" i="0">
+                <a:solidFill>
+                  <a:srgbClr val="1E2761"/>
+                </a:solidFill>
+                <a:latin typeface="Arial"/>
+              </a:rPr>
+              <a:t>SAW CUT COMPLETE · NEW BASES</a:t>
+            </a:r>
+          </a:p>
+          <a:p>
+            <a:pPr>
+              <a:spcAft>
+                <a:spcPts val="400"/>
+              </a:spcAft>
+            </a:pPr>
+            <a:r>
+              <a:rPr sz="850" b="0" i="0">
+                <a:solidFill>
+                  <a:srgbClr val="5F6368"/>
+                </a:solidFill>
+                <a:latin typeface="Arial"/>
+              </a:rPr>
+              <a:t>LOC-01</a:t>
+            </a:r>
+          </a:p>
+        </p:txBody>
+      </p:sp>
+      <p:sp>
+        <p:nvSpPr>
+          <p:cNvPr id="10" name="DAY BOX 3"/>
+          <p:cNvSpPr/>
+          <p:nvPr/>
+        </p:nvSpPr>
+        <p:spPr>
+          <a:xfrm>
+            <a:off x="6181344" y="914400"/>
+            <a:ext cx="2724912" cy="941070"/>
+          </a:xfrm>
+          <a:prstGeom prst="rect">
+            <a:avLst/>
+          </a:prstGeom>
+          <a:solidFill>
+            <a:srgbClr val="FFFFFF"/>
+          </a:solidFill>
+          <a:ln w="9525">
+            <a:solidFill>
+              <a:srgbClr val="D3D8DE"/>
+            </a:solidFill>
+          </a:ln>
+          <a:effectLst/>
+        </p:spPr>
+        <p:style>
+          <a:lnRef idx="1">
+            <a:schemeClr val="accent1"/>
+          </a:lnRef>
+          <a:fillRef idx="3">
+            <a:schemeClr val="accent1"/>
+          </a:fillRef>
+          <a:effectRef idx="2">
+            <a:schemeClr val="accent1"/>
+          </a:effectRef>
+          <a:fontRef idx="minor">
+            <a:schemeClr val="lt1"/>
+          </a:fontRef>
+        </p:style>
+        <p:txBody>
+          <a:bodyPr rtlCol="0" anchor="ctr" wrap="square"/>
+          <a:lstStyle/>
+          <a:p>
+            <a:pPr algn="ctr"/>
+          </a:p>
+        </p:txBody>
+      </p:sp>
+      <p:sp>
+        <p:nvSpPr>
+          <p:cNvPr id="11" name="DAY BAR 3"/>
+          <p:cNvSpPr/>
+          <p:nvPr/>
+        </p:nvSpPr>
+        <p:spPr>
+          <a:xfrm>
+            <a:off x="6181344" y="914400"/>
+            <a:ext cx="2724912" cy="320040"/>
+          </a:xfrm>
+          <a:prstGeom prst="rect">
+            <a:avLst/>
+          </a:prstGeom>
+          <a:solidFill>
+            <a:srgbClr val="1E2761"/>
+          </a:solidFill>
+          <a:ln w="9525">
+            <a:solidFill>
+              <a:srgbClr val="1E2761"/>
+            </a:solidFill>
+          </a:ln>
+          <a:effectLst/>
+        </p:spPr>
+        <p:style>
+          <a:lnRef idx="1">
+            <a:schemeClr val="accent1"/>
+          </a:lnRef>
+          <a:fillRef idx="3">
+            <a:schemeClr val="accent1"/>
+          </a:fillRef>
+          <a:effectRef idx="2">
+            <a:schemeClr val="accent1"/>
+          </a:effectRef>
+          <a:fontRef idx="minor">
+            <a:schemeClr val="lt1"/>
+          </a:fontRef>
+        </p:style>
+        <p:txBody>
+          <a:bodyPr rtlCol="0" anchor="ctr" wrap="square"/>
+          <a:lstStyle/>
+          <a:p>
+            <a:pPr algn="ctr"/>
+            <a:r>
+              <a:rPr sz="1100" b="1" i="0">
+                <a:solidFill>
+                  <a:srgbClr val="FFFFFF"/>
+                </a:solidFill>
+                <a:latin typeface="Arial"/>
+              </a:rPr>
+              <a:t>DAY 3</a:t>
+            </a:r>
+          </a:p>
+        </p:txBody>
+      </p:sp>
+      <p:sp>
+        <p:nvSpPr>
+          <p:cNvPr id="12" name="DAY TXT 3"/>
+          <p:cNvSpPr txBox="1"/>
+          <p:nvPr/>
+        </p:nvSpPr>
+        <p:spPr>
+          <a:xfrm>
+            <a:off x="6318504" y="1362456"/>
+            <a:ext cx="2450592" cy="640080"/>
+          </a:xfrm>
+          <a:prstGeom prst="rect">
+            <a:avLst/>
+          </a:prstGeom>
+          <a:noFill/>
+        </p:spPr>
+        <p:txBody>
+          <a:bodyPr wrap="square" lIns="0" rIns="0" tIns="0" bIns="0">
+            <a:spAutoFit/>
+          </a:bodyPr>
+          <a:lstStyle/>
+          <a:p>
+            <a:pPr>
+              <a:spcAft>
+                <a:spcPts val="400"/>
+              </a:spcAft>
+            </a:pPr>
+            <a:r>
+              <a:rPr sz="950" b="1" i="0">
+                <a:solidFill>
+                  <a:srgbClr val="1E2761"/>
+                </a:solidFill>
+                <a:latin typeface="Arial"/>
+              </a:rPr>
+              <a:t>SAW CUT &amp; BASES · FIRST CABLE</a:t>
+            </a:r>
+          </a:p>
+          <a:p>
+            <a:pPr>
+              <a:spcAft>
+                <a:spcPts val="400"/>
+              </a:spcAft>
+            </a:pPr>
+            <a:r>
+              <a:rPr sz="850" b="0" i="0">
+                <a:solidFill>
+                  <a:srgbClr val="5F6368"/>
+                </a:solidFill>
+                <a:latin typeface="Arial"/>
+              </a:rPr>
+              <a:t>LOC-02 / 03 · LOC-01</a:t>
+            </a:r>
+          </a:p>
+        </p:txBody>
+      </p:sp>
+      <p:sp>
+        <p:nvSpPr>
+          <p:cNvPr id="13" name="DAY BOX 4"/>
+          <p:cNvSpPr/>
+          <p:nvPr/>
+        </p:nvSpPr>
+        <p:spPr>
+          <a:xfrm>
+            <a:off x="9043416" y="914400"/>
+            <a:ext cx="2724912" cy="941070"/>
+          </a:xfrm>
+          <a:prstGeom prst="rect">
+            <a:avLst/>
+          </a:prstGeom>
+          <a:solidFill>
+            <a:srgbClr val="FFFFFF"/>
+          </a:solidFill>
+          <a:ln w="9525">
+            <a:solidFill>
+              <a:srgbClr val="D3D8DE"/>
+            </a:solidFill>
+          </a:ln>
+          <a:effectLst/>
+        </p:spPr>
+        <p:style>
+          <a:lnRef idx="1">
+            <a:schemeClr val="accent1"/>
+          </a:lnRef>
+          <a:fillRef idx="3">
+            <a:schemeClr val="accent1"/>
+          </a:fillRef>
+          <a:effectRef idx="2">
+            <a:schemeClr val="accent1"/>
+          </a:effectRef>
+          <a:fontRef idx="minor">
+            <a:schemeClr val="lt1"/>
+          </a:fontRef>
+        </p:style>
+        <p:txBody>
+          <a:bodyPr rtlCol="0" anchor="ctr" wrap="square"/>
+          <a:lstStyle/>
+          <a:p>
+            <a:pPr algn="ctr"/>
+          </a:p>
+        </p:txBody>
+      </p:sp>
+      <p:sp>
+        <p:nvSpPr>
+          <p:cNvPr id="14" name="DAY BAR 4"/>
+          <p:cNvSpPr/>
+          <p:nvPr/>
+        </p:nvSpPr>
+        <p:spPr>
+          <a:xfrm>
+            <a:off x="9043416" y="914400"/>
+            <a:ext cx="2724912" cy="320040"/>
+          </a:xfrm>
+          <a:prstGeom prst="rect">
+            <a:avLst/>
+          </a:prstGeom>
+          <a:solidFill>
+            <a:srgbClr val="1E2761"/>
+          </a:solidFill>
+          <a:ln w="9525">
+            <a:solidFill>
+              <a:srgbClr val="1E2761"/>
+            </a:solidFill>
+          </a:ln>
+          <a:effectLst/>
+        </p:spPr>
+        <p:style>
+          <a:lnRef idx="1">
+            <a:schemeClr val="accent1"/>
+          </a:lnRef>
+          <a:fillRef idx="3">
+            <a:schemeClr val="accent1"/>
+          </a:fillRef>
+          <a:effectRef idx="2">
+            <a:schemeClr val="accent1"/>
+          </a:effectRef>
+          <a:fontRef idx="minor">
+            <a:schemeClr val="lt1"/>
+          </a:fontRef>
+        </p:style>
+        <p:txBody>
+          <a:bodyPr rtlCol="0" anchor="ctr" wrap="square"/>
+          <a:lstStyle/>
+          <a:p>
+            <a:pPr algn="ctr"/>
+            <a:r>
+              <a:rPr sz="1100" b="1" i="0">
+                <a:solidFill>
+                  <a:srgbClr val="FFFFFF"/>
+                </a:solidFill>
+                <a:latin typeface="Arial"/>
+              </a:rPr>
+              <a:t>DAY 4</a:t>
+            </a:r>
+          </a:p>
+        </p:txBody>
+      </p:sp>
+      <p:sp>
+        <p:nvSpPr>
+          <p:cNvPr id="15" name="DAY TXT 4"/>
+          <p:cNvSpPr txBox="1"/>
+          <p:nvPr/>
+        </p:nvSpPr>
+        <p:spPr>
+          <a:xfrm>
+            <a:off x="9180576" y="1362456"/>
+            <a:ext cx="2450592" cy="640080"/>
+          </a:xfrm>
+          <a:prstGeom prst="rect">
+            <a:avLst/>
+          </a:prstGeom>
+          <a:noFill/>
+        </p:spPr>
+        <p:txBody>
+          <a:bodyPr wrap="square" lIns="0" rIns="0" tIns="0" bIns="0">
+            <a:spAutoFit/>
+          </a:bodyPr>
+          <a:lstStyle/>
+          <a:p>
+            <a:pPr>
+              <a:spcAft>
+                <a:spcPts val="400"/>
+              </a:spcAft>
+            </a:pPr>
+            <a:r>
+              <a:rPr sz="950" b="1" i="0">
+                <a:solidFill>
+                  <a:srgbClr val="1E2761"/>
+                </a:solidFill>
+                <a:latin typeface="Arial"/>
+              </a:rPr>
+              <a:t>CABLE, TERMINATION &amp; TESTING</a:t>
+            </a:r>
+          </a:p>
+          <a:p>
+            <a:pPr>
+              <a:spcAft>
+                <a:spcPts val="400"/>
+              </a:spcAft>
+            </a:pPr>
+            <a:r>
+              <a:rPr sz="850" b="0" i="0">
+                <a:solidFill>
+                  <a:srgbClr val="5F6368"/>
+                </a:solidFill>
+                <a:latin typeface="Arial"/>
+              </a:rPr>
+              <a:t>ALL LOCATIONS</a:t>
+            </a:r>
+          </a:p>
+        </p:txBody>
+      </p:sp>
+      <p:sp>
+        <p:nvSpPr>
+          <p:cNvPr id="16" name="DAY BOX 5"/>
+          <p:cNvSpPr/>
+          <p:nvPr/>
+        </p:nvSpPr>
+        <p:spPr>
+          <a:xfrm>
+            <a:off x="11905488" y="914400"/>
+            <a:ext cx="2724912" cy="941070"/>
+          </a:xfrm>
+          <a:prstGeom prst="rect">
+            <a:avLst/>
+          </a:prstGeom>
+          <a:solidFill>
+            <a:srgbClr val="FFFFFF"/>
+          </a:solidFill>
+          <a:ln w="9525">
+            <a:solidFill>
+              <a:srgbClr val="D3D8DE"/>
+            </a:solidFill>
+          </a:ln>
+          <a:effectLst/>
+        </p:spPr>
+        <p:style>
+          <a:lnRef idx="1">
+            <a:schemeClr val="accent1"/>
+          </a:lnRef>
+          <a:fillRef idx="3">
+            <a:schemeClr val="accent1"/>
+          </a:fillRef>
+          <a:effectRef idx="2">
+            <a:schemeClr val="accent1"/>
+          </a:effectRef>
+          <a:fontRef idx="minor">
+            <a:schemeClr val="lt1"/>
+          </a:fontRef>
+        </p:style>
+        <p:txBody>
+          <a:bodyPr rtlCol="0" anchor="ctr" wrap="square"/>
+          <a:lstStyle/>
+          <a:p>
+            <a:pPr algn="ctr"/>
+          </a:p>
+        </p:txBody>
+      </p:sp>
+      <p:sp>
+        <p:nvSpPr>
+          <p:cNvPr id="17" name="DAY BAR 5"/>
+          <p:cNvSpPr/>
+          <p:nvPr/>
+        </p:nvSpPr>
+        <p:spPr>
+          <a:xfrm>
+            <a:off x="11905488" y="914400"/>
+            <a:ext cx="2724912" cy="320040"/>
+          </a:xfrm>
+          <a:prstGeom prst="rect">
+            <a:avLst/>
+          </a:prstGeom>
+          <a:solidFill>
+            <a:srgbClr val="1E2761"/>
+          </a:solidFill>
+          <a:ln w="9525">
+            <a:solidFill>
+              <a:srgbClr val="1E2761"/>
+            </a:solidFill>
+          </a:ln>
+          <a:effectLst/>
+        </p:spPr>
+        <p:style>
+          <a:lnRef idx="1">
+            <a:schemeClr val="accent1"/>
+          </a:lnRef>
+          <a:fillRef idx="3">
+            <a:schemeClr val="accent1"/>
+          </a:fillRef>
+          <a:effectRef idx="2">
+            <a:schemeClr val="accent1"/>
+          </a:effectRef>
+          <a:fontRef idx="minor">
+            <a:schemeClr val="lt1"/>
+          </a:fontRef>
+        </p:style>
+        <p:txBody>
+          <a:bodyPr rtlCol="0" anchor="ctr" wrap="square"/>
+          <a:lstStyle/>
+          <a:p>
+            <a:pPr algn="ctr"/>
+            <a:r>
+              <a:rPr sz="1100" b="1" i="0">
+                <a:solidFill>
+                  <a:srgbClr val="FFFFFF"/>
+                </a:solidFill>
+                <a:latin typeface="Arial"/>
+              </a:rPr>
+              <a:t>DAY 5</a:t>
+            </a:r>
+          </a:p>
+        </p:txBody>
+      </p:sp>
+      <p:sp>
+        <p:nvSpPr>
+          <p:cNvPr id="18" name="DAY TXT 5"/>
+          <p:cNvSpPr txBox="1"/>
+          <p:nvPr/>
+        </p:nvSpPr>
+        <p:spPr>
+          <a:xfrm>
+            <a:off x="12042648" y="1362456"/>
+            <a:ext cx="2450592" cy="640080"/>
+          </a:xfrm>
+          <a:prstGeom prst="rect">
+            <a:avLst/>
+          </a:prstGeom>
+          <a:noFill/>
+        </p:spPr>
+        <p:txBody>
+          <a:bodyPr wrap="square" lIns="0" rIns="0" tIns="0" bIns="0">
+            <a:spAutoFit/>
+          </a:bodyPr>
+          <a:lstStyle/>
+          <a:p>
+            <a:pPr>
+              <a:spcAft>
+                <a:spcPts val="400"/>
+              </a:spcAft>
+            </a:pPr>
+            <a:r>
+              <a:rPr sz="950" b="1" i="0">
+                <a:solidFill>
+                  <a:srgbClr val="1E2761"/>
+                </a:solidFill>
+                <a:latin typeface="Arial"/>
+              </a:rPr>
+              <a:t>REINSTATEMENT, T&amp;C &amp; HANDOVER</a:t>
+            </a:r>
+          </a:p>
+          <a:p>
+            <a:pPr>
+              <a:spcAft>
+                <a:spcPts val="400"/>
+              </a:spcAft>
+            </a:pPr>
+            <a:r>
+              <a:rPr sz="850" b="0" i="0">
+                <a:solidFill>
+                  <a:srgbClr val="5F6368"/>
+                </a:solidFill>
+                <a:latin typeface="Arial"/>
+              </a:rPr>
+              <a:t>ALL LOCATIONS</a:t>
+            </a:r>
+          </a:p>
+        </p:txBody>
+      </p:sp>
+      <p:sp>
+        <p:nvSpPr>
+          <p:cNvPr id="19" name="P08 PANEL · FIVE-DAY PROGRAMME"/>
+          <p:cNvSpPr/>
+          <p:nvPr/>
+        </p:nvSpPr>
+        <p:spPr>
+          <a:xfrm>
+            <a:off x="457200" y="2129790"/>
+            <a:ext cx="14173200" cy="5268843"/>
+          </a:xfrm>
+          <a:prstGeom prst="rect">
+            <a:avLst/>
+          </a:prstGeom>
+          <a:solidFill>
+            <a:srgbClr val="FFFFFF"/>
+          </a:solidFill>
+          <a:ln w="9525">
+            <a:solidFill>
+              <a:srgbClr val="D3D8DE"/>
+            </a:solidFill>
+          </a:ln>
+          <a:effectLst/>
+        </p:spPr>
+        <p:style>
+          <a:lnRef idx="1">
+            <a:schemeClr val="accent1"/>
+          </a:lnRef>
+          <a:fillRef idx="3">
+            <a:schemeClr val="accent1"/>
+          </a:fillRef>
+          <a:effectRef idx="2">
+            <a:schemeClr val="accent1"/>
+          </a:effectRef>
+          <a:fontRef idx="minor">
+            <a:schemeClr val="lt1"/>
+          </a:fontRef>
+        </p:style>
+        <p:txBody>
+          <a:bodyPr rtlCol="0" anchor="ctr" wrap="square"/>
+          <a:lstStyle/>
+          <a:p>
+            <a:pPr algn="ctr"/>
+          </a:p>
+        </p:txBody>
+      </p:sp>
+      <p:sp>
+        <p:nvSpPr>
+          <p:cNvPr id="20" name="SCHED HDR"/>
+          <p:cNvSpPr txBox="1"/>
+          <p:nvPr/>
+        </p:nvSpPr>
+        <p:spPr>
+          <a:xfrm>
+            <a:off x="603504" y="2239518"/>
+            <a:ext cx="13880592" cy="237744"/>
+          </a:xfrm>
+          <a:prstGeom prst="rect">
+            <a:avLst/>
+          </a:prstGeom>
+          <a:noFill/>
+        </p:spPr>
+        <p:txBody>
+          <a:bodyPr wrap="square" lIns="0" rIns="0" tIns="0" bIns="0">
+            <a:spAutoFit/>
+          </a:bodyPr>
+          <a:lstStyle/>
+          <a:p>
+            <a:pPr>
+              <a:spcAft>
+                <a:spcPts val="400"/>
+              </a:spcAft>
+            </a:pPr>
+            <a:r>
+              <a:rPr sz="950" b="1" i="0">
+                <a:solidFill>
+                  <a:srgbClr val="1E2761"/>
+                </a:solidFill>
+                <a:latin typeface="Arial"/>
+              </a:rPr>
+              <a:t>FIVE-DAY PROGRAMME — PHASE 3 AGL INSTALLATION</a:t>
+            </a:r>
+          </a:p>
+        </p:txBody>
+      </p:sp>
+      <p:graphicFrame>
+        <p:nvGraphicFramePr>
+          <p:cNvPr id="21" name="Table SCHEDULE"/>
+          <p:cNvGraphicFramePr>
+            <a:graphicFrameLocks noGrp="1"/>
+          </p:cNvGraphicFramePr>
+          <p:nvPr/>
+        </p:nvGraphicFramePr>
+        <p:xfrm>
+          <a:off x="603504" y="2605278"/>
+          <a:ext cx="13880592" cy="4656195"/>
+        </p:xfrm>
+        <a:graphic>
+          <a:graphicData uri="http://schemas.openxmlformats.org/drawingml/2006/table">
+            <a:tbl>
+              <a:tblPr>
+                <a:tableStyleId>{5C22544A-7EE6-4342-B048-85BDC9FD1C3A}</a:tableStyleId>
+              </a:tblPr>
+              <a:tblGrid>
+                <a:gridCol w="640080"/>
+                <a:gridCol w="4297680"/>
+                <a:gridCol w="1371600"/>
+                <a:gridCol w="1600200"/>
+                <a:gridCol w="1828800"/>
+                <a:gridCol w="4142232"/>
+              </a:tblGrid>
+              <a:tr h="310413">
+                <a:tc>
+                  <a:txBody>
+                    <a:bodyPr/>
+                    <a:lstStyle/>
+                    <a:p>
+                      <a:r>
+                        <a:rPr sz="900" b="1" i="0">
+                          <a:solidFill>
+                            <a:srgbClr val="FFFFFF"/>
+                          </a:solidFill>
+                          <a:latin typeface="Arial"/>
+                        </a:rPr>
+                        <a:t>Day</a:t>
+                      </a:r>
+                    </a:p>
+                  </a:txBody>
+                  <a:tcPr marL="91440" marR="91440" marT="45720" marB="45720">
+                    <a:lnB w="6350" cap="flat" cmpd="sng" algn="ctr">
+                      <a:solidFill>
+                        <a:srgbClr val="C8CDD3"/>
+                      </a:solidFill>
+                    </a:lnB>
+                    <a:lnT w="6350" cap="flat" cmpd="sng" algn="ctr">
+                      <a:solidFill>
+                        <a:srgbClr val="C8CDD3"/>
+                      </a:solidFill>
+                    </a:lnT>
+                    <a:lnR w="6350" cap="flat" cmpd="sng" algn="ctr">
+                      <a:solidFill>
+                        <a:srgbClr val="C8CDD3"/>
+                      </a:solidFill>
+                    </a:lnR>
+                    <a:lnL w="6350" cap="flat" cmpd="sng" algn="ctr">
+                      <a:solidFill>
+                        <a:srgbClr val="C8CDD3"/>
+                      </a:solidFill>
+                    </a:lnL>
+                    <a:solidFill>
+                      <a:srgbClr val="1E2761"/>
+                    </a:solidFill>
+                  </a:tcPr>
+                </a:tc>
+                <a:tc>
+                  <a:txBody>
+                    <a:bodyPr/>
+                    <a:lstStyle/>
+                    <a:p>
+                      <a:r>
+                        <a:rPr sz="900" b="1" i="0">
+                          <a:solidFill>
+                            <a:srgbClr val="FFFFFF"/>
+                          </a:solidFill>
+                          <a:latin typeface="Arial"/>
+                        </a:rPr>
+                        <a:t>Phase 3 activity</a:t>
+                      </a:r>
+                    </a:p>
+                  </a:txBody>
+                  <a:tcPr marL="91440" marR="91440" marT="45720" marB="45720">
+                    <a:lnB w="6350" cap="flat" cmpd="sng" algn="ctr">
+                      <a:solidFill>
+                        <a:srgbClr val="C8CDD3"/>
+                      </a:solidFill>
+                    </a:lnB>
+                    <a:lnT w="6350" cap="flat" cmpd="sng" algn="ctr">
+                      <a:solidFill>
+                        <a:srgbClr val="C8CDD3"/>
+                      </a:solidFill>
+                    </a:lnT>
+                    <a:lnR w="6350" cap="flat" cmpd="sng" algn="ctr">
+                      <a:solidFill>
+                        <a:srgbClr val="C8CDD3"/>
+                      </a:solidFill>
+                    </a:lnR>
+                    <a:lnL w="6350" cap="flat" cmpd="sng" algn="ctr">
+                      <a:solidFill>
+                        <a:srgbClr val="C8CDD3"/>
+                      </a:solidFill>
+                    </a:lnL>
+                    <a:solidFill>
+                      <a:srgbClr val="1E2761"/>
+                    </a:solidFill>
+                  </a:tcPr>
+                </a:tc>
+                <a:tc>
+                  <a:txBody>
+                    <a:bodyPr/>
+                    <a:lstStyle/>
+                    <a:p>
+                      <a:r>
+                        <a:rPr sz="900" b="1" i="0">
+                          <a:solidFill>
+                            <a:srgbClr val="FFFFFF"/>
+                          </a:solidFill>
+                          <a:latin typeface="Arial"/>
+                        </a:rPr>
+                        <a:t>Location</a:t>
+                      </a:r>
+                    </a:p>
+                  </a:txBody>
+                  <a:tcPr marL="91440" marR="91440" marT="45720" marB="45720">
+                    <a:lnB w="6350" cap="flat" cmpd="sng" algn="ctr">
+                      <a:solidFill>
+                        <a:srgbClr val="C8CDD3"/>
+                      </a:solidFill>
+                    </a:lnB>
+                    <a:lnT w="6350" cap="flat" cmpd="sng" algn="ctr">
+                      <a:solidFill>
+                        <a:srgbClr val="C8CDD3"/>
+                      </a:solidFill>
+                    </a:lnT>
+                    <a:lnR w="6350" cap="flat" cmpd="sng" algn="ctr">
+                      <a:solidFill>
+                        <a:srgbClr val="C8CDD3"/>
+                      </a:solidFill>
+                    </a:lnR>
+                    <a:lnL w="6350" cap="flat" cmpd="sng" algn="ctr">
+                      <a:solidFill>
+                        <a:srgbClr val="C8CDD3"/>
+                      </a:solidFill>
+                    </a:lnL>
+                    <a:solidFill>
+                      <a:srgbClr val="1E2761"/>
+                    </a:solidFill>
+                  </a:tcPr>
+                </a:tc>
+                <a:tc>
+                  <a:txBody>
+                    <a:bodyPr/>
+                    <a:lstStyle/>
+                    <a:p>
+                      <a:r>
+                        <a:rPr sz="900" b="1" i="0">
+                          <a:solidFill>
+                            <a:srgbClr val="FFFFFF"/>
+                          </a:solidFill>
+                          <a:latin typeface="Arial"/>
+                        </a:rPr>
+                        <a:t>Quantity</a:t>
+                      </a:r>
+                    </a:p>
+                  </a:txBody>
+                  <a:tcPr marL="91440" marR="91440" marT="45720" marB="45720">
+                    <a:lnB w="6350" cap="flat" cmpd="sng" algn="ctr">
+                      <a:solidFill>
+                        <a:srgbClr val="C8CDD3"/>
+                      </a:solidFill>
+                    </a:lnB>
+                    <a:lnT w="6350" cap="flat" cmpd="sng" algn="ctr">
+                      <a:solidFill>
+                        <a:srgbClr val="C8CDD3"/>
+                      </a:solidFill>
+                    </a:lnT>
+                    <a:lnR w="6350" cap="flat" cmpd="sng" algn="ctr">
+                      <a:solidFill>
+                        <a:srgbClr val="C8CDD3"/>
+                      </a:solidFill>
+                    </a:lnR>
+                    <a:lnL w="6350" cap="flat" cmpd="sng" algn="ctr">
+                      <a:solidFill>
+                        <a:srgbClr val="C8CDD3"/>
+                      </a:solidFill>
+                    </a:lnL>
+                    <a:solidFill>
+                      <a:srgbClr val="1E2761"/>
+                    </a:solidFill>
+                  </a:tcPr>
+                </a:tc>
+                <a:tc>
+                  <a:txBody>
+                    <a:bodyPr/>
+                    <a:lstStyle/>
+                    <a:p>
+                      <a:r>
+                        <a:rPr sz="900" b="1" i="0">
+                          <a:solidFill>
+                            <a:srgbClr val="FFFFFF"/>
+                          </a:solidFill>
+                          <a:latin typeface="Arial"/>
+                        </a:rPr>
+                        <a:t>Hold point / witness</a:t>
+                      </a:r>
+                    </a:p>
+                  </a:txBody>
+                  <a:tcPr marL="91440" marR="91440" marT="45720" marB="45720">
+                    <a:lnB w="6350" cap="flat" cmpd="sng" algn="ctr">
+                      <a:solidFill>
+                        <a:srgbClr val="C8CDD3"/>
+                      </a:solidFill>
+                    </a:lnB>
+                    <a:lnT w="6350" cap="flat" cmpd="sng" algn="ctr">
+                      <a:solidFill>
+                        <a:srgbClr val="C8CDD3"/>
+                      </a:solidFill>
+                    </a:lnT>
+                    <a:lnR w="6350" cap="flat" cmpd="sng" algn="ctr">
+                      <a:solidFill>
+                        <a:srgbClr val="C8CDD3"/>
+                      </a:solidFill>
+                    </a:lnR>
+                    <a:lnL w="6350" cap="flat" cmpd="sng" algn="ctr">
+                      <a:solidFill>
+                        <a:srgbClr val="C8CDD3"/>
+                      </a:solidFill>
+                    </a:lnL>
+                    <a:solidFill>
+                      <a:srgbClr val="1E2761"/>
+                    </a:solidFill>
+                  </a:tcPr>
+                </a:tc>
+                <a:tc>
+                  <a:txBody>
+                    <a:bodyPr/>
+                    <a:lstStyle/>
+                    <a:p>
+                      <a:r>
+                        <a:rPr sz="900" b="1" i="0">
+                          <a:solidFill>
+                            <a:srgbClr val="FFFFFF"/>
+                          </a:solidFill>
+                          <a:latin typeface="Arial"/>
+                        </a:rPr>
+                        <a:t>Output at the end of the shift</a:t>
+                      </a:r>
+                    </a:p>
+                  </a:txBody>
+                  <a:tcPr marL="91440" marR="91440" marT="45720" marB="45720">
+                    <a:lnB w="6350" cap="flat" cmpd="sng" algn="ctr">
+                      <a:solidFill>
+                        <a:srgbClr val="C8CDD3"/>
+                      </a:solidFill>
+                    </a:lnB>
+                    <a:lnT w="6350" cap="flat" cmpd="sng" algn="ctr">
+                      <a:solidFill>
+                        <a:srgbClr val="C8CDD3"/>
+                      </a:solidFill>
+                    </a:lnT>
+                    <a:lnR w="6350" cap="flat" cmpd="sng" algn="ctr">
+                      <a:solidFill>
+                        <a:srgbClr val="C8CDD3"/>
+                      </a:solidFill>
+                    </a:lnR>
+                    <a:lnL w="6350" cap="flat" cmpd="sng" algn="ctr">
+                      <a:solidFill>
+                        <a:srgbClr val="C8CDD3"/>
+                      </a:solidFill>
+                    </a:lnL>
+                    <a:solidFill>
+                      <a:srgbClr val="1E2761"/>
+                    </a:solidFill>
+                  </a:tcPr>
+                </a:tc>
+              </a:tr>
+              <a:tr h="310413">
+                <a:tc>
+                  <a:txBody>
+                    <a:bodyPr/>
+                    <a:lstStyle/>
+                    <a:p>
+                      <a:r>
+                        <a:rPr sz="800" b="1" i="0">
+                          <a:solidFill>
+                            <a:srgbClr val="1F2937"/>
+                          </a:solidFill>
+                          <a:latin typeface="Arial"/>
+                        </a:rPr>
+                        <a:t>1</a:t>
+                      </a:r>
+                    </a:p>
+                  </a:txBody>
+                  <a:tcPr marL="91440" marR="91440" marT="45720" marB="45720">
+                    <a:lnB w="6350" cap="flat" cmpd="sng" algn="ctr">
+                      <a:solidFill>
+                        <a:srgbClr val="C8CDD3"/>
+                      </a:solidFill>
+                    </a:lnB>
+                    <a:lnT w="6350" cap="flat" cmpd="sng" algn="ctr">
+                      <a:solidFill>
+                        <a:srgbClr val="C8CDD3"/>
+                      </a:solidFill>
+                    </a:lnT>
+                    <a:lnR w="6350" cap="flat" cmpd="sng" algn="ctr">
+                      <a:solidFill>
+                        <a:srgbClr val="C8CDD3"/>
+                      </a:solidFill>
+                    </a:lnR>
+                    <a:lnL w="6350" cap="flat" cmpd="sng" algn="ctr">
+                      <a:solidFill>
+                        <a:srgbClr val="C8CDD3"/>
+                      </a:solidFill>
+                    </a:lnL>
+                    <a:solidFill>
+                      <a:srgbClr val="FFFFFF"/>
+                    </a:solidFill>
+                  </a:tcPr>
+                </a:tc>
+                <a:tc>
+                  <a:txBody>
+                    <a:bodyPr/>
+                    <a:lstStyle/>
+                    <a:p>
+                      <a:r>
+                        <a:rPr sz="800" b="0" i="0">
+                          <a:solidFill>
+                            <a:srgbClr val="1F2937"/>
+                          </a:solidFill>
+                          <a:latin typeface="Arial"/>
+                        </a:rPr>
+                        <a:t>Setting-out from the civil survey points; area protection and lighting</a:t>
+                      </a:r>
+                    </a:p>
+                  </a:txBody>
+                  <a:tcPr marL="91440" marR="91440" marT="45720" marB="45720">
+                    <a:lnB w="6350" cap="flat" cmpd="sng" algn="ctr">
+                      <a:solidFill>
+                        <a:srgbClr val="C8CDD3"/>
+                      </a:solidFill>
+                    </a:lnB>
+                    <a:lnT w="6350" cap="flat" cmpd="sng" algn="ctr">
+                      <a:solidFill>
+                        <a:srgbClr val="C8CDD3"/>
+                      </a:solidFill>
+                    </a:lnT>
+                    <a:lnR w="6350" cap="flat" cmpd="sng" algn="ctr">
+                      <a:solidFill>
+                        <a:srgbClr val="C8CDD3"/>
+                      </a:solidFill>
+                    </a:lnR>
+                    <a:lnL w="6350" cap="flat" cmpd="sng" algn="ctr">
+                      <a:solidFill>
+                        <a:srgbClr val="C8CDD3"/>
+                      </a:solidFill>
+                    </a:lnL>
+                    <a:solidFill>
+                      <a:srgbClr val="FFFFFF"/>
+                    </a:solidFill>
+                  </a:tcPr>
+                </a:tc>
+                <a:tc>
+                  <a:txBody>
+                    <a:bodyPr/>
+                    <a:lstStyle/>
+                    <a:p>
+                      <a:r>
+                        <a:rPr sz="800" b="0" i="0">
+                          <a:solidFill>
+                            <a:srgbClr val="1F2937"/>
+                          </a:solidFill>
+                          <a:latin typeface="Arial"/>
+                        </a:rPr>
+                        <a:t>LOC-01 / 02 / 03</a:t>
+                      </a:r>
+                    </a:p>
+                  </a:txBody>
+                  <a:tcPr marL="91440" marR="91440" marT="45720" marB="45720">
+                    <a:lnB w="6350" cap="flat" cmpd="sng" algn="ctr">
+                      <a:solidFill>
+                        <a:srgbClr val="C8CDD3"/>
+                      </a:solidFill>
+                    </a:lnB>
+                    <a:lnT w="6350" cap="flat" cmpd="sng" algn="ctr">
+                      <a:solidFill>
+                        <a:srgbClr val="C8CDD3"/>
+                      </a:solidFill>
+                    </a:lnT>
+                    <a:lnR w="6350" cap="flat" cmpd="sng" algn="ctr">
+                      <a:solidFill>
+                        <a:srgbClr val="C8CDD3"/>
+                      </a:solidFill>
+                    </a:lnR>
+                    <a:lnL w="6350" cap="flat" cmpd="sng" algn="ctr">
+                      <a:solidFill>
+                        <a:srgbClr val="C8CDD3"/>
+                      </a:solidFill>
+                    </a:lnL>
+                    <a:solidFill>
+                      <a:srgbClr val="FFFFFF"/>
+                    </a:solidFill>
+                  </a:tcPr>
+                </a:tc>
+                <a:tc>
+                  <a:txBody>
+                    <a:bodyPr/>
+                    <a:lstStyle/>
+                    <a:p>
+                      <a:r>
+                        <a:rPr sz="800" b="0" i="0">
+                          <a:solidFill>
+                            <a:srgbClr val="1F2937"/>
+                          </a:solidFill>
+                          <a:latin typeface="Arial"/>
+                        </a:rPr>
+                        <a:t>3 No. locations</a:t>
+                      </a:r>
+                    </a:p>
+                  </a:txBody>
+                  <a:tcPr marL="91440" marR="91440" marT="45720" marB="45720">
+                    <a:lnB w="6350" cap="flat" cmpd="sng" algn="ctr">
+                      <a:solidFill>
+                        <a:srgbClr val="C8CDD3"/>
+                      </a:solidFill>
+                    </a:lnB>
+                    <a:lnT w="6350" cap="flat" cmpd="sng" algn="ctr">
+                      <a:solidFill>
+                        <a:srgbClr val="C8CDD3"/>
+                      </a:solidFill>
+                    </a:lnT>
+                    <a:lnR w="6350" cap="flat" cmpd="sng" algn="ctr">
+                      <a:solidFill>
+                        <a:srgbClr val="C8CDD3"/>
+                      </a:solidFill>
+                    </a:lnR>
+                    <a:lnL w="6350" cap="flat" cmpd="sng" algn="ctr">
+                      <a:solidFill>
+                        <a:srgbClr val="C8CDD3"/>
+                      </a:solidFill>
+                    </a:lnL>
+                    <a:solidFill>
+                      <a:srgbClr val="FFFFFF"/>
+                    </a:solidFill>
+                  </a:tcPr>
+                </a:tc>
+                <a:tc>
+                  <a:txBody>
+                    <a:bodyPr/>
+                    <a:lstStyle/>
+                    <a:p>
+                      <a:r>
+                        <a:rPr sz="800" b="0" i="0">
+                          <a:solidFill>
+                            <a:srgbClr val="1F2937"/>
+                          </a:solidFill>
+                          <a:latin typeface="Arial"/>
+                        </a:rPr>
+                        <a:t>H2 — civil survey</a:t>
+                      </a:r>
+                    </a:p>
+                  </a:txBody>
+                  <a:tcPr marL="91440" marR="91440" marT="45720" marB="45720">
+                    <a:lnB w="6350" cap="flat" cmpd="sng" algn="ctr">
+                      <a:solidFill>
+                        <a:srgbClr val="C8CDD3"/>
+                      </a:solidFill>
+                    </a:lnB>
+                    <a:lnT w="6350" cap="flat" cmpd="sng" algn="ctr">
+                      <a:solidFill>
+                        <a:srgbClr val="C8CDD3"/>
+                      </a:solidFill>
+                    </a:lnT>
+                    <a:lnR w="6350" cap="flat" cmpd="sng" algn="ctr">
+                      <a:solidFill>
+                        <a:srgbClr val="C8CDD3"/>
+                      </a:solidFill>
+                    </a:lnR>
+                    <a:lnL w="6350" cap="flat" cmpd="sng" algn="ctr">
+                      <a:solidFill>
+                        <a:srgbClr val="C8CDD3"/>
+                      </a:solidFill>
+                    </a:lnL>
+                    <a:solidFill>
+                      <a:srgbClr val="FFFFFF"/>
+                    </a:solidFill>
+                  </a:tcPr>
+                </a:tc>
+                <a:tc>
+                  <a:txBody>
+                    <a:bodyPr/>
+                    <a:lstStyle/>
+                    <a:p>
+                      <a:r>
+                        <a:rPr sz="800" b="0" i="0">
+                          <a:solidFill>
+                            <a:srgbClr val="1F2937"/>
+                          </a:solidFill>
+                          <a:latin typeface="Arial"/>
+                        </a:rPr>
+                        <a:t>Field points confirmed and marked</a:t>
+                      </a:r>
+                    </a:p>
+                  </a:txBody>
+                  <a:tcPr marL="91440" marR="91440" marT="45720" marB="45720">
+                    <a:lnB w="6350" cap="flat" cmpd="sng" algn="ctr">
+                      <a:solidFill>
+                        <a:srgbClr val="C8CDD3"/>
+                      </a:solidFill>
+                    </a:lnB>
+                    <a:lnT w="6350" cap="flat" cmpd="sng" algn="ctr">
+                      <a:solidFill>
+                        <a:srgbClr val="C8CDD3"/>
+                      </a:solidFill>
+                    </a:lnT>
+                    <a:lnR w="6350" cap="flat" cmpd="sng" algn="ctr">
+                      <a:solidFill>
+                        <a:srgbClr val="C8CDD3"/>
+                      </a:solidFill>
+                    </a:lnR>
+                    <a:lnL w="6350" cap="flat" cmpd="sng" algn="ctr">
+                      <a:solidFill>
+                        <a:srgbClr val="C8CDD3"/>
+                      </a:solidFill>
+                    </a:lnL>
+                    <a:solidFill>
+                      <a:srgbClr val="FFFFFF"/>
+                    </a:solidFill>
+                  </a:tcPr>
+                </a:tc>
+              </a:tr>
+              <a:tr h="310413">
+                <a:tc>
+                  <a:txBody>
+                    <a:bodyPr/>
+                    <a:lstStyle/>
+                    <a:p>
+                      <a:r>
+                        <a:rPr sz="800" b="1" i="0">
+                          <a:solidFill>
+                            <a:srgbClr val="1F2937"/>
+                          </a:solidFill>
+                          <a:latin typeface="Arial"/>
+                        </a:rPr>
+                        <a:t>1</a:t>
+                      </a:r>
+                    </a:p>
+                  </a:txBody>
+                  <a:tcPr marL="91440" marR="91440" marT="45720" marB="45720">
+                    <a:lnB w="6350" cap="flat" cmpd="sng" algn="ctr">
+                      <a:solidFill>
+                        <a:srgbClr val="C8CDD3"/>
+                      </a:solidFill>
+                    </a:lnB>
+                    <a:lnT w="6350" cap="flat" cmpd="sng" algn="ctr">
+                      <a:solidFill>
+                        <a:srgbClr val="C8CDD3"/>
+                      </a:solidFill>
+                    </a:lnT>
+                    <a:lnR w="6350" cap="flat" cmpd="sng" algn="ctr">
+                      <a:solidFill>
+                        <a:srgbClr val="C8CDD3"/>
+                      </a:solidFill>
+                    </a:lnR>
+                    <a:lnL w="6350" cap="flat" cmpd="sng" algn="ctr">
+                      <a:solidFill>
+                        <a:srgbClr val="C8CDD3"/>
+                      </a:solidFill>
+                    </a:lnL>
+                    <a:solidFill>
+                      <a:srgbClr val="FFFFFF"/>
+                    </a:solidFill>
+                  </a:tcPr>
+                </a:tc>
+                <a:tc>
+                  <a:txBody>
+                    <a:bodyPr/>
+                    <a:lstStyle/>
+                    <a:p>
+                      <a:r>
+                        <a:rPr sz="800" b="0" i="0">
+                          <a:solidFill>
+                            <a:srgbClr val="1F2937"/>
+                          </a:solidFill>
+                          <a:latin typeface="Arial"/>
+                        </a:rPr>
+                        <a:t>Saw cutting — first part of the secondary cable route</a:t>
+                      </a:r>
+                    </a:p>
+                  </a:txBody>
+                  <a:tcPr marL="91440" marR="91440" marT="45720" marB="45720">
+                    <a:lnB w="6350" cap="flat" cmpd="sng" algn="ctr">
+                      <a:solidFill>
+                        <a:srgbClr val="C8CDD3"/>
+                      </a:solidFill>
+                    </a:lnB>
+                    <a:lnT w="6350" cap="flat" cmpd="sng" algn="ctr">
+                      <a:solidFill>
+                        <a:srgbClr val="C8CDD3"/>
+                      </a:solidFill>
+                    </a:lnT>
+                    <a:lnR w="6350" cap="flat" cmpd="sng" algn="ctr">
+                      <a:solidFill>
+                        <a:srgbClr val="C8CDD3"/>
+                      </a:solidFill>
+                    </a:lnR>
+                    <a:lnL w="6350" cap="flat" cmpd="sng" algn="ctr">
+                      <a:solidFill>
+                        <a:srgbClr val="C8CDD3"/>
+                      </a:solidFill>
+                    </a:lnL>
+                    <a:solidFill>
+                      <a:srgbClr val="FFFFFF"/>
+                    </a:solidFill>
+                  </a:tcPr>
+                </a:tc>
+                <a:tc>
+                  <a:txBody>
+                    <a:bodyPr/>
+                    <a:lstStyle/>
+                    <a:p>
+                      <a:r>
+                        <a:rPr sz="800" b="0" i="0">
+                          <a:solidFill>
+                            <a:srgbClr val="1F2937"/>
+                          </a:solidFill>
+                          <a:latin typeface="Arial"/>
+                        </a:rPr>
+                        <a:t>LOC-01</a:t>
+                      </a:r>
+                    </a:p>
+                  </a:txBody>
+                  <a:tcPr marL="91440" marR="91440" marT="45720" marB="45720">
+                    <a:lnB w="6350" cap="flat" cmpd="sng" algn="ctr">
+                      <a:solidFill>
+                        <a:srgbClr val="C8CDD3"/>
+                      </a:solidFill>
+                    </a:lnB>
+                    <a:lnT w="6350" cap="flat" cmpd="sng" algn="ctr">
+                      <a:solidFill>
+                        <a:srgbClr val="C8CDD3"/>
+                      </a:solidFill>
+                    </a:lnT>
+                    <a:lnR w="6350" cap="flat" cmpd="sng" algn="ctr">
+                      <a:solidFill>
+                        <a:srgbClr val="C8CDD3"/>
+                      </a:solidFill>
+                    </a:lnR>
+                    <a:lnL w="6350" cap="flat" cmpd="sng" algn="ctr">
+                      <a:solidFill>
+                        <a:srgbClr val="C8CDD3"/>
+                      </a:solidFill>
+                    </a:lnL>
+                    <a:solidFill>
+                      <a:srgbClr val="FFFFFF"/>
+                    </a:solidFill>
+                  </a:tcPr>
+                </a:tc>
+                <a:tc>
+                  <a:txBody>
+                    <a:bodyPr/>
+                    <a:lstStyle/>
+                    <a:p>
+                      <a:r>
+                        <a:rPr sz="800" b="0" i="0">
+                          <a:solidFill>
+                            <a:srgbClr val="1F2937"/>
+                          </a:solidFill>
+                          <a:latin typeface="Arial"/>
+                        </a:rPr>
+                        <a:t>approx. 150 m</a:t>
+                      </a:r>
+                    </a:p>
+                  </a:txBody>
+                  <a:tcPr marL="91440" marR="91440" marT="45720" marB="45720">
+                    <a:lnB w="6350" cap="flat" cmpd="sng" algn="ctr">
+                      <a:solidFill>
+                        <a:srgbClr val="C8CDD3"/>
+                      </a:solidFill>
+                    </a:lnB>
+                    <a:lnT w="6350" cap="flat" cmpd="sng" algn="ctr">
+                      <a:solidFill>
+                        <a:srgbClr val="C8CDD3"/>
+                      </a:solidFill>
+                    </a:lnT>
+                    <a:lnR w="6350" cap="flat" cmpd="sng" algn="ctr">
+                      <a:solidFill>
+                        <a:srgbClr val="C8CDD3"/>
+                      </a:solidFill>
+                    </a:lnR>
+                    <a:lnL w="6350" cap="flat" cmpd="sng" algn="ctr">
+                      <a:solidFill>
+                        <a:srgbClr val="C8CDD3"/>
+                      </a:solidFill>
+                    </a:lnL>
+                    <a:solidFill>
+                      <a:srgbClr val="FFFFFF"/>
+                    </a:solidFill>
+                  </a:tcPr>
+                </a:tc>
+                <a:tc>
+                  <a:txBody>
+                    <a:bodyPr/>
+                    <a:lstStyle/>
+                    <a:p>
+                      <a:r>
+                        <a:rPr sz="800" b="0" i="0">
+                          <a:solidFill>
+                            <a:srgbClr val="1F2937"/>
+                          </a:solidFill>
+                          <a:latin typeface="Arial"/>
+                        </a:rPr>
+                        <a:t>H5 — detail accepted</a:t>
+                      </a:r>
+                    </a:p>
+                  </a:txBody>
+                  <a:tcPr marL="91440" marR="91440" marT="45720" marB="45720">
+                    <a:lnB w="6350" cap="flat" cmpd="sng" algn="ctr">
+                      <a:solidFill>
+                        <a:srgbClr val="C8CDD3"/>
+                      </a:solidFill>
+                    </a:lnB>
+                    <a:lnT w="6350" cap="flat" cmpd="sng" algn="ctr">
+                      <a:solidFill>
+                        <a:srgbClr val="C8CDD3"/>
+                      </a:solidFill>
+                    </a:lnT>
+                    <a:lnR w="6350" cap="flat" cmpd="sng" algn="ctr">
+                      <a:solidFill>
+                        <a:srgbClr val="C8CDD3"/>
+                      </a:solidFill>
+                    </a:lnR>
+                    <a:lnL w="6350" cap="flat" cmpd="sng" algn="ctr">
+                      <a:solidFill>
+                        <a:srgbClr val="C8CDD3"/>
+                      </a:solidFill>
+                    </a:lnL>
+                    <a:solidFill>
+                      <a:srgbClr val="FFFFFF"/>
+                    </a:solidFill>
+                  </a:tcPr>
+                </a:tc>
+                <a:tc>
+                  <a:txBody>
+                    <a:bodyPr/>
+                    <a:lstStyle/>
+                    <a:p>
+                      <a:r>
+                        <a:rPr sz="800" b="0" i="0">
+                          <a:solidFill>
+                            <a:srgbClr val="1F2937"/>
+                          </a:solidFill>
+                          <a:latin typeface="Arial"/>
+                        </a:rPr>
+                        <a:t>Half the LOC-01 route cut and covered</a:t>
+                      </a:r>
+                    </a:p>
+                  </a:txBody>
+                  <a:tcPr marL="91440" marR="91440" marT="45720" marB="45720">
+                    <a:lnB w="6350" cap="flat" cmpd="sng" algn="ctr">
+                      <a:solidFill>
+                        <a:srgbClr val="C8CDD3"/>
+                      </a:solidFill>
+                    </a:lnB>
+                    <a:lnT w="6350" cap="flat" cmpd="sng" algn="ctr">
+                      <a:solidFill>
+                        <a:srgbClr val="C8CDD3"/>
+                      </a:solidFill>
+                    </a:lnT>
+                    <a:lnR w="6350" cap="flat" cmpd="sng" algn="ctr">
+                      <a:solidFill>
+                        <a:srgbClr val="C8CDD3"/>
+                      </a:solidFill>
+                    </a:lnR>
+                    <a:lnL w="6350" cap="flat" cmpd="sng" algn="ctr">
+                      <a:solidFill>
+                        <a:srgbClr val="C8CDD3"/>
+                      </a:solidFill>
+                    </a:lnL>
+                    <a:solidFill>
+                      <a:srgbClr val="FFFFFF"/>
+                    </a:solidFill>
+                  </a:tcPr>
+                </a:tc>
+              </a:tr>
+              <a:tr h="310413">
+                <a:tc>
+                  <a:txBody>
+                    <a:bodyPr/>
+                    <a:lstStyle/>
+                    <a:p>
+                      <a:r>
+                        <a:rPr sz="800" b="1" i="0">
+                          <a:solidFill>
+                            <a:srgbClr val="1F2937"/>
+                          </a:solidFill>
+                          <a:latin typeface="Arial"/>
+                        </a:rPr>
+                        <a:t>2</a:t>
+                      </a:r>
+                    </a:p>
+                  </a:txBody>
+                  <a:tcPr marL="91440" marR="91440" marT="45720" marB="45720">
+                    <a:lnB w="6350" cap="flat" cmpd="sng" algn="ctr">
+                      <a:solidFill>
+                        <a:srgbClr val="C8CDD3"/>
+                      </a:solidFill>
+                    </a:lnB>
+                    <a:lnT w="6350" cap="flat" cmpd="sng" algn="ctr">
+                      <a:solidFill>
+                        <a:srgbClr val="C8CDD3"/>
+                      </a:solidFill>
+                    </a:lnT>
+                    <a:lnR w="6350" cap="flat" cmpd="sng" algn="ctr">
+                      <a:solidFill>
+                        <a:srgbClr val="C8CDD3"/>
+                      </a:solidFill>
+                    </a:lnR>
+                    <a:lnL w="6350" cap="flat" cmpd="sng" algn="ctr">
+                      <a:solidFill>
+                        <a:srgbClr val="C8CDD3"/>
+                      </a:solidFill>
+                    </a:lnL>
+                    <a:solidFill>
+                      <a:srgbClr val="F4F6F8"/>
+                    </a:solidFill>
+                  </a:tcPr>
+                </a:tc>
+                <a:tc>
+                  <a:txBody>
+                    <a:bodyPr/>
+                    <a:lstStyle/>
+                    <a:p>
+                      <a:r>
+                        <a:rPr sz="800" b="0" i="0">
+                          <a:solidFill>
+                            <a:srgbClr val="1F2937"/>
+                          </a:solidFill>
+                          <a:latin typeface="Arial"/>
+                        </a:rPr>
+                        <a:t>Saw cutting — balance of the route</a:t>
+                      </a:r>
+                    </a:p>
+                  </a:txBody>
+                  <a:tcPr marL="91440" marR="91440" marT="45720" marB="45720">
+                    <a:lnB w="6350" cap="flat" cmpd="sng" algn="ctr">
+                      <a:solidFill>
+                        <a:srgbClr val="C8CDD3"/>
+                      </a:solidFill>
+                    </a:lnB>
+                    <a:lnT w="6350" cap="flat" cmpd="sng" algn="ctr">
+                      <a:solidFill>
+                        <a:srgbClr val="C8CDD3"/>
+                      </a:solidFill>
+                    </a:lnT>
+                    <a:lnR w="6350" cap="flat" cmpd="sng" algn="ctr">
+                      <a:solidFill>
+                        <a:srgbClr val="C8CDD3"/>
+                      </a:solidFill>
+                    </a:lnR>
+                    <a:lnL w="6350" cap="flat" cmpd="sng" algn="ctr">
+                      <a:solidFill>
+                        <a:srgbClr val="C8CDD3"/>
+                      </a:solidFill>
+                    </a:lnL>
+                    <a:solidFill>
+                      <a:srgbClr val="F4F6F8"/>
+                    </a:solidFill>
+                  </a:tcPr>
+                </a:tc>
+                <a:tc>
+                  <a:txBody>
+                    <a:bodyPr/>
+                    <a:lstStyle/>
+                    <a:p>
+                      <a:r>
+                        <a:rPr sz="800" b="0" i="0">
+                          <a:solidFill>
+                            <a:srgbClr val="1F2937"/>
+                          </a:solidFill>
+                          <a:latin typeface="Arial"/>
+                        </a:rPr>
+                        <a:t>LOC-01</a:t>
+                      </a:r>
+                    </a:p>
+                  </a:txBody>
+                  <a:tcPr marL="91440" marR="91440" marT="45720" marB="45720">
+                    <a:lnB w="6350" cap="flat" cmpd="sng" algn="ctr">
+                      <a:solidFill>
+                        <a:srgbClr val="C8CDD3"/>
+                      </a:solidFill>
+                    </a:lnB>
+                    <a:lnT w="6350" cap="flat" cmpd="sng" algn="ctr">
+                      <a:solidFill>
+                        <a:srgbClr val="C8CDD3"/>
+                      </a:solidFill>
+                    </a:lnT>
+                    <a:lnR w="6350" cap="flat" cmpd="sng" algn="ctr">
+                      <a:solidFill>
+                        <a:srgbClr val="C8CDD3"/>
+                      </a:solidFill>
+                    </a:lnR>
+                    <a:lnL w="6350" cap="flat" cmpd="sng" algn="ctr">
+                      <a:solidFill>
+                        <a:srgbClr val="C8CDD3"/>
+                      </a:solidFill>
+                    </a:lnL>
+                    <a:solidFill>
+                      <a:srgbClr val="F4F6F8"/>
+                    </a:solidFill>
+                  </a:tcPr>
+                </a:tc>
+                <a:tc>
+                  <a:txBody>
+                    <a:bodyPr/>
+                    <a:lstStyle/>
+                    <a:p>
+                      <a:r>
+                        <a:rPr sz="800" b="0" i="0">
+                          <a:solidFill>
+                            <a:srgbClr val="1F2937"/>
+                          </a:solidFill>
+                          <a:latin typeface="Arial"/>
+                        </a:rPr>
+                        <a:t>approx. 150 m</a:t>
+                      </a:r>
+                    </a:p>
+                  </a:txBody>
+                  <a:tcPr marL="91440" marR="91440" marT="45720" marB="45720">
+                    <a:lnB w="6350" cap="flat" cmpd="sng" algn="ctr">
+                      <a:solidFill>
+                        <a:srgbClr val="C8CDD3"/>
+                      </a:solidFill>
+                    </a:lnB>
+                    <a:lnT w="6350" cap="flat" cmpd="sng" algn="ctr">
+                      <a:solidFill>
+                        <a:srgbClr val="C8CDD3"/>
+                      </a:solidFill>
+                    </a:lnT>
+                    <a:lnR w="6350" cap="flat" cmpd="sng" algn="ctr">
+                      <a:solidFill>
+                        <a:srgbClr val="C8CDD3"/>
+                      </a:solidFill>
+                    </a:lnR>
+                    <a:lnL w="6350" cap="flat" cmpd="sng" algn="ctr">
+                      <a:solidFill>
+                        <a:srgbClr val="C8CDD3"/>
+                      </a:solidFill>
+                    </a:lnL>
+                    <a:solidFill>
+                      <a:srgbClr val="F4F6F8"/>
+                    </a:solidFill>
+                  </a:tcPr>
+                </a:tc>
+                <a:tc>
+                  <a:txBody>
+                    <a:bodyPr/>
+                    <a:lstStyle/>
+                    <a:p>
+                      <a:r>
+                        <a:rPr sz="800" b="0" i="0">
+                          <a:solidFill>
+                            <a:srgbClr val="1F2937"/>
+                          </a:solidFill>
+                          <a:latin typeface="Arial"/>
+                        </a:rPr>
+                        <a:t>H5 — detail accepted</a:t>
+                      </a:r>
+                    </a:p>
+                  </a:txBody>
+                  <a:tcPr marL="91440" marR="91440" marT="45720" marB="45720">
+                    <a:lnB w="6350" cap="flat" cmpd="sng" algn="ctr">
+                      <a:solidFill>
+                        <a:srgbClr val="C8CDD3"/>
+                      </a:solidFill>
+                    </a:lnB>
+                    <a:lnT w="6350" cap="flat" cmpd="sng" algn="ctr">
+                      <a:solidFill>
+                        <a:srgbClr val="C8CDD3"/>
+                      </a:solidFill>
+                    </a:lnT>
+                    <a:lnR w="6350" cap="flat" cmpd="sng" algn="ctr">
+                      <a:solidFill>
+                        <a:srgbClr val="C8CDD3"/>
+                      </a:solidFill>
+                    </a:lnR>
+                    <a:lnL w="6350" cap="flat" cmpd="sng" algn="ctr">
+                      <a:solidFill>
+                        <a:srgbClr val="C8CDD3"/>
+                      </a:solidFill>
+                    </a:lnL>
+                    <a:solidFill>
+                      <a:srgbClr val="F4F6F8"/>
+                    </a:solidFill>
+                  </a:tcPr>
+                </a:tc>
+                <a:tc>
+                  <a:txBody>
+                    <a:bodyPr/>
+                    <a:lstStyle/>
+                    <a:p>
+                      <a:r>
+                        <a:rPr sz="800" b="0" i="0">
+                          <a:solidFill>
+                            <a:srgbClr val="1F2937"/>
+                          </a:solidFill>
+                          <a:latin typeface="Arial"/>
+                        </a:rPr>
+                        <a:t>LOC-01 route cut in full</a:t>
+                      </a:r>
+                    </a:p>
+                  </a:txBody>
+                  <a:tcPr marL="91440" marR="91440" marT="45720" marB="45720">
+                    <a:lnB w="6350" cap="flat" cmpd="sng" algn="ctr">
+                      <a:solidFill>
+                        <a:srgbClr val="C8CDD3"/>
+                      </a:solidFill>
+                    </a:lnB>
+                    <a:lnT w="6350" cap="flat" cmpd="sng" algn="ctr">
+                      <a:solidFill>
+                        <a:srgbClr val="C8CDD3"/>
+                      </a:solidFill>
+                    </a:lnT>
+                    <a:lnR w="6350" cap="flat" cmpd="sng" algn="ctr">
+                      <a:solidFill>
+                        <a:srgbClr val="C8CDD3"/>
+                      </a:solidFill>
+                    </a:lnR>
+                    <a:lnL w="6350" cap="flat" cmpd="sng" algn="ctr">
+                      <a:solidFill>
+                        <a:srgbClr val="C8CDD3"/>
+                      </a:solidFill>
+                    </a:lnL>
+                    <a:solidFill>
+                      <a:srgbClr val="F4F6F8"/>
+                    </a:solidFill>
+                  </a:tcPr>
+                </a:tc>
+              </a:tr>
+              <a:tr h="310413">
+                <a:tc>
+                  <a:txBody>
+                    <a:bodyPr/>
+                    <a:lstStyle/>
+                    <a:p>
+                      <a:r>
+                        <a:rPr sz="800" b="1" i="0">
+                          <a:solidFill>
+                            <a:srgbClr val="1F2937"/>
+                          </a:solidFill>
+                          <a:latin typeface="Arial"/>
+                        </a:rPr>
+                        <a:t>2</a:t>
+                      </a:r>
+                    </a:p>
+                  </a:txBody>
+                  <a:tcPr marL="91440" marR="91440" marT="45720" marB="45720">
+                    <a:lnB w="6350" cap="flat" cmpd="sng" algn="ctr">
+                      <a:solidFill>
+                        <a:srgbClr val="C8CDD3"/>
+                      </a:solidFill>
+                    </a:lnB>
+                    <a:lnT w="6350" cap="flat" cmpd="sng" algn="ctr">
+                      <a:solidFill>
+                        <a:srgbClr val="C8CDD3"/>
+                      </a:solidFill>
+                    </a:lnT>
+                    <a:lnR w="6350" cap="flat" cmpd="sng" algn="ctr">
+                      <a:solidFill>
+                        <a:srgbClr val="C8CDD3"/>
+                      </a:solidFill>
+                    </a:lnR>
+                    <a:lnL w="6350" cap="flat" cmpd="sng" algn="ctr">
+                      <a:solidFill>
+                        <a:srgbClr val="C8CDD3"/>
+                      </a:solidFill>
+                    </a:lnL>
+                    <a:solidFill>
+                      <a:srgbClr val="F4F6F8"/>
+                    </a:solidFill>
+                  </a:tcPr>
+                </a:tc>
+                <a:tc>
+                  <a:txBody>
+                    <a:bodyPr/>
+                    <a:lstStyle/>
+                    <a:p>
+                      <a:r>
+                        <a:rPr sz="800" b="0" i="0">
+                          <a:solidFill>
+                            <a:srgbClr val="1F2937"/>
+                          </a:solidFill>
+                          <a:latin typeface="Arial"/>
+                        </a:rPr>
+                        <a:t>Set the new side-entry shallow bases in the cored positions</a:t>
+                      </a:r>
+                    </a:p>
+                  </a:txBody>
+                  <a:tcPr marL="91440" marR="91440" marT="45720" marB="45720">
+                    <a:lnB w="6350" cap="flat" cmpd="sng" algn="ctr">
+                      <a:solidFill>
+                        <a:srgbClr val="C8CDD3"/>
+                      </a:solidFill>
+                    </a:lnB>
+                    <a:lnT w="6350" cap="flat" cmpd="sng" algn="ctr">
+                      <a:solidFill>
+                        <a:srgbClr val="C8CDD3"/>
+                      </a:solidFill>
+                    </a:lnT>
+                    <a:lnR w="6350" cap="flat" cmpd="sng" algn="ctr">
+                      <a:solidFill>
+                        <a:srgbClr val="C8CDD3"/>
+                      </a:solidFill>
+                    </a:lnR>
+                    <a:lnL w="6350" cap="flat" cmpd="sng" algn="ctr">
+                      <a:solidFill>
+                        <a:srgbClr val="C8CDD3"/>
+                      </a:solidFill>
+                    </a:lnL>
+                    <a:solidFill>
+                      <a:srgbClr val="F4F6F8"/>
+                    </a:solidFill>
+                  </a:tcPr>
+                </a:tc>
+                <a:tc>
+                  <a:txBody>
+                    <a:bodyPr/>
+                    <a:lstStyle/>
+                    <a:p>
+                      <a:r>
+                        <a:rPr sz="800" b="0" i="0">
+                          <a:solidFill>
+                            <a:srgbClr val="1F2937"/>
+                          </a:solidFill>
+                          <a:latin typeface="Arial"/>
+                        </a:rPr>
+                        <a:t>LOC-01</a:t>
+                      </a:r>
+                    </a:p>
+                  </a:txBody>
+                  <a:tcPr marL="91440" marR="91440" marT="45720" marB="45720">
+                    <a:lnB w="6350" cap="flat" cmpd="sng" algn="ctr">
+                      <a:solidFill>
+                        <a:srgbClr val="C8CDD3"/>
+                      </a:solidFill>
+                    </a:lnB>
+                    <a:lnT w="6350" cap="flat" cmpd="sng" algn="ctr">
+                      <a:solidFill>
+                        <a:srgbClr val="C8CDD3"/>
+                      </a:solidFill>
+                    </a:lnT>
+                    <a:lnR w="6350" cap="flat" cmpd="sng" algn="ctr">
+                      <a:solidFill>
+                        <a:srgbClr val="C8CDD3"/>
+                      </a:solidFill>
+                    </a:lnR>
+                    <a:lnL w="6350" cap="flat" cmpd="sng" algn="ctr">
+                      <a:solidFill>
+                        <a:srgbClr val="C8CDD3"/>
+                      </a:solidFill>
+                    </a:lnL>
+                    <a:solidFill>
+                      <a:srgbClr val="F4F6F8"/>
+                    </a:solidFill>
+                  </a:tcPr>
+                </a:tc>
+                <a:tc>
+                  <a:txBody>
+                    <a:bodyPr/>
+                    <a:lstStyle/>
+                    <a:p>
+                      <a:r>
+                        <a:rPr sz="800" b="0" i="0">
+                          <a:solidFill>
+                            <a:srgbClr val="1F2937"/>
+                          </a:solidFill>
+                          <a:latin typeface="Arial"/>
+                        </a:rPr>
+                        <a:t>11 No. 8"</a:t>
+                      </a:r>
+                    </a:p>
+                  </a:txBody>
+                  <a:tcPr marL="91440" marR="91440" marT="45720" marB="45720">
+                    <a:lnB w="6350" cap="flat" cmpd="sng" algn="ctr">
+                      <a:solidFill>
+                        <a:srgbClr val="C8CDD3"/>
+                      </a:solidFill>
+                    </a:lnB>
+                    <a:lnT w="6350" cap="flat" cmpd="sng" algn="ctr">
+                      <a:solidFill>
+                        <a:srgbClr val="C8CDD3"/>
+                      </a:solidFill>
+                    </a:lnT>
+                    <a:lnR w="6350" cap="flat" cmpd="sng" algn="ctr">
+                      <a:solidFill>
+                        <a:srgbClr val="C8CDD3"/>
+                      </a:solidFill>
+                    </a:lnR>
+                    <a:lnL w="6350" cap="flat" cmpd="sng" algn="ctr">
+                      <a:solidFill>
+                        <a:srgbClr val="C8CDD3"/>
+                      </a:solidFill>
+                    </a:lnL>
+                    <a:solidFill>
+                      <a:srgbClr val="F4F6F8"/>
+                    </a:solidFill>
+                  </a:tcPr>
+                </a:tc>
+                <a:tc>
+                  <a:txBody>
+                    <a:bodyPr/>
+                    <a:lstStyle/>
+                    <a:p>
+                      <a:r>
+                        <a:rPr sz="800" b="0" i="0">
+                          <a:solidFill>
+                            <a:srgbClr val="1F2937"/>
+                          </a:solidFill>
+                          <a:latin typeface="Arial"/>
+                        </a:rPr>
+                        <a:t>—</a:t>
+                      </a:r>
+                    </a:p>
+                  </a:txBody>
+                  <a:tcPr marL="91440" marR="91440" marT="45720" marB="45720">
+                    <a:lnB w="6350" cap="flat" cmpd="sng" algn="ctr">
+                      <a:solidFill>
+                        <a:srgbClr val="C8CDD3"/>
+                      </a:solidFill>
+                    </a:lnB>
+                    <a:lnT w="6350" cap="flat" cmpd="sng" algn="ctr">
+                      <a:solidFill>
+                        <a:srgbClr val="C8CDD3"/>
+                      </a:solidFill>
+                    </a:lnT>
+                    <a:lnR w="6350" cap="flat" cmpd="sng" algn="ctr">
+                      <a:solidFill>
+                        <a:srgbClr val="C8CDD3"/>
+                      </a:solidFill>
+                    </a:lnR>
+                    <a:lnL w="6350" cap="flat" cmpd="sng" algn="ctr">
+                      <a:solidFill>
+                        <a:srgbClr val="C8CDD3"/>
+                      </a:solidFill>
+                    </a:lnL>
+                    <a:solidFill>
+                      <a:srgbClr val="F4F6F8"/>
+                    </a:solidFill>
+                  </a:tcPr>
+                </a:tc>
+                <a:tc>
+                  <a:txBody>
+                    <a:bodyPr/>
+                    <a:lstStyle/>
+                    <a:p>
+                      <a:r>
+                        <a:rPr sz="800" b="0" i="0">
+                          <a:solidFill>
+                            <a:srgbClr val="1F2937"/>
+                          </a:solidFill>
+                          <a:latin typeface="Arial"/>
+                        </a:rPr>
+                        <a:t>11 No. bases set and levelled</a:t>
+                      </a:r>
+                    </a:p>
+                  </a:txBody>
+                  <a:tcPr marL="91440" marR="91440" marT="45720" marB="45720">
+                    <a:lnB w="6350" cap="flat" cmpd="sng" algn="ctr">
+                      <a:solidFill>
+                        <a:srgbClr val="C8CDD3"/>
+                      </a:solidFill>
+                    </a:lnB>
+                    <a:lnT w="6350" cap="flat" cmpd="sng" algn="ctr">
+                      <a:solidFill>
+                        <a:srgbClr val="C8CDD3"/>
+                      </a:solidFill>
+                    </a:lnT>
+                    <a:lnR w="6350" cap="flat" cmpd="sng" algn="ctr">
+                      <a:solidFill>
+                        <a:srgbClr val="C8CDD3"/>
+                      </a:solidFill>
+                    </a:lnR>
+                    <a:lnL w="6350" cap="flat" cmpd="sng" algn="ctr">
+                      <a:solidFill>
+                        <a:srgbClr val="C8CDD3"/>
+                      </a:solidFill>
+                    </a:lnL>
+                    <a:solidFill>
+                      <a:srgbClr val="F4F6F8"/>
+                    </a:solidFill>
+                  </a:tcPr>
+                </a:tc>
+              </a:tr>
+              <a:tr h="310413">
+                <a:tc>
+                  <a:txBody>
+                    <a:bodyPr/>
+                    <a:lstStyle/>
+                    <a:p>
+                      <a:r>
+                        <a:rPr sz="800" b="1" i="0">
+                          <a:solidFill>
+                            <a:srgbClr val="1F2937"/>
+                          </a:solidFill>
+                          <a:latin typeface="Arial"/>
+                        </a:rPr>
+                        <a:t>3</a:t>
+                      </a:r>
+                    </a:p>
+                  </a:txBody>
+                  <a:tcPr marL="91440" marR="91440" marT="45720" marB="45720">
+                    <a:lnB w="6350" cap="flat" cmpd="sng" algn="ctr">
+                      <a:solidFill>
+                        <a:srgbClr val="C8CDD3"/>
+                      </a:solidFill>
+                    </a:lnB>
+                    <a:lnT w="6350" cap="flat" cmpd="sng" algn="ctr">
+                      <a:solidFill>
+                        <a:srgbClr val="C8CDD3"/>
+                      </a:solidFill>
+                    </a:lnT>
+                    <a:lnR w="6350" cap="flat" cmpd="sng" algn="ctr">
+                      <a:solidFill>
+                        <a:srgbClr val="C8CDD3"/>
+                      </a:solidFill>
+                    </a:lnR>
+                    <a:lnL w="6350" cap="flat" cmpd="sng" algn="ctr">
+                      <a:solidFill>
+                        <a:srgbClr val="C8CDD3"/>
+                      </a:solidFill>
+                    </a:lnL>
+                    <a:solidFill>
+                      <a:srgbClr val="FFFFFF"/>
+                    </a:solidFill>
+                  </a:tcPr>
+                </a:tc>
+                <a:tc>
+                  <a:txBody>
+                    <a:bodyPr/>
+                    <a:lstStyle/>
+                    <a:p>
+                      <a:r>
+                        <a:rPr sz="800" b="0" i="0">
+                          <a:solidFill>
+                            <a:srgbClr val="1F2937"/>
+                          </a:solidFill>
+                          <a:latin typeface="Arial"/>
+                        </a:rPr>
+                        <a:t>Saw cutting — full route</a:t>
+                      </a:r>
+                    </a:p>
+                  </a:txBody>
+                  <a:tcPr marL="91440" marR="91440" marT="45720" marB="45720">
+                    <a:lnB w="6350" cap="flat" cmpd="sng" algn="ctr">
+                      <a:solidFill>
+                        <a:srgbClr val="C8CDD3"/>
+                      </a:solidFill>
+                    </a:lnB>
+                    <a:lnT w="6350" cap="flat" cmpd="sng" algn="ctr">
+                      <a:solidFill>
+                        <a:srgbClr val="C8CDD3"/>
+                      </a:solidFill>
+                    </a:lnT>
+                    <a:lnR w="6350" cap="flat" cmpd="sng" algn="ctr">
+                      <a:solidFill>
+                        <a:srgbClr val="C8CDD3"/>
+                      </a:solidFill>
+                    </a:lnR>
+                    <a:lnL w="6350" cap="flat" cmpd="sng" algn="ctr">
+                      <a:solidFill>
+                        <a:srgbClr val="C8CDD3"/>
+                      </a:solidFill>
+                    </a:lnL>
+                    <a:solidFill>
+                      <a:srgbClr val="FFFFFF"/>
+                    </a:solidFill>
+                  </a:tcPr>
+                </a:tc>
+                <a:tc>
+                  <a:txBody>
+                    <a:bodyPr/>
+                    <a:lstStyle/>
+                    <a:p>
+                      <a:r>
+                        <a:rPr sz="800" b="0" i="0">
+                          <a:solidFill>
+                            <a:srgbClr val="1F2937"/>
+                          </a:solidFill>
+                          <a:latin typeface="Arial"/>
+                        </a:rPr>
+                        <a:t>LOC-02 / 03</a:t>
+                      </a:r>
+                    </a:p>
+                  </a:txBody>
+                  <a:tcPr marL="91440" marR="91440" marT="45720" marB="45720">
+                    <a:lnB w="6350" cap="flat" cmpd="sng" algn="ctr">
+                      <a:solidFill>
+                        <a:srgbClr val="C8CDD3"/>
+                      </a:solidFill>
+                    </a:lnB>
+                    <a:lnT w="6350" cap="flat" cmpd="sng" algn="ctr">
+                      <a:solidFill>
+                        <a:srgbClr val="C8CDD3"/>
+                      </a:solidFill>
+                    </a:lnT>
+                    <a:lnR w="6350" cap="flat" cmpd="sng" algn="ctr">
+                      <a:solidFill>
+                        <a:srgbClr val="C8CDD3"/>
+                      </a:solidFill>
+                    </a:lnR>
+                    <a:lnL w="6350" cap="flat" cmpd="sng" algn="ctr">
+                      <a:solidFill>
+                        <a:srgbClr val="C8CDD3"/>
+                      </a:solidFill>
+                    </a:lnL>
+                    <a:solidFill>
+                      <a:srgbClr val="FFFFFF"/>
+                    </a:solidFill>
+                  </a:tcPr>
+                </a:tc>
+                <a:tc>
+                  <a:txBody>
+                    <a:bodyPr/>
+                    <a:lstStyle/>
+                    <a:p>
+                      <a:r>
+                        <a:rPr sz="800" b="0" i="0">
+                          <a:solidFill>
+                            <a:srgbClr val="1F2937"/>
+                          </a:solidFill>
+                          <a:latin typeface="Arial"/>
+                        </a:rPr>
+                        <a:t>approx. 24 m / 95 m</a:t>
+                      </a:r>
+                    </a:p>
+                  </a:txBody>
+                  <a:tcPr marL="91440" marR="91440" marT="45720" marB="45720">
+                    <a:lnB w="6350" cap="flat" cmpd="sng" algn="ctr">
+                      <a:solidFill>
+                        <a:srgbClr val="C8CDD3"/>
+                      </a:solidFill>
+                    </a:lnB>
+                    <a:lnT w="6350" cap="flat" cmpd="sng" algn="ctr">
+                      <a:solidFill>
+                        <a:srgbClr val="C8CDD3"/>
+                      </a:solidFill>
+                    </a:lnT>
+                    <a:lnR w="6350" cap="flat" cmpd="sng" algn="ctr">
+                      <a:solidFill>
+                        <a:srgbClr val="C8CDD3"/>
+                      </a:solidFill>
+                    </a:lnR>
+                    <a:lnL w="6350" cap="flat" cmpd="sng" algn="ctr">
+                      <a:solidFill>
+                        <a:srgbClr val="C8CDD3"/>
+                      </a:solidFill>
+                    </a:lnL>
+                    <a:solidFill>
+                      <a:srgbClr val="FFFFFF"/>
+                    </a:solidFill>
+                  </a:tcPr>
+                </a:tc>
+                <a:tc>
+                  <a:txBody>
+                    <a:bodyPr/>
+                    <a:lstStyle/>
+                    <a:p>
+                      <a:r>
+                        <a:rPr sz="800" b="0" i="0">
+                          <a:solidFill>
+                            <a:srgbClr val="1F2937"/>
+                          </a:solidFill>
+                          <a:latin typeface="Arial"/>
+                        </a:rPr>
+                        <a:t>H5 — detail accepted</a:t>
+                      </a:r>
+                    </a:p>
+                  </a:txBody>
+                  <a:tcPr marL="91440" marR="91440" marT="45720" marB="45720">
+                    <a:lnB w="6350" cap="flat" cmpd="sng" algn="ctr">
+                      <a:solidFill>
+                        <a:srgbClr val="C8CDD3"/>
+                      </a:solidFill>
+                    </a:lnB>
+                    <a:lnT w="6350" cap="flat" cmpd="sng" algn="ctr">
+                      <a:solidFill>
+                        <a:srgbClr val="C8CDD3"/>
+                      </a:solidFill>
+                    </a:lnT>
+                    <a:lnR w="6350" cap="flat" cmpd="sng" algn="ctr">
+                      <a:solidFill>
+                        <a:srgbClr val="C8CDD3"/>
+                      </a:solidFill>
+                    </a:lnR>
+                    <a:lnL w="6350" cap="flat" cmpd="sng" algn="ctr">
+                      <a:solidFill>
+                        <a:srgbClr val="C8CDD3"/>
+                      </a:solidFill>
+                    </a:lnL>
+                    <a:solidFill>
+                      <a:srgbClr val="FFFFFF"/>
+                    </a:solidFill>
+                  </a:tcPr>
+                </a:tc>
+                <a:tc>
+                  <a:txBody>
+                    <a:bodyPr/>
+                    <a:lstStyle/>
+                    <a:p>
+                      <a:r>
+                        <a:rPr sz="800" b="0" i="0">
+                          <a:solidFill>
+                            <a:srgbClr val="1F2937"/>
+                          </a:solidFill>
+                          <a:latin typeface="Arial"/>
+                        </a:rPr>
+                        <a:t>Both routes cut</a:t>
+                      </a:r>
+                    </a:p>
+                  </a:txBody>
+                  <a:tcPr marL="91440" marR="91440" marT="45720" marB="45720">
+                    <a:lnB w="6350" cap="flat" cmpd="sng" algn="ctr">
+                      <a:solidFill>
+                        <a:srgbClr val="C8CDD3"/>
+                      </a:solidFill>
+                    </a:lnB>
+                    <a:lnT w="6350" cap="flat" cmpd="sng" algn="ctr">
+                      <a:solidFill>
+                        <a:srgbClr val="C8CDD3"/>
+                      </a:solidFill>
+                    </a:lnT>
+                    <a:lnR w="6350" cap="flat" cmpd="sng" algn="ctr">
+                      <a:solidFill>
+                        <a:srgbClr val="C8CDD3"/>
+                      </a:solidFill>
+                    </a:lnR>
+                    <a:lnL w="6350" cap="flat" cmpd="sng" algn="ctr">
+                      <a:solidFill>
+                        <a:srgbClr val="C8CDD3"/>
+                      </a:solidFill>
+                    </a:lnL>
+                    <a:solidFill>
+                      <a:srgbClr val="FFFFFF"/>
+                    </a:solidFill>
+                  </a:tcPr>
+                </a:tc>
+              </a:tr>
+              <a:tr h="310413">
+                <a:tc>
+                  <a:txBody>
+                    <a:bodyPr/>
+                    <a:lstStyle/>
+                    <a:p>
+                      <a:r>
+                        <a:rPr sz="800" b="1" i="0">
+                          <a:solidFill>
+                            <a:srgbClr val="1F2937"/>
+                          </a:solidFill>
+                          <a:latin typeface="Arial"/>
+                        </a:rPr>
+                        <a:t>3</a:t>
+                      </a:r>
+                    </a:p>
+                  </a:txBody>
+                  <a:tcPr marL="91440" marR="91440" marT="45720" marB="45720">
+                    <a:lnB w="6350" cap="flat" cmpd="sng" algn="ctr">
+                      <a:solidFill>
+                        <a:srgbClr val="C8CDD3"/>
+                      </a:solidFill>
+                    </a:lnB>
+                    <a:lnT w="6350" cap="flat" cmpd="sng" algn="ctr">
+                      <a:solidFill>
+                        <a:srgbClr val="C8CDD3"/>
+                      </a:solidFill>
+                    </a:lnT>
+                    <a:lnR w="6350" cap="flat" cmpd="sng" algn="ctr">
+                      <a:solidFill>
+                        <a:srgbClr val="C8CDD3"/>
+                      </a:solidFill>
+                    </a:lnR>
+                    <a:lnL w="6350" cap="flat" cmpd="sng" algn="ctr">
+                      <a:solidFill>
+                        <a:srgbClr val="C8CDD3"/>
+                      </a:solidFill>
+                    </a:lnL>
+                    <a:solidFill>
+                      <a:srgbClr val="FFFFFF"/>
+                    </a:solidFill>
+                  </a:tcPr>
+                </a:tc>
+                <a:tc>
+                  <a:txBody>
+                    <a:bodyPr/>
+                    <a:lstStyle/>
+                    <a:p>
+                      <a:r>
+                        <a:rPr sz="800" b="0" i="0">
+                          <a:solidFill>
+                            <a:srgbClr val="1F2937"/>
+                          </a:solidFill>
+                          <a:latin typeface="Arial"/>
+                        </a:rPr>
+                        <a:t>Set the new side-entry shallow bases</a:t>
+                      </a:r>
+                    </a:p>
+                  </a:txBody>
+                  <a:tcPr marL="91440" marR="91440" marT="45720" marB="45720">
+                    <a:lnB w="6350" cap="flat" cmpd="sng" algn="ctr">
+                      <a:solidFill>
+                        <a:srgbClr val="C8CDD3"/>
+                      </a:solidFill>
+                    </a:lnB>
+                    <a:lnT w="6350" cap="flat" cmpd="sng" algn="ctr">
+                      <a:solidFill>
+                        <a:srgbClr val="C8CDD3"/>
+                      </a:solidFill>
+                    </a:lnT>
+                    <a:lnR w="6350" cap="flat" cmpd="sng" algn="ctr">
+                      <a:solidFill>
+                        <a:srgbClr val="C8CDD3"/>
+                      </a:solidFill>
+                    </a:lnR>
+                    <a:lnL w="6350" cap="flat" cmpd="sng" algn="ctr">
+                      <a:solidFill>
+                        <a:srgbClr val="C8CDD3"/>
+                      </a:solidFill>
+                    </a:lnL>
+                    <a:solidFill>
+                      <a:srgbClr val="FFFFFF"/>
+                    </a:solidFill>
+                  </a:tcPr>
+                </a:tc>
+                <a:tc>
+                  <a:txBody>
+                    <a:bodyPr/>
+                    <a:lstStyle/>
+                    <a:p>
+                      <a:r>
+                        <a:rPr sz="800" b="0" i="0">
+                          <a:solidFill>
+                            <a:srgbClr val="1F2937"/>
+                          </a:solidFill>
+                          <a:latin typeface="Arial"/>
+                        </a:rPr>
+                        <a:t>LOC-02 / 03</a:t>
+                      </a:r>
+                    </a:p>
+                  </a:txBody>
+                  <a:tcPr marL="91440" marR="91440" marT="45720" marB="45720">
+                    <a:lnB w="6350" cap="flat" cmpd="sng" algn="ctr">
+                      <a:solidFill>
+                        <a:srgbClr val="C8CDD3"/>
+                      </a:solidFill>
+                    </a:lnB>
+                    <a:lnT w="6350" cap="flat" cmpd="sng" algn="ctr">
+                      <a:solidFill>
+                        <a:srgbClr val="C8CDD3"/>
+                      </a:solidFill>
+                    </a:lnT>
+                    <a:lnR w="6350" cap="flat" cmpd="sng" algn="ctr">
+                      <a:solidFill>
+                        <a:srgbClr val="C8CDD3"/>
+                      </a:solidFill>
+                    </a:lnR>
+                    <a:lnL w="6350" cap="flat" cmpd="sng" algn="ctr">
+                      <a:solidFill>
+                        <a:srgbClr val="C8CDD3"/>
+                      </a:solidFill>
+                    </a:lnL>
+                    <a:solidFill>
+                      <a:srgbClr val="FFFFFF"/>
+                    </a:solidFill>
+                  </a:tcPr>
+                </a:tc>
+                <a:tc>
+                  <a:txBody>
+                    <a:bodyPr/>
+                    <a:lstStyle/>
+                    <a:p>
+                      <a:r>
+                        <a:rPr sz="800" b="0" i="0">
+                          <a:solidFill>
+                            <a:srgbClr val="1F2937"/>
+                          </a:solidFill>
+                          <a:latin typeface="Arial"/>
+                        </a:rPr>
+                        <a:t>1 No. 12" each</a:t>
+                      </a:r>
+                    </a:p>
+                  </a:txBody>
+                  <a:tcPr marL="91440" marR="91440" marT="45720" marB="45720">
+                    <a:lnB w="6350" cap="flat" cmpd="sng" algn="ctr">
+                      <a:solidFill>
+                        <a:srgbClr val="C8CDD3"/>
+                      </a:solidFill>
+                    </a:lnB>
+                    <a:lnT w="6350" cap="flat" cmpd="sng" algn="ctr">
+                      <a:solidFill>
+                        <a:srgbClr val="C8CDD3"/>
+                      </a:solidFill>
+                    </a:lnT>
+                    <a:lnR w="6350" cap="flat" cmpd="sng" algn="ctr">
+                      <a:solidFill>
+                        <a:srgbClr val="C8CDD3"/>
+                      </a:solidFill>
+                    </a:lnR>
+                    <a:lnL w="6350" cap="flat" cmpd="sng" algn="ctr">
+                      <a:solidFill>
+                        <a:srgbClr val="C8CDD3"/>
+                      </a:solidFill>
+                    </a:lnL>
+                    <a:solidFill>
+                      <a:srgbClr val="FFFFFF"/>
+                    </a:solidFill>
+                  </a:tcPr>
+                </a:tc>
+                <a:tc>
+                  <a:txBody>
+                    <a:bodyPr/>
+                    <a:lstStyle/>
+                    <a:p>
+                      <a:r>
+                        <a:rPr sz="800" b="0" i="0">
+                          <a:solidFill>
+                            <a:srgbClr val="1F2937"/>
+                          </a:solidFill>
+                          <a:latin typeface="Arial"/>
+                        </a:rPr>
+                        <a:t>—</a:t>
+                      </a:r>
+                    </a:p>
+                  </a:txBody>
+                  <a:tcPr marL="91440" marR="91440" marT="45720" marB="45720">
+                    <a:lnB w="6350" cap="flat" cmpd="sng" algn="ctr">
+                      <a:solidFill>
+                        <a:srgbClr val="C8CDD3"/>
+                      </a:solidFill>
+                    </a:lnB>
+                    <a:lnT w="6350" cap="flat" cmpd="sng" algn="ctr">
+                      <a:solidFill>
+                        <a:srgbClr val="C8CDD3"/>
+                      </a:solidFill>
+                    </a:lnT>
+                    <a:lnR w="6350" cap="flat" cmpd="sng" algn="ctr">
+                      <a:solidFill>
+                        <a:srgbClr val="C8CDD3"/>
+                      </a:solidFill>
+                    </a:lnR>
+                    <a:lnL w="6350" cap="flat" cmpd="sng" algn="ctr">
+                      <a:solidFill>
+                        <a:srgbClr val="C8CDD3"/>
+                      </a:solidFill>
+                    </a:lnL>
+                    <a:solidFill>
+                      <a:srgbClr val="FFFFFF"/>
+                    </a:solidFill>
+                  </a:tcPr>
+                </a:tc>
+                <a:tc>
+                  <a:txBody>
+                    <a:bodyPr/>
+                    <a:lstStyle/>
+                    <a:p>
+                      <a:r>
+                        <a:rPr sz="800" b="0" i="0">
+                          <a:solidFill>
+                            <a:srgbClr val="1F2937"/>
+                          </a:solidFill>
+                          <a:latin typeface="Arial"/>
+                        </a:rPr>
+                        <a:t>2 No. bases set and levelled</a:t>
+                      </a:r>
+                    </a:p>
+                  </a:txBody>
+                  <a:tcPr marL="91440" marR="91440" marT="45720" marB="45720">
+                    <a:lnB w="6350" cap="flat" cmpd="sng" algn="ctr">
+                      <a:solidFill>
+                        <a:srgbClr val="C8CDD3"/>
+                      </a:solidFill>
+                    </a:lnB>
+                    <a:lnT w="6350" cap="flat" cmpd="sng" algn="ctr">
+                      <a:solidFill>
+                        <a:srgbClr val="C8CDD3"/>
+                      </a:solidFill>
+                    </a:lnT>
+                    <a:lnR w="6350" cap="flat" cmpd="sng" algn="ctr">
+                      <a:solidFill>
+                        <a:srgbClr val="C8CDD3"/>
+                      </a:solidFill>
+                    </a:lnR>
+                    <a:lnL w="6350" cap="flat" cmpd="sng" algn="ctr">
+                      <a:solidFill>
+                        <a:srgbClr val="C8CDD3"/>
+                      </a:solidFill>
+                    </a:lnL>
+                    <a:solidFill>
+                      <a:srgbClr val="FFFFFF"/>
+                    </a:solidFill>
+                  </a:tcPr>
+                </a:tc>
+              </a:tr>
+              <a:tr h="310413">
+                <a:tc>
+                  <a:txBody>
+                    <a:bodyPr/>
+                    <a:lstStyle/>
+                    <a:p>
+                      <a:r>
+                        <a:rPr sz="800" b="1" i="0">
+                          <a:solidFill>
+                            <a:srgbClr val="1F2937"/>
+                          </a:solidFill>
+                          <a:latin typeface="Arial"/>
+                        </a:rPr>
+                        <a:t>3</a:t>
+                      </a:r>
+                    </a:p>
+                  </a:txBody>
+                  <a:tcPr marL="91440" marR="91440" marT="45720" marB="45720">
+                    <a:lnB w="6350" cap="flat" cmpd="sng" algn="ctr">
+                      <a:solidFill>
+                        <a:srgbClr val="C8CDD3"/>
+                      </a:solidFill>
+                    </a:lnB>
+                    <a:lnT w="6350" cap="flat" cmpd="sng" algn="ctr">
+                      <a:solidFill>
+                        <a:srgbClr val="C8CDD3"/>
+                      </a:solidFill>
+                    </a:lnT>
+                    <a:lnR w="6350" cap="flat" cmpd="sng" algn="ctr">
+                      <a:solidFill>
+                        <a:srgbClr val="C8CDD3"/>
+                      </a:solidFill>
+                    </a:lnR>
+                    <a:lnL w="6350" cap="flat" cmpd="sng" algn="ctr">
+                      <a:solidFill>
+                        <a:srgbClr val="C8CDD3"/>
+                      </a:solidFill>
+                    </a:lnL>
+                    <a:solidFill>
+                      <a:srgbClr val="FFFFFF"/>
+                    </a:solidFill>
+                  </a:tcPr>
+                </a:tc>
+                <a:tc>
+                  <a:txBody>
+                    <a:bodyPr/>
+                    <a:lstStyle/>
+                    <a:p>
+                      <a:r>
+                        <a:rPr sz="800" b="0" i="0">
+                          <a:solidFill>
+                            <a:srgbClr val="1F2937"/>
+                          </a:solidFill>
+                          <a:latin typeface="Arial"/>
+                        </a:rPr>
+                        <a:t>Lay new secondary cable through the saw cut — no joints, manhole to light</a:t>
+                      </a:r>
+                    </a:p>
+                  </a:txBody>
+                  <a:tcPr marL="91440" marR="91440" marT="45720" marB="45720">
+                    <a:lnB w="6350" cap="flat" cmpd="sng" algn="ctr">
+                      <a:solidFill>
+                        <a:srgbClr val="C8CDD3"/>
+                      </a:solidFill>
+                    </a:lnB>
+                    <a:lnT w="6350" cap="flat" cmpd="sng" algn="ctr">
+                      <a:solidFill>
+                        <a:srgbClr val="C8CDD3"/>
+                      </a:solidFill>
+                    </a:lnT>
+                    <a:lnR w="6350" cap="flat" cmpd="sng" algn="ctr">
+                      <a:solidFill>
+                        <a:srgbClr val="C8CDD3"/>
+                      </a:solidFill>
+                    </a:lnR>
+                    <a:lnL w="6350" cap="flat" cmpd="sng" algn="ctr">
+                      <a:solidFill>
+                        <a:srgbClr val="C8CDD3"/>
+                      </a:solidFill>
+                    </a:lnL>
+                    <a:solidFill>
+                      <a:srgbClr val="FFFFFF"/>
+                    </a:solidFill>
+                  </a:tcPr>
+                </a:tc>
+                <a:tc>
+                  <a:txBody>
+                    <a:bodyPr/>
+                    <a:lstStyle/>
+                    <a:p>
+                      <a:r>
+                        <a:rPr sz="800" b="0" i="0">
+                          <a:solidFill>
+                            <a:srgbClr val="1F2937"/>
+                          </a:solidFill>
+                          <a:latin typeface="Arial"/>
+                        </a:rPr>
+                        <a:t>LOC-01</a:t>
+                      </a:r>
+                    </a:p>
+                  </a:txBody>
+                  <a:tcPr marL="91440" marR="91440" marT="45720" marB="45720">
+                    <a:lnB w="6350" cap="flat" cmpd="sng" algn="ctr">
+                      <a:solidFill>
+                        <a:srgbClr val="C8CDD3"/>
+                      </a:solidFill>
+                    </a:lnB>
+                    <a:lnT w="6350" cap="flat" cmpd="sng" algn="ctr">
+                      <a:solidFill>
+                        <a:srgbClr val="C8CDD3"/>
+                      </a:solidFill>
+                    </a:lnT>
+                    <a:lnR w="6350" cap="flat" cmpd="sng" algn="ctr">
+                      <a:solidFill>
+                        <a:srgbClr val="C8CDD3"/>
+                      </a:solidFill>
+                    </a:lnR>
+                    <a:lnL w="6350" cap="flat" cmpd="sng" algn="ctr">
+                      <a:solidFill>
+                        <a:srgbClr val="C8CDD3"/>
+                      </a:solidFill>
+                    </a:lnL>
+                    <a:solidFill>
+                      <a:srgbClr val="FFFFFF"/>
+                    </a:solidFill>
+                  </a:tcPr>
+                </a:tc>
+                <a:tc>
+                  <a:txBody>
+                    <a:bodyPr/>
+                    <a:lstStyle/>
+                    <a:p>
+                      <a:r>
+                        <a:rPr sz="800" b="0" i="0">
+                          <a:solidFill>
+                            <a:srgbClr val="1F2937"/>
+                          </a:solidFill>
+                          <a:latin typeface="Arial"/>
+                        </a:rPr>
+                        <a:t>11 No. runs</a:t>
+                      </a:r>
+                    </a:p>
+                  </a:txBody>
+                  <a:tcPr marL="91440" marR="91440" marT="45720" marB="45720">
+                    <a:lnB w="6350" cap="flat" cmpd="sng" algn="ctr">
+                      <a:solidFill>
+                        <a:srgbClr val="C8CDD3"/>
+                      </a:solidFill>
+                    </a:lnB>
+                    <a:lnT w="6350" cap="flat" cmpd="sng" algn="ctr">
+                      <a:solidFill>
+                        <a:srgbClr val="C8CDD3"/>
+                      </a:solidFill>
+                    </a:lnT>
+                    <a:lnR w="6350" cap="flat" cmpd="sng" algn="ctr">
+                      <a:solidFill>
+                        <a:srgbClr val="C8CDD3"/>
+                      </a:solidFill>
+                    </a:lnR>
+                    <a:lnL w="6350" cap="flat" cmpd="sng" algn="ctr">
+                      <a:solidFill>
+                        <a:srgbClr val="C8CDD3"/>
+                      </a:solidFill>
+                    </a:lnL>
+                    <a:solidFill>
+                      <a:srgbClr val="FFFFFF"/>
+                    </a:solidFill>
+                  </a:tcPr>
+                </a:tc>
+                <a:tc>
+                  <a:txBody>
+                    <a:bodyPr/>
+                    <a:lstStyle/>
+                    <a:p>
+                      <a:r>
+                        <a:rPr sz="800" b="0" i="0">
+                          <a:solidFill>
+                            <a:srgbClr val="1F2937"/>
+                          </a:solidFill>
+                          <a:latin typeface="Arial"/>
+                        </a:rPr>
+                        <a:t>—</a:t>
+                      </a:r>
+                    </a:p>
+                  </a:txBody>
+                  <a:tcPr marL="91440" marR="91440" marT="45720" marB="45720">
+                    <a:lnB w="6350" cap="flat" cmpd="sng" algn="ctr">
+                      <a:solidFill>
+                        <a:srgbClr val="C8CDD3"/>
+                      </a:solidFill>
+                    </a:lnB>
+                    <a:lnT w="6350" cap="flat" cmpd="sng" algn="ctr">
+                      <a:solidFill>
+                        <a:srgbClr val="C8CDD3"/>
+                      </a:solidFill>
+                    </a:lnT>
+                    <a:lnR w="6350" cap="flat" cmpd="sng" algn="ctr">
+                      <a:solidFill>
+                        <a:srgbClr val="C8CDD3"/>
+                      </a:solidFill>
+                    </a:lnR>
+                    <a:lnL w="6350" cap="flat" cmpd="sng" algn="ctr">
+                      <a:solidFill>
+                        <a:srgbClr val="C8CDD3"/>
+                      </a:solidFill>
+                    </a:lnL>
+                    <a:solidFill>
+                      <a:srgbClr val="FFFFFF"/>
+                    </a:solidFill>
+                  </a:tcPr>
+                </a:tc>
+                <a:tc>
+                  <a:txBody>
+                    <a:bodyPr/>
+                    <a:lstStyle/>
+                    <a:p>
+                      <a:r>
+                        <a:rPr sz="800" b="0" i="0">
+                          <a:solidFill>
+                            <a:srgbClr val="1F2937"/>
+                          </a:solidFill>
+                          <a:latin typeface="Arial"/>
+                        </a:rPr>
+                        <a:t>LOC-01 cable in and protected</a:t>
+                      </a:r>
+                    </a:p>
+                  </a:txBody>
+                  <a:tcPr marL="91440" marR="91440" marT="45720" marB="45720">
+                    <a:lnB w="6350" cap="flat" cmpd="sng" algn="ctr">
+                      <a:solidFill>
+                        <a:srgbClr val="C8CDD3"/>
+                      </a:solidFill>
+                    </a:lnB>
+                    <a:lnT w="6350" cap="flat" cmpd="sng" algn="ctr">
+                      <a:solidFill>
+                        <a:srgbClr val="C8CDD3"/>
+                      </a:solidFill>
+                    </a:lnT>
+                    <a:lnR w="6350" cap="flat" cmpd="sng" algn="ctr">
+                      <a:solidFill>
+                        <a:srgbClr val="C8CDD3"/>
+                      </a:solidFill>
+                    </a:lnR>
+                    <a:lnL w="6350" cap="flat" cmpd="sng" algn="ctr">
+                      <a:solidFill>
+                        <a:srgbClr val="C8CDD3"/>
+                      </a:solidFill>
+                    </a:lnL>
+                    <a:solidFill>
+                      <a:srgbClr val="FFFFFF"/>
+                    </a:solidFill>
+                  </a:tcPr>
+                </a:tc>
+              </a:tr>
+              <a:tr h="310413">
+                <a:tc>
+                  <a:txBody>
+                    <a:bodyPr/>
+                    <a:lstStyle/>
+                    <a:p>
+                      <a:r>
+                        <a:rPr sz="800" b="1" i="0">
+                          <a:solidFill>
+                            <a:srgbClr val="1F2937"/>
+                          </a:solidFill>
+                          <a:latin typeface="Arial"/>
+                        </a:rPr>
+                        <a:t>4</a:t>
+                      </a:r>
+                    </a:p>
+                  </a:txBody>
+                  <a:tcPr marL="91440" marR="91440" marT="45720" marB="45720">
+                    <a:lnB w="6350" cap="flat" cmpd="sng" algn="ctr">
+                      <a:solidFill>
+                        <a:srgbClr val="C8CDD3"/>
+                      </a:solidFill>
+                    </a:lnB>
+                    <a:lnT w="6350" cap="flat" cmpd="sng" algn="ctr">
+                      <a:solidFill>
+                        <a:srgbClr val="C8CDD3"/>
+                      </a:solidFill>
+                    </a:lnT>
+                    <a:lnR w="6350" cap="flat" cmpd="sng" algn="ctr">
+                      <a:solidFill>
+                        <a:srgbClr val="C8CDD3"/>
+                      </a:solidFill>
+                    </a:lnR>
+                    <a:lnL w="6350" cap="flat" cmpd="sng" algn="ctr">
+                      <a:solidFill>
+                        <a:srgbClr val="C8CDD3"/>
+                      </a:solidFill>
+                    </a:lnL>
+                    <a:solidFill>
+                      <a:srgbClr val="F4F6F8"/>
+                    </a:solidFill>
+                  </a:tcPr>
+                </a:tc>
+                <a:tc>
+                  <a:txBody>
+                    <a:bodyPr/>
+                    <a:lstStyle/>
+                    <a:p>
+                      <a:r>
+                        <a:rPr sz="800" b="0" i="0">
+                          <a:solidFill>
+                            <a:srgbClr val="1F2937"/>
+                          </a:solidFill>
+                          <a:latin typeface="Arial"/>
+                        </a:rPr>
+                        <a:t>Lay new secondary cable through the saw cut</a:t>
+                      </a:r>
+                    </a:p>
+                  </a:txBody>
+                  <a:tcPr marL="91440" marR="91440" marT="45720" marB="45720">
+                    <a:lnB w="6350" cap="flat" cmpd="sng" algn="ctr">
+                      <a:solidFill>
+                        <a:srgbClr val="C8CDD3"/>
+                      </a:solidFill>
+                    </a:lnB>
+                    <a:lnT w="6350" cap="flat" cmpd="sng" algn="ctr">
+                      <a:solidFill>
+                        <a:srgbClr val="C8CDD3"/>
+                      </a:solidFill>
+                    </a:lnT>
+                    <a:lnR w="6350" cap="flat" cmpd="sng" algn="ctr">
+                      <a:solidFill>
+                        <a:srgbClr val="C8CDD3"/>
+                      </a:solidFill>
+                    </a:lnR>
+                    <a:lnL w="6350" cap="flat" cmpd="sng" algn="ctr">
+                      <a:solidFill>
+                        <a:srgbClr val="C8CDD3"/>
+                      </a:solidFill>
+                    </a:lnL>
+                    <a:solidFill>
+                      <a:srgbClr val="F4F6F8"/>
+                    </a:solidFill>
+                  </a:tcPr>
+                </a:tc>
+                <a:tc>
+                  <a:txBody>
+                    <a:bodyPr/>
+                    <a:lstStyle/>
+                    <a:p>
+                      <a:r>
+                        <a:rPr sz="800" b="0" i="0">
+                          <a:solidFill>
+                            <a:srgbClr val="1F2937"/>
+                          </a:solidFill>
+                          <a:latin typeface="Arial"/>
+                        </a:rPr>
+                        <a:t>LOC-02 / 03</a:t>
+                      </a:r>
+                    </a:p>
+                  </a:txBody>
+                  <a:tcPr marL="91440" marR="91440" marT="45720" marB="45720">
+                    <a:lnB w="6350" cap="flat" cmpd="sng" algn="ctr">
+                      <a:solidFill>
+                        <a:srgbClr val="C8CDD3"/>
+                      </a:solidFill>
+                    </a:lnB>
+                    <a:lnT w="6350" cap="flat" cmpd="sng" algn="ctr">
+                      <a:solidFill>
+                        <a:srgbClr val="C8CDD3"/>
+                      </a:solidFill>
+                    </a:lnT>
+                    <a:lnR w="6350" cap="flat" cmpd="sng" algn="ctr">
+                      <a:solidFill>
+                        <a:srgbClr val="C8CDD3"/>
+                      </a:solidFill>
+                    </a:lnR>
+                    <a:lnL w="6350" cap="flat" cmpd="sng" algn="ctr">
+                      <a:solidFill>
+                        <a:srgbClr val="C8CDD3"/>
+                      </a:solidFill>
+                    </a:lnL>
+                    <a:solidFill>
+                      <a:srgbClr val="F4F6F8"/>
+                    </a:solidFill>
+                  </a:tcPr>
+                </a:tc>
+                <a:tc>
+                  <a:txBody>
+                    <a:bodyPr/>
+                    <a:lstStyle/>
+                    <a:p>
+                      <a:r>
+                        <a:rPr sz="800" b="0" i="0">
+                          <a:solidFill>
+                            <a:srgbClr val="1F2937"/>
+                          </a:solidFill>
+                          <a:latin typeface="Arial"/>
+                        </a:rPr>
+                        <a:t>5 No. runs</a:t>
+                      </a:r>
+                    </a:p>
+                  </a:txBody>
+                  <a:tcPr marL="91440" marR="91440" marT="45720" marB="45720">
+                    <a:lnB w="6350" cap="flat" cmpd="sng" algn="ctr">
+                      <a:solidFill>
+                        <a:srgbClr val="C8CDD3"/>
+                      </a:solidFill>
+                    </a:lnB>
+                    <a:lnT w="6350" cap="flat" cmpd="sng" algn="ctr">
+                      <a:solidFill>
+                        <a:srgbClr val="C8CDD3"/>
+                      </a:solidFill>
+                    </a:lnT>
+                    <a:lnR w="6350" cap="flat" cmpd="sng" algn="ctr">
+                      <a:solidFill>
+                        <a:srgbClr val="C8CDD3"/>
+                      </a:solidFill>
+                    </a:lnR>
+                    <a:lnL w="6350" cap="flat" cmpd="sng" algn="ctr">
+                      <a:solidFill>
+                        <a:srgbClr val="C8CDD3"/>
+                      </a:solidFill>
+                    </a:lnL>
+                    <a:solidFill>
+                      <a:srgbClr val="F4F6F8"/>
+                    </a:solidFill>
+                  </a:tcPr>
+                </a:tc>
+                <a:tc>
+                  <a:txBody>
+                    <a:bodyPr/>
+                    <a:lstStyle/>
+                    <a:p>
+                      <a:r>
+                        <a:rPr sz="800" b="0" i="0">
+                          <a:solidFill>
+                            <a:srgbClr val="1F2937"/>
+                          </a:solidFill>
+                          <a:latin typeface="Arial"/>
+                        </a:rPr>
+                        <a:t>—</a:t>
+                      </a:r>
+                    </a:p>
+                  </a:txBody>
+                  <a:tcPr marL="91440" marR="91440" marT="45720" marB="45720">
+                    <a:lnB w="6350" cap="flat" cmpd="sng" algn="ctr">
+                      <a:solidFill>
+                        <a:srgbClr val="C8CDD3"/>
+                      </a:solidFill>
+                    </a:lnB>
+                    <a:lnT w="6350" cap="flat" cmpd="sng" algn="ctr">
+                      <a:solidFill>
+                        <a:srgbClr val="C8CDD3"/>
+                      </a:solidFill>
+                    </a:lnT>
+                    <a:lnR w="6350" cap="flat" cmpd="sng" algn="ctr">
+                      <a:solidFill>
+                        <a:srgbClr val="C8CDD3"/>
+                      </a:solidFill>
+                    </a:lnR>
+                    <a:lnL w="6350" cap="flat" cmpd="sng" algn="ctr">
+                      <a:solidFill>
+                        <a:srgbClr val="C8CDD3"/>
+                      </a:solidFill>
+                    </a:lnL>
+                    <a:solidFill>
+                      <a:srgbClr val="F4F6F8"/>
+                    </a:solidFill>
+                  </a:tcPr>
+                </a:tc>
+                <a:tc>
+                  <a:txBody>
+                    <a:bodyPr/>
+                    <a:lstStyle/>
+                    <a:p>
+                      <a:r>
+                        <a:rPr sz="800" b="0" i="0">
+                          <a:solidFill>
+                            <a:srgbClr val="1F2937"/>
+                          </a:solidFill>
+                          <a:latin typeface="Arial"/>
+                        </a:rPr>
+                        <a:t>All 16 No. runs cabled</a:t>
+                      </a:r>
+                    </a:p>
+                  </a:txBody>
+                  <a:tcPr marL="91440" marR="91440" marT="45720" marB="45720">
+                    <a:lnB w="6350" cap="flat" cmpd="sng" algn="ctr">
+                      <a:solidFill>
+                        <a:srgbClr val="C8CDD3"/>
+                      </a:solidFill>
+                    </a:lnB>
+                    <a:lnT w="6350" cap="flat" cmpd="sng" algn="ctr">
+                      <a:solidFill>
+                        <a:srgbClr val="C8CDD3"/>
+                      </a:solidFill>
+                    </a:lnT>
+                    <a:lnR w="6350" cap="flat" cmpd="sng" algn="ctr">
+                      <a:solidFill>
+                        <a:srgbClr val="C8CDD3"/>
+                      </a:solidFill>
+                    </a:lnR>
+                    <a:lnL w="6350" cap="flat" cmpd="sng" algn="ctr">
+                      <a:solidFill>
+                        <a:srgbClr val="C8CDD3"/>
+                      </a:solidFill>
+                    </a:lnL>
+                    <a:solidFill>
+                      <a:srgbClr val="F4F6F8"/>
+                    </a:solidFill>
+                  </a:tcPr>
+                </a:tc>
+              </a:tr>
+              <a:tr h="310413">
+                <a:tc>
+                  <a:txBody>
+                    <a:bodyPr/>
+                    <a:lstStyle/>
+                    <a:p>
+                      <a:r>
+                        <a:rPr sz="800" b="1" i="0">
+                          <a:solidFill>
+                            <a:srgbClr val="1F2937"/>
+                          </a:solidFill>
+                          <a:latin typeface="Arial"/>
+                        </a:rPr>
+                        <a:t>4</a:t>
+                      </a:r>
+                    </a:p>
+                  </a:txBody>
+                  <a:tcPr marL="91440" marR="91440" marT="45720" marB="45720">
+                    <a:lnB w="6350" cap="flat" cmpd="sng" algn="ctr">
+                      <a:solidFill>
+                        <a:srgbClr val="C8CDD3"/>
+                      </a:solidFill>
+                    </a:lnB>
+                    <a:lnT w="6350" cap="flat" cmpd="sng" algn="ctr">
+                      <a:solidFill>
+                        <a:srgbClr val="C8CDD3"/>
+                      </a:solidFill>
+                    </a:lnT>
+                    <a:lnR w="6350" cap="flat" cmpd="sng" algn="ctr">
+                      <a:solidFill>
+                        <a:srgbClr val="C8CDD3"/>
+                      </a:solidFill>
+                    </a:lnR>
+                    <a:lnL w="6350" cap="flat" cmpd="sng" algn="ctr">
+                      <a:solidFill>
+                        <a:srgbClr val="C8CDD3"/>
+                      </a:solidFill>
+                    </a:lnL>
+                    <a:solidFill>
+                      <a:srgbClr val="F4F6F8"/>
+                    </a:solidFill>
+                  </a:tcPr>
+                </a:tc>
+                <a:tc>
+                  <a:txBody>
+                    <a:bodyPr/>
+                    <a:lstStyle/>
+                    <a:p>
+                      <a:r>
+                        <a:rPr sz="800" b="0" i="0">
+                          <a:solidFill>
+                            <a:srgbClr val="1F2937"/>
+                          </a:solidFill>
+                          <a:latin typeface="Arial"/>
+                        </a:rPr>
+                        <a:t>Cable termination at the bases and at the manholes</a:t>
+                      </a:r>
+                    </a:p>
+                  </a:txBody>
+                  <a:tcPr marL="91440" marR="91440" marT="45720" marB="45720">
+                    <a:lnB w="6350" cap="flat" cmpd="sng" algn="ctr">
+                      <a:solidFill>
+                        <a:srgbClr val="C8CDD3"/>
+                      </a:solidFill>
+                    </a:lnB>
+                    <a:lnT w="6350" cap="flat" cmpd="sng" algn="ctr">
+                      <a:solidFill>
+                        <a:srgbClr val="C8CDD3"/>
+                      </a:solidFill>
+                    </a:lnT>
+                    <a:lnR w="6350" cap="flat" cmpd="sng" algn="ctr">
+                      <a:solidFill>
+                        <a:srgbClr val="C8CDD3"/>
+                      </a:solidFill>
+                    </a:lnR>
+                    <a:lnL w="6350" cap="flat" cmpd="sng" algn="ctr">
+                      <a:solidFill>
+                        <a:srgbClr val="C8CDD3"/>
+                      </a:solidFill>
+                    </a:lnL>
+                    <a:solidFill>
+                      <a:srgbClr val="F4F6F8"/>
+                    </a:solidFill>
+                  </a:tcPr>
+                </a:tc>
+                <a:tc>
+                  <a:txBody>
+                    <a:bodyPr/>
+                    <a:lstStyle/>
+                    <a:p>
+                      <a:r>
+                        <a:rPr sz="800" b="0" i="0">
+                          <a:solidFill>
+                            <a:srgbClr val="1F2937"/>
+                          </a:solidFill>
+                          <a:latin typeface="Arial"/>
+                        </a:rPr>
+                        <a:t>LOC-01 / 02 / 03</a:t>
+                      </a:r>
+                    </a:p>
+                  </a:txBody>
+                  <a:tcPr marL="91440" marR="91440" marT="45720" marB="45720">
+                    <a:lnB w="6350" cap="flat" cmpd="sng" algn="ctr">
+                      <a:solidFill>
+                        <a:srgbClr val="C8CDD3"/>
+                      </a:solidFill>
+                    </a:lnB>
+                    <a:lnT w="6350" cap="flat" cmpd="sng" algn="ctr">
+                      <a:solidFill>
+                        <a:srgbClr val="C8CDD3"/>
+                      </a:solidFill>
+                    </a:lnT>
+                    <a:lnR w="6350" cap="flat" cmpd="sng" algn="ctr">
+                      <a:solidFill>
+                        <a:srgbClr val="C8CDD3"/>
+                      </a:solidFill>
+                    </a:lnR>
+                    <a:lnL w="6350" cap="flat" cmpd="sng" algn="ctr">
+                      <a:solidFill>
+                        <a:srgbClr val="C8CDD3"/>
+                      </a:solidFill>
+                    </a:lnL>
+                    <a:solidFill>
+                      <a:srgbClr val="F4F6F8"/>
+                    </a:solidFill>
+                  </a:tcPr>
+                </a:tc>
+                <a:tc>
+                  <a:txBody>
+                    <a:bodyPr/>
+                    <a:lstStyle/>
+                    <a:p>
+                      <a:r>
+                        <a:rPr sz="800" b="0" i="0">
+                          <a:solidFill>
+                            <a:srgbClr val="1F2937"/>
+                          </a:solidFill>
+                          <a:latin typeface="Arial"/>
+                        </a:rPr>
+                        <a:t>16 No. fittings</a:t>
+                      </a:r>
+                    </a:p>
+                  </a:txBody>
+                  <a:tcPr marL="91440" marR="91440" marT="45720" marB="45720">
+                    <a:lnB w="6350" cap="flat" cmpd="sng" algn="ctr">
+                      <a:solidFill>
+                        <a:srgbClr val="C8CDD3"/>
+                      </a:solidFill>
+                    </a:lnB>
+                    <a:lnT w="6350" cap="flat" cmpd="sng" algn="ctr">
+                      <a:solidFill>
+                        <a:srgbClr val="C8CDD3"/>
+                      </a:solidFill>
+                    </a:lnT>
+                    <a:lnR w="6350" cap="flat" cmpd="sng" algn="ctr">
+                      <a:solidFill>
+                        <a:srgbClr val="C8CDD3"/>
+                      </a:solidFill>
+                    </a:lnR>
+                    <a:lnL w="6350" cap="flat" cmpd="sng" algn="ctr">
+                      <a:solidFill>
+                        <a:srgbClr val="C8CDD3"/>
+                      </a:solidFill>
+                    </a:lnL>
+                    <a:solidFill>
+                      <a:srgbClr val="F4F6F8"/>
+                    </a:solidFill>
+                  </a:tcPr>
+                </a:tc>
+                <a:tc>
+                  <a:txBody>
+                    <a:bodyPr/>
+                    <a:lstStyle/>
+                    <a:p>
+                      <a:r>
+                        <a:rPr sz="800" b="0" i="0">
+                          <a:solidFill>
+                            <a:srgbClr val="1F2937"/>
+                          </a:solidFill>
+                          <a:latin typeface="Arial"/>
+                        </a:rPr>
+                        <a:t>—</a:t>
+                      </a:r>
+                    </a:p>
+                  </a:txBody>
+                  <a:tcPr marL="91440" marR="91440" marT="45720" marB="45720">
+                    <a:lnB w="6350" cap="flat" cmpd="sng" algn="ctr">
+                      <a:solidFill>
+                        <a:srgbClr val="C8CDD3"/>
+                      </a:solidFill>
+                    </a:lnB>
+                    <a:lnT w="6350" cap="flat" cmpd="sng" algn="ctr">
+                      <a:solidFill>
+                        <a:srgbClr val="C8CDD3"/>
+                      </a:solidFill>
+                    </a:lnT>
+                    <a:lnR w="6350" cap="flat" cmpd="sng" algn="ctr">
+                      <a:solidFill>
+                        <a:srgbClr val="C8CDD3"/>
+                      </a:solidFill>
+                    </a:lnR>
+                    <a:lnL w="6350" cap="flat" cmpd="sng" algn="ctr">
+                      <a:solidFill>
+                        <a:srgbClr val="C8CDD3"/>
+                      </a:solidFill>
+                    </a:lnL>
+                    <a:solidFill>
+                      <a:srgbClr val="F4F6F8"/>
+                    </a:solidFill>
+                  </a:tcPr>
+                </a:tc>
+                <a:tc>
+                  <a:txBody>
+                    <a:bodyPr/>
+                    <a:lstStyle/>
+                    <a:p>
+                      <a:r>
+                        <a:rPr sz="800" b="0" i="0">
+                          <a:solidFill>
+                            <a:srgbClr val="1F2937"/>
+                          </a:solidFill>
+                          <a:latin typeface="Arial"/>
+                        </a:rPr>
+                        <a:t>Terminations made off</a:t>
+                      </a:r>
+                    </a:p>
+                  </a:txBody>
+                  <a:tcPr marL="91440" marR="91440" marT="45720" marB="45720">
+                    <a:lnB w="6350" cap="flat" cmpd="sng" algn="ctr">
+                      <a:solidFill>
+                        <a:srgbClr val="C8CDD3"/>
+                      </a:solidFill>
+                    </a:lnB>
+                    <a:lnT w="6350" cap="flat" cmpd="sng" algn="ctr">
+                      <a:solidFill>
+                        <a:srgbClr val="C8CDD3"/>
+                      </a:solidFill>
+                    </a:lnT>
+                    <a:lnR w="6350" cap="flat" cmpd="sng" algn="ctr">
+                      <a:solidFill>
+                        <a:srgbClr val="C8CDD3"/>
+                      </a:solidFill>
+                    </a:lnR>
+                    <a:lnL w="6350" cap="flat" cmpd="sng" algn="ctr">
+                      <a:solidFill>
+                        <a:srgbClr val="C8CDD3"/>
+                      </a:solidFill>
+                    </a:lnL>
+                    <a:solidFill>
+                      <a:srgbClr val="F4F6F8"/>
+                    </a:solidFill>
+                  </a:tcPr>
+                </a:tc>
+              </a:tr>
+              <a:tr h="310413">
+                <a:tc>
+                  <a:txBody>
+                    <a:bodyPr/>
+                    <a:lstStyle/>
+                    <a:p>
+                      <a:r>
+                        <a:rPr sz="800" b="1" i="0">
+                          <a:solidFill>
+                            <a:srgbClr val="1F2937"/>
+                          </a:solidFill>
+                          <a:latin typeface="Arial"/>
+                        </a:rPr>
+                        <a:t>4</a:t>
+                      </a:r>
+                    </a:p>
+                  </a:txBody>
+                  <a:tcPr marL="91440" marR="91440" marT="45720" marB="45720">
+                    <a:lnB w="6350" cap="flat" cmpd="sng" algn="ctr">
+                      <a:solidFill>
+                        <a:srgbClr val="C8CDD3"/>
+                      </a:solidFill>
+                    </a:lnB>
+                    <a:lnT w="6350" cap="flat" cmpd="sng" algn="ctr">
+                      <a:solidFill>
+                        <a:srgbClr val="C8CDD3"/>
+                      </a:solidFill>
+                    </a:lnT>
+                    <a:lnR w="6350" cap="flat" cmpd="sng" algn="ctr">
+                      <a:solidFill>
+                        <a:srgbClr val="C8CDD3"/>
+                      </a:solidFill>
+                    </a:lnR>
+                    <a:lnL w="6350" cap="flat" cmpd="sng" algn="ctr">
+                      <a:solidFill>
+                        <a:srgbClr val="C8CDD3"/>
+                      </a:solidFill>
+                    </a:lnL>
+                    <a:solidFill>
+                      <a:srgbClr val="F4F6F8"/>
+                    </a:solidFill>
+                  </a:tcPr>
+                </a:tc>
+                <a:tc>
+                  <a:txBody>
+                    <a:bodyPr/>
+                    <a:lstStyle/>
+                    <a:p>
+                      <a:r>
+                        <a:rPr sz="800" b="0" i="0">
+                          <a:solidFill>
+                            <a:srgbClr val="1F2937"/>
+                          </a:solidFill>
+                          <a:latin typeface="Arial"/>
+                        </a:rPr>
+                        <a:t>Insulation resistance and continuity testing</a:t>
+                      </a:r>
+                    </a:p>
+                  </a:txBody>
+                  <a:tcPr marL="91440" marR="91440" marT="45720" marB="45720">
+                    <a:lnB w="6350" cap="flat" cmpd="sng" algn="ctr">
+                      <a:solidFill>
+                        <a:srgbClr val="C8CDD3"/>
+                      </a:solidFill>
+                    </a:lnB>
+                    <a:lnT w="6350" cap="flat" cmpd="sng" algn="ctr">
+                      <a:solidFill>
+                        <a:srgbClr val="C8CDD3"/>
+                      </a:solidFill>
+                    </a:lnT>
+                    <a:lnR w="6350" cap="flat" cmpd="sng" algn="ctr">
+                      <a:solidFill>
+                        <a:srgbClr val="C8CDD3"/>
+                      </a:solidFill>
+                    </a:lnR>
+                    <a:lnL w="6350" cap="flat" cmpd="sng" algn="ctr">
+                      <a:solidFill>
+                        <a:srgbClr val="C8CDD3"/>
+                      </a:solidFill>
+                    </a:lnL>
+                    <a:solidFill>
+                      <a:srgbClr val="F4F6F8"/>
+                    </a:solidFill>
+                  </a:tcPr>
+                </a:tc>
+                <a:tc>
+                  <a:txBody>
+                    <a:bodyPr/>
+                    <a:lstStyle/>
+                    <a:p>
+                      <a:r>
+                        <a:rPr sz="800" b="0" i="0">
+                          <a:solidFill>
+                            <a:srgbClr val="1F2937"/>
+                          </a:solidFill>
+                          <a:latin typeface="Arial"/>
+                        </a:rPr>
+                        <a:t>LOC-01 / 02 / 03</a:t>
+                      </a:r>
+                    </a:p>
+                  </a:txBody>
+                  <a:tcPr marL="91440" marR="91440" marT="45720" marB="45720">
+                    <a:lnB w="6350" cap="flat" cmpd="sng" algn="ctr">
+                      <a:solidFill>
+                        <a:srgbClr val="C8CDD3"/>
+                      </a:solidFill>
+                    </a:lnB>
+                    <a:lnT w="6350" cap="flat" cmpd="sng" algn="ctr">
+                      <a:solidFill>
+                        <a:srgbClr val="C8CDD3"/>
+                      </a:solidFill>
+                    </a:lnT>
+                    <a:lnR w="6350" cap="flat" cmpd="sng" algn="ctr">
+                      <a:solidFill>
+                        <a:srgbClr val="C8CDD3"/>
+                      </a:solidFill>
+                    </a:lnR>
+                    <a:lnL w="6350" cap="flat" cmpd="sng" algn="ctr">
+                      <a:solidFill>
+                        <a:srgbClr val="C8CDD3"/>
+                      </a:solidFill>
+                    </a:lnL>
+                    <a:solidFill>
+                      <a:srgbClr val="F4F6F8"/>
+                    </a:solidFill>
+                  </a:tcPr>
+                </a:tc>
+                <a:tc>
+                  <a:txBody>
+                    <a:bodyPr/>
+                    <a:lstStyle/>
+                    <a:p>
+                      <a:r>
+                        <a:rPr sz="800" b="0" i="0">
+                          <a:solidFill>
+                            <a:srgbClr val="1F2937"/>
+                          </a:solidFill>
+                          <a:latin typeface="Arial"/>
+                        </a:rPr>
+                        <a:t>4 No. circuits</a:t>
+                      </a:r>
+                    </a:p>
+                  </a:txBody>
+                  <a:tcPr marL="91440" marR="91440" marT="45720" marB="45720">
+                    <a:lnB w="6350" cap="flat" cmpd="sng" algn="ctr">
+                      <a:solidFill>
+                        <a:srgbClr val="C8CDD3"/>
+                      </a:solidFill>
+                    </a:lnB>
+                    <a:lnT w="6350" cap="flat" cmpd="sng" algn="ctr">
+                      <a:solidFill>
+                        <a:srgbClr val="C8CDD3"/>
+                      </a:solidFill>
+                    </a:lnT>
+                    <a:lnR w="6350" cap="flat" cmpd="sng" algn="ctr">
+                      <a:solidFill>
+                        <a:srgbClr val="C8CDD3"/>
+                      </a:solidFill>
+                    </a:lnR>
+                    <a:lnL w="6350" cap="flat" cmpd="sng" algn="ctr">
+                      <a:solidFill>
+                        <a:srgbClr val="C8CDD3"/>
+                      </a:solidFill>
+                    </a:lnL>
+                    <a:solidFill>
+                      <a:srgbClr val="F4F6F8"/>
+                    </a:solidFill>
+                  </a:tcPr>
+                </a:tc>
+                <a:tc>
+                  <a:txBody>
+                    <a:bodyPr/>
+                    <a:lstStyle/>
+                    <a:p>
+                      <a:r>
+                        <a:rPr sz="800" b="0" i="0">
+                          <a:solidFill>
+                            <a:srgbClr val="1F2937"/>
+                          </a:solidFill>
+                          <a:latin typeface="Arial"/>
+                        </a:rPr>
+                        <a:t>—</a:t>
+                      </a:r>
+                    </a:p>
+                  </a:txBody>
+                  <a:tcPr marL="91440" marR="91440" marT="45720" marB="45720">
+                    <a:lnB w="6350" cap="flat" cmpd="sng" algn="ctr">
+                      <a:solidFill>
+                        <a:srgbClr val="C8CDD3"/>
+                      </a:solidFill>
+                    </a:lnB>
+                    <a:lnT w="6350" cap="flat" cmpd="sng" algn="ctr">
+                      <a:solidFill>
+                        <a:srgbClr val="C8CDD3"/>
+                      </a:solidFill>
+                    </a:lnT>
+                    <a:lnR w="6350" cap="flat" cmpd="sng" algn="ctr">
+                      <a:solidFill>
+                        <a:srgbClr val="C8CDD3"/>
+                      </a:solidFill>
+                    </a:lnR>
+                    <a:lnL w="6350" cap="flat" cmpd="sng" algn="ctr">
+                      <a:solidFill>
+                        <a:srgbClr val="C8CDD3"/>
+                      </a:solidFill>
+                    </a:lnL>
+                    <a:solidFill>
+                      <a:srgbClr val="F4F6F8"/>
+                    </a:solidFill>
+                  </a:tcPr>
+                </a:tc>
+                <a:tc>
+                  <a:txBody>
+                    <a:bodyPr/>
+                    <a:lstStyle/>
+                    <a:p>
+                      <a:r>
+                        <a:rPr sz="800" b="0" i="0">
+                          <a:solidFill>
+                            <a:srgbClr val="1F2937"/>
+                          </a:solidFill>
+                          <a:latin typeface="Arial"/>
+                        </a:rPr>
+                        <a:t>Test records issued</a:t>
+                      </a:r>
+                    </a:p>
+                  </a:txBody>
+                  <a:tcPr marL="91440" marR="91440" marT="45720" marB="45720">
+                    <a:lnB w="6350" cap="flat" cmpd="sng" algn="ctr">
+                      <a:solidFill>
+                        <a:srgbClr val="C8CDD3"/>
+                      </a:solidFill>
+                    </a:lnB>
+                    <a:lnT w="6350" cap="flat" cmpd="sng" algn="ctr">
+                      <a:solidFill>
+                        <a:srgbClr val="C8CDD3"/>
+                      </a:solidFill>
+                    </a:lnT>
+                    <a:lnR w="6350" cap="flat" cmpd="sng" algn="ctr">
+                      <a:solidFill>
+                        <a:srgbClr val="C8CDD3"/>
+                      </a:solidFill>
+                    </a:lnR>
+                    <a:lnL w="6350" cap="flat" cmpd="sng" algn="ctr">
+                      <a:solidFill>
+                        <a:srgbClr val="C8CDD3"/>
+                      </a:solidFill>
+                    </a:lnL>
+                    <a:solidFill>
+                      <a:srgbClr val="F4F6F8"/>
+                    </a:solidFill>
+                  </a:tcPr>
+                </a:tc>
+              </a:tr>
+              <a:tr h="310413">
+                <a:tc>
+                  <a:txBody>
+                    <a:bodyPr/>
+                    <a:lstStyle/>
+                    <a:p>
+                      <a:r>
+                        <a:rPr sz="800" b="1" i="0">
+                          <a:solidFill>
+                            <a:srgbClr val="1F2937"/>
+                          </a:solidFill>
+                          <a:latin typeface="Arial"/>
+                        </a:rPr>
+                        <a:t>5</a:t>
+                      </a:r>
+                    </a:p>
+                  </a:txBody>
+                  <a:tcPr marL="91440" marR="91440" marT="45720" marB="45720">
+                    <a:lnB w="6350" cap="flat" cmpd="sng" algn="ctr">
+                      <a:solidFill>
+                        <a:srgbClr val="C8CDD3"/>
+                      </a:solidFill>
+                    </a:lnB>
+                    <a:lnT w="6350" cap="flat" cmpd="sng" algn="ctr">
+                      <a:solidFill>
+                        <a:srgbClr val="C8CDD3"/>
+                      </a:solidFill>
+                    </a:lnT>
+                    <a:lnR w="6350" cap="flat" cmpd="sng" algn="ctr">
+                      <a:solidFill>
+                        <a:srgbClr val="C8CDD3"/>
+                      </a:solidFill>
+                    </a:lnR>
+                    <a:lnL w="6350" cap="flat" cmpd="sng" algn="ctr">
+                      <a:solidFill>
+                        <a:srgbClr val="C8CDD3"/>
+                      </a:solidFill>
+                    </a:lnL>
+                    <a:solidFill>
+                      <a:srgbClr val="FFFFFF"/>
+                    </a:solidFill>
+                  </a:tcPr>
+                </a:tc>
+                <a:tc>
+                  <a:txBody>
+                    <a:bodyPr/>
+                    <a:lstStyle/>
+                    <a:p>
+                      <a:r>
+                        <a:rPr sz="800" b="0" i="0">
+                          <a:solidFill>
+                            <a:srgbClr val="1F2937"/>
+                          </a:solidFill>
+                          <a:latin typeface="Arial"/>
+                        </a:rPr>
+                        <a:t>Backfill, sealant and pavement reinstatement of the saw cut</a:t>
+                      </a:r>
+                    </a:p>
+                  </a:txBody>
+                  <a:tcPr marL="91440" marR="91440" marT="45720" marB="45720">
+                    <a:lnB w="6350" cap="flat" cmpd="sng" algn="ctr">
+                      <a:solidFill>
+                        <a:srgbClr val="C8CDD3"/>
+                      </a:solidFill>
+                    </a:lnB>
+                    <a:lnT w="6350" cap="flat" cmpd="sng" algn="ctr">
+                      <a:solidFill>
+                        <a:srgbClr val="C8CDD3"/>
+                      </a:solidFill>
+                    </a:lnT>
+                    <a:lnR w="6350" cap="flat" cmpd="sng" algn="ctr">
+                      <a:solidFill>
+                        <a:srgbClr val="C8CDD3"/>
+                      </a:solidFill>
+                    </a:lnR>
+                    <a:lnL w="6350" cap="flat" cmpd="sng" algn="ctr">
+                      <a:solidFill>
+                        <a:srgbClr val="C8CDD3"/>
+                      </a:solidFill>
+                    </a:lnL>
+                    <a:solidFill>
+                      <a:srgbClr val="FFFFFF"/>
+                    </a:solidFill>
+                  </a:tcPr>
+                </a:tc>
+                <a:tc>
+                  <a:txBody>
+                    <a:bodyPr/>
+                    <a:lstStyle/>
+                    <a:p>
+                      <a:r>
+                        <a:rPr sz="800" b="0" i="0">
+                          <a:solidFill>
+                            <a:srgbClr val="1F2937"/>
+                          </a:solidFill>
+                          <a:latin typeface="Arial"/>
+                        </a:rPr>
+                        <a:t>LOC-01 / 02 / 03</a:t>
+                      </a:r>
+                    </a:p>
+                  </a:txBody>
+                  <a:tcPr marL="91440" marR="91440" marT="45720" marB="45720">
+                    <a:lnB w="6350" cap="flat" cmpd="sng" algn="ctr">
+                      <a:solidFill>
+                        <a:srgbClr val="C8CDD3"/>
+                      </a:solidFill>
+                    </a:lnB>
+                    <a:lnT w="6350" cap="flat" cmpd="sng" algn="ctr">
+                      <a:solidFill>
+                        <a:srgbClr val="C8CDD3"/>
+                      </a:solidFill>
+                    </a:lnT>
+                    <a:lnR w="6350" cap="flat" cmpd="sng" algn="ctr">
+                      <a:solidFill>
+                        <a:srgbClr val="C8CDD3"/>
+                      </a:solidFill>
+                    </a:lnR>
+                    <a:lnL w="6350" cap="flat" cmpd="sng" algn="ctr">
+                      <a:solidFill>
+                        <a:srgbClr val="C8CDD3"/>
+                      </a:solidFill>
+                    </a:lnL>
+                    <a:solidFill>
+                      <a:srgbClr val="FFFFFF"/>
+                    </a:solidFill>
+                  </a:tcPr>
+                </a:tc>
+                <a:tc>
+                  <a:txBody>
+                    <a:bodyPr/>
+                    <a:lstStyle/>
+                    <a:p>
+                      <a:r>
+                        <a:rPr sz="800" b="0" i="0">
+                          <a:solidFill>
+                            <a:srgbClr val="1F2937"/>
+                          </a:solidFill>
+                          <a:latin typeface="Arial"/>
+                        </a:rPr>
+                        <a:t>approx. 420 m</a:t>
+                      </a:r>
+                    </a:p>
+                  </a:txBody>
+                  <a:tcPr marL="91440" marR="91440" marT="45720" marB="45720">
+                    <a:lnB w="6350" cap="flat" cmpd="sng" algn="ctr">
+                      <a:solidFill>
+                        <a:srgbClr val="C8CDD3"/>
+                      </a:solidFill>
+                    </a:lnB>
+                    <a:lnT w="6350" cap="flat" cmpd="sng" algn="ctr">
+                      <a:solidFill>
+                        <a:srgbClr val="C8CDD3"/>
+                      </a:solidFill>
+                    </a:lnT>
+                    <a:lnR w="6350" cap="flat" cmpd="sng" algn="ctr">
+                      <a:solidFill>
+                        <a:srgbClr val="C8CDD3"/>
+                      </a:solidFill>
+                    </a:lnR>
+                    <a:lnL w="6350" cap="flat" cmpd="sng" algn="ctr">
+                      <a:solidFill>
+                        <a:srgbClr val="C8CDD3"/>
+                      </a:solidFill>
+                    </a:lnL>
+                    <a:solidFill>
+                      <a:srgbClr val="FFFFFF"/>
+                    </a:solidFill>
+                  </a:tcPr>
+                </a:tc>
+                <a:tc>
+                  <a:txBody>
+                    <a:bodyPr/>
+                    <a:lstStyle/>
+                    <a:p>
+                      <a:r>
+                        <a:rPr sz="800" b="0" i="0">
+                          <a:solidFill>
+                            <a:srgbClr val="1F2937"/>
+                          </a:solidFill>
+                          <a:latin typeface="Arial"/>
+                        </a:rPr>
+                        <a:t>Per the awaited detail</a:t>
+                      </a:r>
+                    </a:p>
+                  </a:txBody>
+                  <a:tcPr marL="91440" marR="91440" marT="45720" marB="45720">
+                    <a:lnB w="6350" cap="flat" cmpd="sng" algn="ctr">
+                      <a:solidFill>
+                        <a:srgbClr val="C8CDD3"/>
+                      </a:solidFill>
+                    </a:lnB>
+                    <a:lnT w="6350" cap="flat" cmpd="sng" algn="ctr">
+                      <a:solidFill>
+                        <a:srgbClr val="C8CDD3"/>
+                      </a:solidFill>
+                    </a:lnT>
+                    <a:lnR w="6350" cap="flat" cmpd="sng" algn="ctr">
+                      <a:solidFill>
+                        <a:srgbClr val="C8CDD3"/>
+                      </a:solidFill>
+                    </a:lnR>
+                    <a:lnL w="6350" cap="flat" cmpd="sng" algn="ctr">
+                      <a:solidFill>
+                        <a:srgbClr val="C8CDD3"/>
+                      </a:solidFill>
+                    </a:lnL>
+                    <a:solidFill>
+                      <a:srgbClr val="FFFFFF"/>
+                    </a:solidFill>
+                  </a:tcPr>
+                </a:tc>
+                <a:tc>
+                  <a:txBody>
+                    <a:bodyPr/>
+                    <a:lstStyle/>
+                    <a:p>
+                      <a:r>
+                        <a:rPr sz="800" b="0" i="0">
+                          <a:solidFill>
+                            <a:srgbClr val="1F2937"/>
+                          </a:solidFill>
+                          <a:latin typeface="Arial"/>
+                        </a:rPr>
+                        <a:t>Cut sealed; cure period started</a:t>
+                      </a:r>
+                    </a:p>
+                  </a:txBody>
+                  <a:tcPr marL="91440" marR="91440" marT="45720" marB="45720">
+                    <a:lnB w="6350" cap="flat" cmpd="sng" algn="ctr">
+                      <a:solidFill>
+                        <a:srgbClr val="C8CDD3"/>
+                      </a:solidFill>
+                    </a:lnB>
+                    <a:lnT w="6350" cap="flat" cmpd="sng" algn="ctr">
+                      <a:solidFill>
+                        <a:srgbClr val="C8CDD3"/>
+                      </a:solidFill>
+                    </a:lnT>
+                    <a:lnR w="6350" cap="flat" cmpd="sng" algn="ctr">
+                      <a:solidFill>
+                        <a:srgbClr val="C8CDD3"/>
+                      </a:solidFill>
+                    </a:lnR>
+                    <a:lnL w="6350" cap="flat" cmpd="sng" algn="ctr">
+                      <a:solidFill>
+                        <a:srgbClr val="C8CDD3"/>
+                      </a:solidFill>
+                    </a:lnL>
+                    <a:solidFill>
+                      <a:srgbClr val="FFFFFF"/>
+                    </a:solidFill>
+                  </a:tcPr>
+                </a:tc>
+              </a:tr>
+              <a:tr h="310413">
+                <a:tc>
+                  <a:txBody>
+                    <a:bodyPr/>
+                    <a:lstStyle/>
+                    <a:p>
+                      <a:r>
+                        <a:rPr sz="800" b="1" i="0">
+                          <a:solidFill>
+                            <a:srgbClr val="1F2937"/>
+                          </a:solidFill>
+                          <a:latin typeface="Arial"/>
+                        </a:rPr>
+                        <a:t>5</a:t>
+                      </a:r>
+                    </a:p>
+                  </a:txBody>
+                  <a:tcPr marL="91440" marR="91440" marT="45720" marB="45720">
+                    <a:lnB w="6350" cap="flat" cmpd="sng" algn="ctr">
+                      <a:solidFill>
+                        <a:srgbClr val="C8CDD3"/>
+                      </a:solidFill>
+                    </a:lnB>
+                    <a:lnT w="6350" cap="flat" cmpd="sng" algn="ctr">
+                      <a:solidFill>
+                        <a:srgbClr val="C8CDD3"/>
+                      </a:solidFill>
+                    </a:lnT>
+                    <a:lnR w="6350" cap="flat" cmpd="sng" algn="ctr">
+                      <a:solidFill>
+                        <a:srgbClr val="C8CDD3"/>
+                      </a:solidFill>
+                    </a:lnR>
+                    <a:lnL w="6350" cap="flat" cmpd="sng" algn="ctr">
+                      <a:solidFill>
+                        <a:srgbClr val="C8CDD3"/>
+                      </a:solidFill>
+                    </a:lnL>
+                    <a:solidFill>
+                      <a:srgbClr val="FFFFFF"/>
+                    </a:solidFill>
+                  </a:tcPr>
+                </a:tc>
+                <a:tc>
+                  <a:txBody>
+                    <a:bodyPr/>
+                    <a:lstStyle/>
+                    <a:p>
+                      <a:r>
+                        <a:rPr sz="800" b="0" i="0">
+                          <a:solidFill>
+                            <a:srgbClr val="1F2937"/>
+                          </a:solidFill>
+                          <a:latin typeface="Arial"/>
+                        </a:rPr>
+                        <a:t>Re-fix the runway guard lights removed under Phase 1</a:t>
+                      </a:r>
+                    </a:p>
+                  </a:txBody>
+                  <a:tcPr marL="91440" marR="91440" marT="45720" marB="45720">
+                    <a:lnB w="6350" cap="flat" cmpd="sng" algn="ctr">
+                      <a:solidFill>
+                        <a:srgbClr val="C8CDD3"/>
+                      </a:solidFill>
+                    </a:lnB>
+                    <a:lnT w="6350" cap="flat" cmpd="sng" algn="ctr">
+                      <a:solidFill>
+                        <a:srgbClr val="C8CDD3"/>
+                      </a:solidFill>
+                    </a:lnT>
+                    <a:lnR w="6350" cap="flat" cmpd="sng" algn="ctr">
+                      <a:solidFill>
+                        <a:srgbClr val="C8CDD3"/>
+                      </a:solidFill>
+                    </a:lnR>
+                    <a:lnL w="6350" cap="flat" cmpd="sng" algn="ctr">
+                      <a:solidFill>
+                        <a:srgbClr val="C8CDD3"/>
+                      </a:solidFill>
+                    </a:lnL>
+                    <a:solidFill>
+                      <a:srgbClr val="FFFFFF"/>
+                    </a:solidFill>
+                  </a:tcPr>
+                </a:tc>
+                <a:tc>
+                  <a:txBody>
+                    <a:bodyPr/>
+                    <a:lstStyle/>
+                    <a:p>
+                      <a:r>
+                        <a:rPr sz="800" b="0" i="0">
+                          <a:solidFill>
+                            <a:srgbClr val="1F2937"/>
+                          </a:solidFill>
+                          <a:latin typeface="Arial"/>
+                        </a:rPr>
+                        <a:t>LOC-02 / 03</a:t>
+                      </a:r>
+                    </a:p>
+                  </a:txBody>
+                  <a:tcPr marL="91440" marR="91440" marT="45720" marB="45720">
+                    <a:lnB w="6350" cap="flat" cmpd="sng" algn="ctr">
+                      <a:solidFill>
+                        <a:srgbClr val="C8CDD3"/>
+                      </a:solidFill>
+                    </a:lnB>
+                    <a:lnT w="6350" cap="flat" cmpd="sng" algn="ctr">
+                      <a:solidFill>
+                        <a:srgbClr val="C8CDD3"/>
+                      </a:solidFill>
+                    </a:lnT>
+                    <a:lnR w="6350" cap="flat" cmpd="sng" algn="ctr">
+                      <a:solidFill>
+                        <a:srgbClr val="C8CDD3"/>
+                      </a:solidFill>
+                    </a:lnR>
+                    <a:lnL w="6350" cap="flat" cmpd="sng" algn="ctr">
+                      <a:solidFill>
+                        <a:srgbClr val="C8CDD3"/>
+                      </a:solidFill>
+                    </a:lnL>
+                    <a:solidFill>
+                      <a:srgbClr val="FFFFFF"/>
+                    </a:solidFill>
+                  </a:tcPr>
+                </a:tc>
+                <a:tc>
+                  <a:txBody>
+                    <a:bodyPr/>
+                    <a:lstStyle/>
+                    <a:p>
+                      <a:r>
+                        <a:rPr sz="800" b="0" i="0">
+                          <a:solidFill>
+                            <a:srgbClr val="1F2937"/>
+                          </a:solidFill>
+                          <a:latin typeface="Arial"/>
+                        </a:rPr>
+                        <a:t>3 No. RRM</a:t>
+                      </a:r>
+                    </a:p>
+                  </a:txBody>
+                  <a:tcPr marL="91440" marR="91440" marT="45720" marB="45720">
+                    <a:lnB w="6350" cap="flat" cmpd="sng" algn="ctr">
+                      <a:solidFill>
+                        <a:srgbClr val="C8CDD3"/>
+                      </a:solidFill>
+                    </a:lnB>
+                    <a:lnT w="6350" cap="flat" cmpd="sng" algn="ctr">
+                      <a:solidFill>
+                        <a:srgbClr val="C8CDD3"/>
+                      </a:solidFill>
+                    </a:lnT>
+                    <a:lnR w="6350" cap="flat" cmpd="sng" algn="ctr">
+                      <a:solidFill>
+                        <a:srgbClr val="C8CDD3"/>
+                      </a:solidFill>
+                    </a:lnR>
+                    <a:lnL w="6350" cap="flat" cmpd="sng" algn="ctr">
+                      <a:solidFill>
+                        <a:srgbClr val="C8CDD3"/>
+                      </a:solidFill>
+                    </a:lnL>
+                    <a:solidFill>
+                      <a:srgbClr val="FFFFFF"/>
+                    </a:solidFill>
+                  </a:tcPr>
+                </a:tc>
+                <a:tc>
+                  <a:txBody>
+                    <a:bodyPr/>
+                    <a:lstStyle/>
+                    <a:p>
+                      <a:r>
+                        <a:rPr sz="800" b="0" i="0">
+                          <a:solidFill>
+                            <a:srgbClr val="1F2937"/>
+                          </a:solidFill>
+                          <a:latin typeface="Arial"/>
+                        </a:rPr>
+                        <a:t>—</a:t>
+                      </a:r>
+                    </a:p>
+                  </a:txBody>
+                  <a:tcPr marL="91440" marR="91440" marT="45720" marB="45720">
+                    <a:lnB w="6350" cap="flat" cmpd="sng" algn="ctr">
+                      <a:solidFill>
+                        <a:srgbClr val="C8CDD3"/>
+                      </a:solidFill>
+                    </a:lnB>
+                    <a:lnT w="6350" cap="flat" cmpd="sng" algn="ctr">
+                      <a:solidFill>
+                        <a:srgbClr val="C8CDD3"/>
+                      </a:solidFill>
+                    </a:lnT>
+                    <a:lnR w="6350" cap="flat" cmpd="sng" algn="ctr">
+                      <a:solidFill>
+                        <a:srgbClr val="C8CDD3"/>
+                      </a:solidFill>
+                    </a:lnR>
+                    <a:lnL w="6350" cap="flat" cmpd="sng" algn="ctr">
+                      <a:solidFill>
+                        <a:srgbClr val="C8CDD3"/>
+                      </a:solidFill>
+                    </a:lnL>
+                    <a:solidFill>
+                      <a:srgbClr val="FFFFFF"/>
+                    </a:solidFill>
+                  </a:tcPr>
+                </a:tc>
+                <a:tc>
+                  <a:txBody>
+                    <a:bodyPr/>
+                    <a:lstStyle/>
+                    <a:p>
+                      <a:r>
+                        <a:rPr sz="800" b="0" i="0">
+                          <a:solidFill>
+                            <a:srgbClr val="1F2937"/>
+                          </a:solidFill>
+                          <a:latin typeface="Arial"/>
+                        </a:rPr>
+                        <a:t>RRM.555 / 557 / 670 re-fixed and aligned</a:t>
+                      </a:r>
+                    </a:p>
+                  </a:txBody>
+                  <a:tcPr marL="91440" marR="91440" marT="45720" marB="45720">
+                    <a:lnB w="6350" cap="flat" cmpd="sng" algn="ctr">
+                      <a:solidFill>
+                        <a:srgbClr val="C8CDD3"/>
+                      </a:solidFill>
+                    </a:lnB>
+                    <a:lnT w="6350" cap="flat" cmpd="sng" algn="ctr">
+                      <a:solidFill>
+                        <a:srgbClr val="C8CDD3"/>
+                      </a:solidFill>
+                    </a:lnT>
+                    <a:lnR w="6350" cap="flat" cmpd="sng" algn="ctr">
+                      <a:solidFill>
+                        <a:srgbClr val="C8CDD3"/>
+                      </a:solidFill>
+                    </a:lnR>
+                    <a:lnL w="6350" cap="flat" cmpd="sng" algn="ctr">
+                      <a:solidFill>
+                        <a:srgbClr val="C8CDD3"/>
+                      </a:solidFill>
+                    </a:lnL>
+                    <a:solidFill>
+                      <a:srgbClr val="FFFFFF"/>
+                    </a:solidFill>
+                  </a:tcPr>
+                </a:tc>
+              </a:tr>
+              <a:tr h="310413">
+                <a:tc>
+                  <a:txBody>
+                    <a:bodyPr/>
+                    <a:lstStyle/>
+                    <a:p>
+                      <a:r>
+                        <a:rPr sz="800" b="1" i="0">
+                          <a:solidFill>
+                            <a:srgbClr val="1F2937"/>
+                          </a:solidFill>
+                          <a:latin typeface="Arial"/>
+                        </a:rPr>
+                        <a:t>5</a:t>
+                      </a:r>
+                    </a:p>
+                  </a:txBody>
+                  <a:tcPr marL="91440" marR="91440" marT="45720" marB="45720">
+                    <a:lnB w="6350" cap="flat" cmpd="sng" algn="ctr">
+                      <a:solidFill>
+                        <a:srgbClr val="C8CDD3"/>
+                      </a:solidFill>
+                    </a:lnB>
+                    <a:lnT w="6350" cap="flat" cmpd="sng" algn="ctr">
+                      <a:solidFill>
+                        <a:srgbClr val="C8CDD3"/>
+                      </a:solidFill>
+                    </a:lnT>
+                    <a:lnR w="6350" cap="flat" cmpd="sng" algn="ctr">
+                      <a:solidFill>
+                        <a:srgbClr val="C8CDD3"/>
+                      </a:solidFill>
+                    </a:lnR>
+                    <a:lnL w="6350" cap="flat" cmpd="sng" algn="ctr">
+                      <a:solidFill>
+                        <a:srgbClr val="C8CDD3"/>
+                      </a:solidFill>
+                    </a:lnL>
+                    <a:solidFill>
+                      <a:srgbClr val="FFFFFF"/>
+                    </a:solidFill>
+                  </a:tcPr>
+                </a:tc>
+                <a:tc>
+                  <a:txBody>
+                    <a:bodyPr/>
+                    <a:lstStyle/>
+                    <a:p>
+                      <a:r>
+                        <a:rPr sz="800" b="0" i="0">
+                          <a:solidFill>
+                            <a:srgbClr val="1F2937"/>
+                          </a:solidFill>
+                          <a:latin typeface="Arial"/>
+                        </a:rPr>
+                        <a:t>Testing and commissioning of the affected circuits</a:t>
+                      </a:r>
+                    </a:p>
+                  </a:txBody>
+                  <a:tcPr marL="91440" marR="91440" marT="45720" marB="45720">
+                    <a:lnB w="6350" cap="flat" cmpd="sng" algn="ctr">
+                      <a:solidFill>
+                        <a:srgbClr val="C8CDD3"/>
+                      </a:solidFill>
+                    </a:lnB>
+                    <a:lnT w="6350" cap="flat" cmpd="sng" algn="ctr">
+                      <a:solidFill>
+                        <a:srgbClr val="C8CDD3"/>
+                      </a:solidFill>
+                    </a:lnT>
+                    <a:lnR w="6350" cap="flat" cmpd="sng" algn="ctr">
+                      <a:solidFill>
+                        <a:srgbClr val="C8CDD3"/>
+                      </a:solidFill>
+                    </a:lnR>
+                    <a:lnL w="6350" cap="flat" cmpd="sng" algn="ctr">
+                      <a:solidFill>
+                        <a:srgbClr val="C8CDD3"/>
+                      </a:solidFill>
+                    </a:lnL>
+                    <a:solidFill>
+                      <a:srgbClr val="FFFFFF"/>
+                    </a:solidFill>
+                  </a:tcPr>
+                </a:tc>
+                <a:tc>
+                  <a:txBody>
+                    <a:bodyPr/>
+                    <a:lstStyle/>
+                    <a:p>
+                      <a:r>
+                        <a:rPr sz="800" b="0" i="0">
+                          <a:solidFill>
+                            <a:srgbClr val="1F2937"/>
+                          </a:solidFill>
+                          <a:latin typeface="Arial"/>
+                        </a:rPr>
+                        <a:t>LOC-01 / 02 / 03</a:t>
+                      </a:r>
+                    </a:p>
+                  </a:txBody>
+                  <a:tcPr marL="91440" marR="91440" marT="45720" marB="45720">
+                    <a:lnB w="6350" cap="flat" cmpd="sng" algn="ctr">
+                      <a:solidFill>
+                        <a:srgbClr val="C8CDD3"/>
+                      </a:solidFill>
+                    </a:lnB>
+                    <a:lnT w="6350" cap="flat" cmpd="sng" algn="ctr">
+                      <a:solidFill>
+                        <a:srgbClr val="C8CDD3"/>
+                      </a:solidFill>
+                    </a:lnT>
+                    <a:lnR w="6350" cap="flat" cmpd="sng" algn="ctr">
+                      <a:solidFill>
+                        <a:srgbClr val="C8CDD3"/>
+                      </a:solidFill>
+                    </a:lnR>
+                    <a:lnL w="6350" cap="flat" cmpd="sng" algn="ctr">
+                      <a:solidFill>
+                        <a:srgbClr val="C8CDD3"/>
+                      </a:solidFill>
+                    </a:lnL>
+                    <a:solidFill>
+                      <a:srgbClr val="FFFFFF"/>
+                    </a:solidFill>
+                  </a:tcPr>
+                </a:tc>
+                <a:tc>
+                  <a:txBody>
+                    <a:bodyPr/>
+                    <a:lstStyle/>
+                    <a:p>
+                      <a:r>
+                        <a:rPr sz="800" b="0" i="0">
+                          <a:solidFill>
+                            <a:srgbClr val="1F2937"/>
+                          </a:solidFill>
+                          <a:latin typeface="Arial"/>
+                        </a:rPr>
+                        <a:t>4 No. circuits</a:t>
+                      </a:r>
+                    </a:p>
+                  </a:txBody>
+                  <a:tcPr marL="91440" marR="91440" marT="45720" marB="45720">
+                    <a:lnB w="6350" cap="flat" cmpd="sng" algn="ctr">
+                      <a:solidFill>
+                        <a:srgbClr val="C8CDD3"/>
+                      </a:solidFill>
+                    </a:lnB>
+                    <a:lnT w="6350" cap="flat" cmpd="sng" algn="ctr">
+                      <a:solidFill>
+                        <a:srgbClr val="C8CDD3"/>
+                      </a:solidFill>
+                    </a:lnT>
+                    <a:lnR w="6350" cap="flat" cmpd="sng" algn="ctr">
+                      <a:solidFill>
+                        <a:srgbClr val="C8CDD3"/>
+                      </a:solidFill>
+                    </a:lnR>
+                    <a:lnL w="6350" cap="flat" cmpd="sng" algn="ctr">
+                      <a:solidFill>
+                        <a:srgbClr val="C8CDD3"/>
+                      </a:solidFill>
+                    </a:lnL>
+                    <a:solidFill>
+                      <a:srgbClr val="FFFFFF"/>
+                    </a:solidFill>
+                  </a:tcPr>
+                </a:tc>
+                <a:tc>
+                  <a:txBody>
+                    <a:bodyPr/>
+                    <a:lstStyle/>
+                    <a:p>
+                      <a:r>
+                        <a:rPr sz="800" b="0" i="0">
+                          <a:solidFill>
+                            <a:srgbClr val="1F2937"/>
+                          </a:solidFill>
+                          <a:latin typeface="Arial"/>
+                        </a:rPr>
+                        <a:t>—</a:t>
+                      </a:r>
+                    </a:p>
+                  </a:txBody>
+                  <a:tcPr marL="91440" marR="91440" marT="45720" marB="45720">
+                    <a:lnB w="6350" cap="flat" cmpd="sng" algn="ctr">
+                      <a:solidFill>
+                        <a:srgbClr val="C8CDD3"/>
+                      </a:solidFill>
+                    </a:lnB>
+                    <a:lnT w="6350" cap="flat" cmpd="sng" algn="ctr">
+                      <a:solidFill>
+                        <a:srgbClr val="C8CDD3"/>
+                      </a:solidFill>
+                    </a:lnT>
+                    <a:lnR w="6350" cap="flat" cmpd="sng" algn="ctr">
+                      <a:solidFill>
+                        <a:srgbClr val="C8CDD3"/>
+                      </a:solidFill>
+                    </a:lnR>
+                    <a:lnL w="6350" cap="flat" cmpd="sng" algn="ctr">
+                      <a:solidFill>
+                        <a:srgbClr val="C8CDD3"/>
+                      </a:solidFill>
+                    </a:lnL>
+                    <a:solidFill>
+                      <a:srgbClr val="FFFFFF"/>
+                    </a:solidFill>
+                  </a:tcPr>
+                </a:tc>
+                <a:tc>
+                  <a:txBody>
+                    <a:bodyPr/>
+                    <a:lstStyle/>
+                    <a:p>
+                      <a:r>
+                        <a:rPr sz="800" b="0" i="0">
+                          <a:solidFill>
+                            <a:srgbClr val="1F2937"/>
+                          </a:solidFill>
+                          <a:latin typeface="Arial"/>
+                        </a:rPr>
+                        <a:t>Circuits energised and proved</a:t>
+                      </a:r>
+                    </a:p>
+                  </a:txBody>
+                  <a:tcPr marL="91440" marR="91440" marT="45720" marB="45720">
+                    <a:lnB w="6350" cap="flat" cmpd="sng" algn="ctr">
+                      <a:solidFill>
+                        <a:srgbClr val="C8CDD3"/>
+                      </a:solidFill>
+                    </a:lnB>
+                    <a:lnT w="6350" cap="flat" cmpd="sng" algn="ctr">
+                      <a:solidFill>
+                        <a:srgbClr val="C8CDD3"/>
+                      </a:solidFill>
+                    </a:lnT>
+                    <a:lnR w="6350" cap="flat" cmpd="sng" algn="ctr">
+                      <a:solidFill>
+                        <a:srgbClr val="C8CDD3"/>
+                      </a:solidFill>
+                    </a:lnR>
+                    <a:lnL w="6350" cap="flat" cmpd="sng" algn="ctr">
+                      <a:solidFill>
+                        <a:srgbClr val="C8CDD3"/>
+                      </a:solidFill>
+                    </a:lnL>
+                    <a:solidFill>
+                      <a:srgbClr val="FFFFFF"/>
+                    </a:solidFill>
+                  </a:tcPr>
+                </a:tc>
+              </a:tr>
+              <a:tr h="310413">
+                <a:tc>
+                  <a:txBody>
+                    <a:bodyPr/>
+                    <a:lstStyle/>
+                    <a:p>
+                      <a:r>
+                        <a:rPr sz="800" b="1" i="0">
+                          <a:solidFill>
+                            <a:srgbClr val="1F2937"/>
+                          </a:solidFill>
+                          <a:latin typeface="Arial"/>
+                        </a:rPr>
+                        <a:t>5</a:t>
+                      </a:r>
+                    </a:p>
+                  </a:txBody>
+                  <a:tcPr marL="91440" marR="91440" marT="45720" marB="45720">
+                    <a:lnB w="6350" cap="flat" cmpd="sng" algn="ctr">
+                      <a:solidFill>
+                        <a:srgbClr val="C8CDD3"/>
+                      </a:solidFill>
+                    </a:lnB>
+                    <a:lnT w="6350" cap="flat" cmpd="sng" algn="ctr">
+                      <a:solidFill>
+                        <a:srgbClr val="C8CDD3"/>
+                      </a:solidFill>
+                    </a:lnT>
+                    <a:lnR w="6350" cap="flat" cmpd="sng" algn="ctr">
+                      <a:solidFill>
+                        <a:srgbClr val="C8CDD3"/>
+                      </a:solidFill>
+                    </a:lnR>
+                    <a:lnL w="6350" cap="flat" cmpd="sng" algn="ctr">
+                      <a:solidFill>
+                        <a:srgbClr val="C8CDD3"/>
+                      </a:solidFill>
+                    </a:lnL>
+                    <a:solidFill>
+                      <a:srgbClr val="FFFFFF"/>
+                    </a:solidFill>
+                  </a:tcPr>
+                </a:tc>
+                <a:tc>
+                  <a:txBody>
+                    <a:bodyPr/>
+                    <a:lstStyle/>
+                    <a:p>
+                      <a:r>
+                        <a:rPr sz="800" b="0" i="0">
+                          <a:solidFill>
+                            <a:srgbClr val="1F2937"/>
+                          </a:solidFill>
+                          <a:latin typeface="Arial"/>
+                        </a:rPr>
+                        <a:t>Final functionality check, then handover to Operations</a:t>
+                      </a:r>
+                    </a:p>
+                  </a:txBody>
+                  <a:tcPr marL="91440" marR="91440" marT="45720" marB="45720">
+                    <a:lnB w="6350" cap="flat" cmpd="sng" algn="ctr">
+                      <a:solidFill>
+                        <a:srgbClr val="C8CDD3"/>
+                      </a:solidFill>
+                    </a:lnB>
+                    <a:lnT w="6350" cap="flat" cmpd="sng" algn="ctr">
+                      <a:solidFill>
+                        <a:srgbClr val="C8CDD3"/>
+                      </a:solidFill>
+                    </a:lnT>
+                    <a:lnR w="6350" cap="flat" cmpd="sng" algn="ctr">
+                      <a:solidFill>
+                        <a:srgbClr val="C8CDD3"/>
+                      </a:solidFill>
+                    </a:lnR>
+                    <a:lnL w="6350" cap="flat" cmpd="sng" algn="ctr">
+                      <a:solidFill>
+                        <a:srgbClr val="C8CDD3"/>
+                      </a:solidFill>
+                    </a:lnL>
+                    <a:solidFill>
+                      <a:srgbClr val="FFFFFF"/>
+                    </a:solidFill>
+                  </a:tcPr>
+                </a:tc>
+                <a:tc>
+                  <a:txBody>
+                    <a:bodyPr/>
+                    <a:lstStyle/>
+                    <a:p>
+                      <a:r>
+                        <a:rPr sz="800" b="0" i="0">
+                          <a:solidFill>
+                            <a:srgbClr val="1F2937"/>
+                          </a:solidFill>
+                          <a:latin typeface="Arial"/>
+                        </a:rPr>
+                        <a:t>LOC-01 / 02 / 03</a:t>
+                      </a:r>
+                    </a:p>
+                  </a:txBody>
+                  <a:tcPr marL="91440" marR="91440" marT="45720" marB="45720">
+                    <a:lnB w="6350" cap="flat" cmpd="sng" algn="ctr">
+                      <a:solidFill>
+                        <a:srgbClr val="C8CDD3"/>
+                      </a:solidFill>
+                    </a:lnB>
+                    <a:lnT w="6350" cap="flat" cmpd="sng" algn="ctr">
+                      <a:solidFill>
+                        <a:srgbClr val="C8CDD3"/>
+                      </a:solidFill>
+                    </a:lnT>
+                    <a:lnR w="6350" cap="flat" cmpd="sng" algn="ctr">
+                      <a:solidFill>
+                        <a:srgbClr val="C8CDD3"/>
+                      </a:solidFill>
+                    </a:lnR>
+                    <a:lnL w="6350" cap="flat" cmpd="sng" algn="ctr">
+                      <a:solidFill>
+                        <a:srgbClr val="C8CDD3"/>
+                      </a:solidFill>
+                    </a:lnL>
+                    <a:solidFill>
+                      <a:srgbClr val="FFFFFF"/>
+                    </a:solidFill>
+                  </a:tcPr>
+                </a:tc>
+                <a:tc>
+                  <a:txBody>
+                    <a:bodyPr/>
+                    <a:lstStyle/>
+                    <a:p>
+                      <a:r>
+                        <a:rPr sz="800" b="0" i="0">
+                          <a:solidFill>
+                            <a:srgbClr val="1F2937"/>
+                          </a:solidFill>
+                          <a:latin typeface="Arial"/>
+                        </a:rPr>
+                        <a:t>16 No. fittings</a:t>
+                      </a:r>
+                    </a:p>
+                  </a:txBody>
+                  <a:tcPr marL="91440" marR="91440" marT="45720" marB="45720">
+                    <a:lnB w="6350" cap="flat" cmpd="sng" algn="ctr">
+                      <a:solidFill>
+                        <a:srgbClr val="C8CDD3"/>
+                      </a:solidFill>
+                    </a:lnB>
+                    <a:lnT w="6350" cap="flat" cmpd="sng" algn="ctr">
+                      <a:solidFill>
+                        <a:srgbClr val="C8CDD3"/>
+                      </a:solidFill>
+                    </a:lnT>
+                    <a:lnR w="6350" cap="flat" cmpd="sng" algn="ctr">
+                      <a:solidFill>
+                        <a:srgbClr val="C8CDD3"/>
+                      </a:solidFill>
+                    </a:lnR>
+                    <a:lnL w="6350" cap="flat" cmpd="sng" algn="ctr">
+                      <a:solidFill>
+                        <a:srgbClr val="C8CDD3"/>
+                      </a:solidFill>
+                    </a:lnL>
+                    <a:solidFill>
+                      <a:srgbClr val="FFFFFF"/>
+                    </a:solidFill>
+                  </a:tcPr>
+                </a:tc>
+                <a:tc>
+                  <a:txBody>
+                    <a:bodyPr/>
+                    <a:lstStyle/>
+                    <a:p>
+                      <a:r>
+                        <a:rPr sz="800" b="0" i="0">
+                          <a:solidFill>
+                            <a:srgbClr val="1F2937"/>
+                          </a:solidFill>
+                          <a:latin typeface="Arial"/>
+                        </a:rPr>
+                        <a:t>H4 — AGL / Operations</a:t>
+                      </a:r>
+                    </a:p>
+                  </a:txBody>
+                  <a:tcPr marL="91440" marR="91440" marT="45720" marB="45720">
+                    <a:lnB w="6350" cap="flat" cmpd="sng" algn="ctr">
+                      <a:solidFill>
+                        <a:srgbClr val="C8CDD3"/>
+                      </a:solidFill>
+                    </a:lnB>
+                    <a:lnT w="6350" cap="flat" cmpd="sng" algn="ctr">
+                      <a:solidFill>
+                        <a:srgbClr val="C8CDD3"/>
+                      </a:solidFill>
+                    </a:lnT>
+                    <a:lnR w="6350" cap="flat" cmpd="sng" algn="ctr">
+                      <a:solidFill>
+                        <a:srgbClr val="C8CDD3"/>
+                      </a:solidFill>
+                    </a:lnR>
+                    <a:lnL w="6350" cap="flat" cmpd="sng" algn="ctr">
+                      <a:solidFill>
+                        <a:srgbClr val="C8CDD3"/>
+                      </a:solidFill>
+                    </a:lnL>
+                    <a:solidFill>
+                      <a:srgbClr val="FFFFFF"/>
+                    </a:solidFill>
+                  </a:tcPr>
+                </a:tc>
+                <a:tc>
+                  <a:txBody>
+                    <a:bodyPr/>
+                    <a:lstStyle/>
+                    <a:p>
+                      <a:r>
+                        <a:rPr sz="800" b="0" i="0">
+                          <a:solidFill>
+                            <a:srgbClr val="1F2937"/>
+                          </a:solidFill>
+                          <a:latin typeface="Arial"/>
+                        </a:rPr>
+                        <a:t>Area returned to operational service</a:t>
+                      </a:r>
+                    </a:p>
+                  </a:txBody>
+                  <a:tcPr marL="91440" marR="91440" marT="45720" marB="45720">
+                    <a:lnB w="6350" cap="flat" cmpd="sng" algn="ctr">
+                      <a:solidFill>
+                        <a:srgbClr val="C8CDD3"/>
+                      </a:solidFill>
+                    </a:lnB>
+                    <a:lnT w="6350" cap="flat" cmpd="sng" algn="ctr">
+                      <a:solidFill>
+                        <a:srgbClr val="C8CDD3"/>
+                      </a:solidFill>
+                    </a:lnT>
+                    <a:lnR w="6350" cap="flat" cmpd="sng" algn="ctr">
+                      <a:solidFill>
+                        <a:srgbClr val="C8CDD3"/>
+                      </a:solidFill>
+                    </a:lnR>
+                    <a:lnL w="6350" cap="flat" cmpd="sng" algn="ctr">
+                      <a:solidFill>
+                        <a:srgbClr val="C8CDD3"/>
+                      </a:solidFill>
+                    </a:lnL>
+                    <a:solidFill>
+                      <a:srgbClr val="FFFFFF"/>
+                    </a:solidFill>
+                  </a:tcPr>
+                </a:tc>
+              </a:tr>
+            </a:tbl>
+          </a:graphicData>
+        </a:graphic>
+      </p:graphicFrame>
+      <p:sp>
+        <p:nvSpPr>
+          <p:cNvPr id="22" name="P08 PANEL · HOLD POINTS GOVERNING"/>
+          <p:cNvSpPr/>
+          <p:nvPr/>
+        </p:nvSpPr>
+        <p:spPr>
+          <a:xfrm>
+            <a:off x="457200" y="7581519"/>
+            <a:ext cx="6958584" cy="2438781"/>
+          </a:xfrm>
+          <a:prstGeom prst="rect">
+            <a:avLst/>
+          </a:prstGeom>
+          <a:solidFill>
+            <a:srgbClr val="FFFFFF"/>
+          </a:solidFill>
+          <a:ln w="9525">
+            <a:solidFill>
+              <a:srgbClr val="D3D8DE"/>
+            </a:solidFill>
+          </a:ln>
+          <a:effectLst/>
+        </p:spPr>
+        <p:style>
+          <a:lnRef idx="1">
+            <a:schemeClr val="accent1"/>
+          </a:lnRef>
+          <a:fillRef idx="3">
+            <a:schemeClr val="accent1"/>
+          </a:fillRef>
+          <a:effectRef idx="2">
+            <a:schemeClr val="accent1"/>
+          </a:effectRef>
+          <a:fontRef idx="minor">
+            <a:schemeClr val="lt1"/>
+          </a:fontRef>
+        </p:style>
+        <p:txBody>
+          <a:bodyPr rtlCol="0" anchor="ctr" wrap="square"/>
+          <a:lstStyle/>
+          <a:p>
+            <a:pPr algn="ctr"/>
+          </a:p>
+        </p:txBody>
+      </p:sp>
+      <p:sp>
+        <p:nvSpPr>
+          <p:cNvPr id="23" name="P08 PANEL · HOLD POINTS GOVERNING HDR"/>
+          <p:cNvSpPr txBox="1"/>
+          <p:nvPr/>
+        </p:nvSpPr>
+        <p:spPr>
+          <a:xfrm>
+            <a:off x="603504" y="7691247"/>
+            <a:ext cx="6665976" cy="237744"/>
+          </a:xfrm>
+          <a:prstGeom prst="rect">
+            <a:avLst/>
+          </a:prstGeom>
+          <a:noFill/>
+        </p:spPr>
+        <p:txBody>
+          <a:bodyPr wrap="square" lIns="0" rIns="0" tIns="0" bIns="0">
+            <a:spAutoFit/>
+          </a:bodyPr>
+          <a:lstStyle/>
+          <a:p>
+            <a:pPr>
+              <a:spcAft>
+                <a:spcPts val="400"/>
+              </a:spcAft>
+            </a:pPr>
+            <a:r>
+              <a:rPr sz="950" b="1" i="0">
+                <a:solidFill>
+                  <a:srgbClr val="1E2761"/>
+                </a:solidFill>
+                <a:latin typeface="Arial"/>
+              </a:rPr>
+              <a:t>HOLD POINTS GOVERNING THE PROGRAMME</a:t>
+            </a:r>
+          </a:p>
+        </p:txBody>
+      </p:sp>
+      <p:sp>
+        <p:nvSpPr>
+          <p:cNvPr id="24" name="P08 PANEL · HOLD POINTS GOVERNING BODY"/>
+          <p:cNvSpPr txBox="1"/>
+          <p:nvPr/>
+        </p:nvSpPr>
+        <p:spPr>
+          <a:xfrm>
+            <a:off x="603504" y="8057007"/>
+            <a:ext cx="6665976" cy="1826133"/>
+          </a:xfrm>
+          <a:prstGeom prst="rect">
+            <a:avLst/>
+          </a:prstGeom>
+          <a:noFill/>
+        </p:spPr>
+        <p:txBody>
+          <a:bodyPr wrap="square" lIns="0" rIns="0" tIns="0" bIns="0">
+            <a:spAutoFit/>
+          </a:bodyPr>
+          <a:lstStyle/>
+          <a:p>
+            <a:pPr>
+              <a:spcAft>
+                <a:spcPts val="400"/>
+              </a:spcAft>
+            </a:pPr>
+            <a:r>
+              <a:rPr sz="950" b="0" i="0">
+                <a:solidFill>
+                  <a:srgbClr val="1F2937"/>
+                </a:solidFill>
+                <a:latin typeface="Arial"/>
+              </a:rPr>
+              <a:t>H1   Curing complete — Civil.  Written confirmation of the asphalt curing period. Required before Day 1 starts.</a:t>
+            </a:r>
+          </a:p>
+          <a:p>
+            <a:pPr>
+              <a:spcAft>
+                <a:spcPts val="400"/>
+              </a:spcAft>
+            </a:pPr>
+            <a:r>
+              <a:rPr sz="950" b="0" i="0">
+                <a:solidFill>
+                  <a:srgbClr val="1F2937"/>
+                </a:solidFill>
+                <a:latin typeface="Arial"/>
+              </a:rPr>
+              <a:t>H5   Saw cut detail — AGL / Engineer.  Detail drawing issued and accepted. Required before any cutting on Day 1.</a:t>
+            </a:r>
+          </a:p>
+          <a:p>
+            <a:pPr>
+              <a:spcAft>
+                <a:spcPts val="400"/>
+              </a:spcAft>
+            </a:pPr>
+            <a:r>
+              <a:rPr sz="950" b="0" i="0">
+                <a:solidFill>
+                  <a:srgbClr val="1F2937"/>
+                </a:solidFill>
+                <a:latin typeface="Arial"/>
+              </a:rPr>
+              <a:t>H2   Setting-out — Civil survey.  Coordinates issued and field points confirmed in the field. Day 1.</a:t>
+            </a:r>
+          </a:p>
+          <a:p>
+            <a:pPr>
+              <a:spcAft>
+                <a:spcPts val="400"/>
+              </a:spcAft>
+            </a:pPr>
+            <a:r>
+              <a:rPr sz="950" b="0" i="0">
+                <a:solidFill>
+                  <a:srgbClr val="1F2937"/>
+                </a:solidFill>
+                <a:latin typeface="Arial"/>
+              </a:rPr>
+              <a:t>H4   Functionality check — AGL / Operations.  Witnessed before handover. Day 5.</a:t>
+            </a:r>
+          </a:p>
+          <a:p>
+            <a:pPr>
+              <a:spcAft>
+                <a:spcPts val="400"/>
+              </a:spcAft>
+            </a:pPr>
+            <a:r>
+              <a:rPr sz="900" b="0" i="0">
+                <a:solidFill>
+                  <a:srgbClr val="1F2937"/>
+                </a:solidFill>
+                <a:latin typeface="Arial"/>
+              </a:rPr>
+              <a:t>H3 (mandrel test) sits in Phase 2 civil works and falls outside these five days.</a:t>
+            </a:r>
+          </a:p>
+        </p:txBody>
+      </p:sp>
+      <p:sp>
+        <p:nvSpPr>
+          <p:cNvPr id="25" name="P08 PANEL · BASIS AND ASSUMPTIONS"/>
+          <p:cNvSpPr/>
+          <p:nvPr/>
+        </p:nvSpPr>
+        <p:spPr>
+          <a:xfrm>
+            <a:off x="7699248" y="7581519"/>
+            <a:ext cx="6958584" cy="2438781"/>
+          </a:xfrm>
+          <a:prstGeom prst="rect">
+            <a:avLst/>
+          </a:prstGeom>
+          <a:solidFill>
+            <a:srgbClr val="FFFFFF"/>
+          </a:solidFill>
+          <a:ln w="9525">
+            <a:solidFill>
+              <a:srgbClr val="D3D8DE"/>
+            </a:solidFill>
+          </a:ln>
+          <a:effectLst/>
+        </p:spPr>
+        <p:style>
+          <a:lnRef idx="1">
+            <a:schemeClr val="accent1"/>
+          </a:lnRef>
+          <a:fillRef idx="3">
+            <a:schemeClr val="accent1"/>
+          </a:fillRef>
+          <a:effectRef idx="2">
+            <a:schemeClr val="accent1"/>
+          </a:effectRef>
+          <a:fontRef idx="minor">
+            <a:schemeClr val="lt1"/>
+          </a:fontRef>
+        </p:style>
+        <p:txBody>
+          <a:bodyPr rtlCol="0" anchor="ctr" wrap="square"/>
+          <a:lstStyle/>
+          <a:p>
+            <a:pPr algn="ctr"/>
+          </a:p>
+        </p:txBody>
+      </p:sp>
+      <p:sp>
+        <p:nvSpPr>
+          <p:cNvPr id="26" name="P08 PANEL · BASIS AND ASSUMPTIONS HDR"/>
+          <p:cNvSpPr txBox="1"/>
+          <p:nvPr/>
+        </p:nvSpPr>
+        <p:spPr>
+          <a:xfrm>
+            <a:off x="7845552" y="7691247"/>
+            <a:ext cx="6665976" cy="237744"/>
+          </a:xfrm>
+          <a:prstGeom prst="rect">
+            <a:avLst/>
+          </a:prstGeom>
+          <a:noFill/>
+        </p:spPr>
+        <p:txBody>
+          <a:bodyPr wrap="square" lIns="0" rIns="0" tIns="0" bIns="0">
+            <a:spAutoFit/>
+          </a:bodyPr>
+          <a:lstStyle/>
+          <a:p>
+            <a:pPr>
+              <a:spcAft>
+                <a:spcPts val="400"/>
+              </a:spcAft>
+            </a:pPr>
+            <a:r>
+              <a:rPr sz="950" b="1" i="0">
+                <a:solidFill>
+                  <a:srgbClr val="1E2761"/>
+                </a:solidFill>
+                <a:latin typeface="Arial"/>
+              </a:rPr>
+              <a:t>BASIS, ASSUMPTIONS &amp; INDICATIVE RESOURCES</a:t>
+            </a:r>
+          </a:p>
+        </p:txBody>
+      </p:sp>
+      <p:sp>
+        <p:nvSpPr>
+          <p:cNvPr id="27" name="P08 PANEL · BASIS AND ASSUMPTIONS BODY"/>
+          <p:cNvSpPr txBox="1"/>
+          <p:nvPr/>
+        </p:nvSpPr>
+        <p:spPr>
+          <a:xfrm>
+            <a:off x="7845552" y="8057007"/>
+            <a:ext cx="6665976" cy="1826133"/>
+          </a:xfrm>
+          <a:prstGeom prst="rect">
+            <a:avLst/>
+          </a:prstGeom>
+          <a:noFill/>
+        </p:spPr>
+        <p:txBody>
+          <a:bodyPr wrap="square" lIns="0" rIns="0" tIns="0" bIns="0">
+            <a:spAutoFit/>
+          </a:bodyPr>
+          <a:lstStyle/>
+          <a:p>
+            <a:pPr>
+              <a:spcAft>
+                <a:spcPts val="400"/>
+              </a:spcAft>
+            </a:pPr>
+            <a:r>
+              <a:rPr sz="900" b="0" i="0">
+                <a:solidFill>
+                  <a:srgbClr val="1F2937"/>
+                </a:solidFill>
+                <a:latin typeface="Arial"/>
+              </a:rPr>
+              <a:t>Covers Phase 3 AGL installation only. Phase 1 asset removal and coring is recorded complete (site record 23.07.2026); Phase 2 civil attendance sits outside these five days.</a:t>
+            </a:r>
+          </a:p>
+          <a:p>
+            <a:pPr>
+              <a:spcAft>
+                <a:spcPts val="400"/>
+              </a:spcAft>
+            </a:pPr>
+            <a:r>
+              <a:rPr sz="900" b="0" i="0">
+                <a:solidFill>
+                  <a:srgbClr val="1F2937"/>
+                </a:solidFill>
+                <a:latin typeface="Arial"/>
+              </a:rPr>
+              <a:t>One day = one approved working shift under the AWAN / PTW. The sequence holds for a day or a night closure; shift hours to be set against the approved airside window.</a:t>
+            </a:r>
+          </a:p>
+          <a:p>
+            <a:pPr>
+              <a:spcAft>
+                <a:spcPts val="400"/>
+              </a:spcAft>
+            </a:pPr>
+            <a:r>
+              <a:rPr sz="900" b="0" i="0">
+                <a:solidFill>
+                  <a:srgbClr val="1F2937"/>
+                </a:solidFill>
+                <a:latin typeface="Arial"/>
+              </a:rPr>
+              <a:t>The five days run consecutively from the release of H1 and H5. Neither is released at the date of this revision.</a:t>
+            </a:r>
+          </a:p>
+          <a:p>
+            <a:pPr>
+              <a:spcAft>
+                <a:spcPts val="400"/>
+              </a:spcAft>
+            </a:pPr>
+            <a:r>
+              <a:rPr sz="900" b="0" i="0">
+                <a:solidFill>
+                  <a:srgbClr val="1F2937"/>
+                </a:solidFill>
+                <a:latin typeface="Arial"/>
+              </a:rPr>
+              <a:t>Saw cut lengths scaled from sheets 1001–1003 — approx. 300 m, 24 m and 95 m, approx. 420 m in total. For programme only; confirm on site.</a:t>
+            </a:r>
+          </a:p>
+          <a:p>
+            <a:pPr>
+              <a:spcAft>
+                <a:spcPts val="400"/>
+              </a:spcAft>
+            </a:pPr>
+            <a:r>
+              <a:rPr sz="900" b="0" i="0">
+                <a:solidFill>
+                  <a:srgbClr val="1F2937"/>
+                </a:solidFill>
+                <a:latin typeface="Arial"/>
+              </a:rPr>
+              <a:t>Sealant cure time before the area returns to operational service is per the awaited saw cut detail. If it exceeds the Day 5 shift, handover moves to the following shift.</a:t>
+            </a:r>
+          </a:p>
+          <a:p>
+            <a:pPr>
+              <a:spcAft>
+                <a:spcPts val="400"/>
+              </a:spcAft>
+            </a:pPr>
+            <a:r>
+              <a:rPr sz="900" b="0" i="0">
+                <a:solidFill>
+                  <a:srgbClr val="1F2937"/>
+                </a:solidFill>
+                <a:latin typeface="Arial"/>
+              </a:rPr>
+              <a:t>Indicative resourcing per shift: 1 No. AGL supervisor, 4 No. AGL technicians, 2 No. saw cut operatives, 1 No. safety banksman; survey attendance Day 1, Operations attendance Day 5. To be confirmed against the approved AWAN.</a:t>
+            </a:r>
+          </a:p>
+        </p:txBody>
+      </p:sp>
+      <p:sp>
+        <p:nvSpPr>
+          <p:cNvPr id="28" name="SHEET FOOTER"/>
+          <p:cNvSpPr txBox="1"/>
+          <p:nvPr/>
+        </p:nvSpPr>
+        <p:spPr>
+          <a:xfrm>
+            <a:off x="457200" y="10149840"/>
+            <a:ext cx="14173200" cy="365760"/>
+          </a:xfrm>
+          <a:prstGeom prst="rect">
+            <a:avLst/>
+          </a:prstGeom>
+          <a:noFill/>
+        </p:spPr>
+        <p:txBody>
+          <a:bodyPr wrap="square" lIns="0" rIns="0" tIns="0" bIns="0">
+            <a:spAutoFit/>
+          </a:bodyPr>
+          <a:lstStyle/>
+          <a:p>
+            <a:pPr>
+              <a:spcAft>
+                <a:spcPts val="400"/>
+              </a:spcAft>
+            </a:pPr>
+            <a:r>
+              <a:rPr sz="750" b="0" i="0">
+                <a:solidFill>
+                  <a:srgbClr val="5F6368"/>
+                </a:solidFill>
+                <a:latin typeface="Arial"/>
+              </a:rPr>
+              <a:t>Programme for the AGL installation phase. It is issued for planning and for co-ordination with the civil programme; it is not a construction instruction until the hold points above are released.     ·     AUH-SK-AGL-TWYE-001 REV P08 (FINAL SCOPE)  ·  Prepared: Mohammed Faheem, AGL Team Leader — ADB SAFEGATE  ·  Approved: Ragesh Menon, AGL Manager</a:t>
+            </a:r>
+          </a:p>
+        </p:txBody>
+      </p:sp>
+    </p:spTree>
+  </p:cSld>
+  <p:clrMapOvr>
+    <a:masterClrMapping/>
+  </p:clrMapOvr>
+</p:sld>
+</file>
+
 <file path=ppt/theme/theme1.xml><?xml version="1.0" encoding="utf-8"?>
 <a:theme xmlns:a="http://schemas.openxmlformats.org/drawingml/2006/main" name="Office Theme">
   <a:themeElements>

--- a/skills/zia-mta-basemap/examples/twy-e-asbuilt-ducts/out/AUH-SK-AGL-TWYE-001 - TWY E Shop Drawings - ZIA Rev P08 FINAL.pptx
+++ b/skills/zia-mta-basemap/examples/twy-e-asbuilt-ducts/out/AUH-SK-AGL-TWYE-001 - TWY E Shop Drawings - ZIA Rev P08 FINAL.pptx
@@ -53391,7 +53391,7 @@
                 </a:solidFill>
                 <a:latin typeface="Arial"/>
               </a:rPr>
-              <a:t>LOC-01</a:t>
+              <a:t>LOCATION 1  ·  SHEET 1001</a:t>
             </a:r>
           </a:p>
         </p:txBody>
@@ -53547,7 +53547,7 @@
                 </a:solidFill>
                 <a:latin typeface="Arial"/>
               </a:rPr>
-              <a:t>LOC-01</a:t>
+              <a:t>LOCATION 1  ·  SHEET 1001</a:t>
             </a:r>
           </a:p>
         </p:txBody>
@@ -53687,7 +53687,7 @@
                 </a:solidFill>
                 <a:latin typeface="Arial"/>
               </a:rPr>
-              <a:t>SAW CUT &amp; BASES · FIRST CABLE</a:t>
+              <a:t>CABLE, TEST &amp; REINSTATEMENT</a:t>
             </a:r>
           </a:p>
           <a:p>
@@ -53703,7 +53703,7 @@
                 </a:solidFill>
                 <a:latin typeface="Arial"/>
               </a:rPr>
-              <a:t>LOC-02 / 03 · LOC-01</a:t>
+              <a:t>LOCATION 1  ·  SHEET 1001</a:t>
             </a:r>
           </a:p>
         </p:txBody>
@@ -53843,7 +53843,7 @@
                 </a:solidFill>
                 <a:latin typeface="Arial"/>
               </a:rPr>
-              <a:t>CABLE, TERMINATION &amp; TESTING</a:t>
+              <a:t>FULL CYCLE — CUT TO SEALED</a:t>
             </a:r>
           </a:p>
           <a:p>
@@ -53859,7 +53859,7 @@
                 </a:solidFill>
                 <a:latin typeface="Arial"/>
               </a:rPr>
-              <a:t>ALL LOCATIONS</a:t>
+              <a:t>LOCATION 3  ·  SHEET 1003</a:t>
             </a:r>
           </a:p>
         </p:txBody>
@@ -53999,7 +53999,7 @@
                 </a:solidFill>
                 <a:latin typeface="Arial"/>
               </a:rPr>
-              <a:t>REINSTATEMENT, T&amp;C &amp; HANDOVER</a:t>
+              <a:t>FULL CYCLE + T&amp;C &amp; HANDOVER</a:t>
             </a:r>
           </a:p>
           <a:p>
@@ -54015,7 +54015,7 @@
                 </a:solidFill>
                 <a:latin typeface="Arial"/>
               </a:rPr>
-              <a:t>ALL LOCATIONS</a:t>
+              <a:t>LOCATION 2  ·  SHEET 1002</a:t>
             </a:r>
           </a:p>
         </p:txBody>
@@ -54029,7 +54029,7 @@
         <p:spPr>
           <a:xfrm>
             <a:off x="457200" y="2129790"/>
-            <a:ext cx="14173200" cy="5268843"/>
+            <a:ext cx="14173200" cy="4475720"/>
           </a:xfrm>
           <a:prstGeom prst="rect">
             <a:avLst/>
@@ -54115,7 +54115,7 @@
         </p:nvGraphicFramePr>
         <p:xfrm>
           <a:off x="603504" y="2605278"/>
-          <a:ext cx="13880592" cy="4656195"/>
+          <a:ext cx="13880592" cy="3863072"/>
         </p:xfrm>
         <a:graphic>
           <a:graphicData uri="http://schemas.openxmlformats.org/drawingml/2006/table">
@@ -54131,7 +54131,7 @@
                 <a:gridCol w="1828800"/>
                 <a:gridCol w="4142232"/>
               </a:tblGrid>
-              <a:tr h="310413">
+              <a:tr h="241442">
                 <a:tc>
                   <a:txBody>
                     <a:bodyPr/>
@@ -54385,7 +54385,7 @@
                   </a:tcPr>
                 </a:tc>
               </a:tr>
-              <a:tr h="310413">
+              <a:tr h="241442">
                 <a:tc>
                   <a:txBody>
                     <a:bodyPr/>
@@ -54440,7 +54440,7 @@
                           </a:solidFill>
                           <a:latin typeface="Arial"/>
                         </a:rPr>
-                        <a:t>Setting-out from the civil survey points; area protection and lighting</a:t>
+                        <a:t>Setting-out from the civil survey points — all three locations in one visit</a:t>
                       </a:r>
                     </a:p>
                   </a:txBody>
@@ -54608,7 +54608,7 @@
                           </a:solidFill>
                           <a:latin typeface="Arial"/>
                         </a:rPr>
-                        <a:t>Field points confirmed and marked</a:t>
+                        <a:t>Field points confirmed and marked at all three</a:t>
                       </a:r>
                     </a:p>
                   </a:txBody>
@@ -54639,7 +54639,7 @@
                   </a:tcPr>
                 </a:tc>
               </a:tr>
-              <a:tr h="310413">
+              <a:tr h="241442">
                 <a:tc>
                   <a:txBody>
                     <a:bodyPr/>
@@ -54736,7 +54736,7 @@
                           </a:solidFill>
                           <a:latin typeface="Arial"/>
                         </a:rPr>
-                        <a:t>LOC-01</a:t>
+                        <a:t>LOC-01 · 1001</a:t>
                       </a:r>
                     </a:p>
                   </a:txBody>
@@ -54893,7 +54893,7 @@
                   </a:tcPr>
                 </a:tc>
               </a:tr>
-              <a:tr h="310413">
+              <a:tr h="241442">
                 <a:tc>
                   <a:txBody>
                     <a:bodyPr/>
@@ -54990,7 +54990,7 @@
                           </a:solidFill>
                           <a:latin typeface="Arial"/>
                         </a:rPr>
-                        <a:t>LOC-01</a:t>
+                        <a:t>LOC-01 · 1001</a:t>
                       </a:r>
                     </a:p>
                   </a:txBody>
@@ -55147,7 +55147,7 @@
                   </a:tcPr>
                 </a:tc>
               </a:tr>
-              <a:tr h="310413">
+              <a:tr h="241442">
                 <a:tc>
                   <a:txBody>
                     <a:bodyPr/>
@@ -55244,7 +55244,7 @@
                           </a:solidFill>
                           <a:latin typeface="Arial"/>
                         </a:rPr>
-                        <a:t>LOC-01</a:t>
+                        <a:t>LOC-01 · 1001</a:t>
                       </a:r>
                     </a:p>
                   </a:txBody>
@@ -55401,7 +55401,7 @@
                   </a:tcPr>
                 </a:tc>
               </a:tr>
-              <a:tr h="310413">
+              <a:tr h="241442">
                 <a:tc>
                   <a:txBody>
                     <a:bodyPr/>
@@ -55441,6 +55441,768 @@
                     </a:lnL>
                     <a:solidFill>
                       <a:srgbClr val="FFFFFF"/>
+                    </a:solidFill>
+                  </a:tcPr>
+                </a:tc>
+                <a:tc>
+                  <a:txBody>
+                    <a:bodyPr/>
+                    <a:lstStyle/>
+                    <a:p>
+                      <a:r>
+                        <a:rPr sz="800" b="0" i="0">
+                          <a:solidFill>
+                            <a:srgbClr val="1F2937"/>
+                          </a:solidFill>
+                          <a:latin typeface="Arial"/>
+                        </a:rPr>
+                        <a:t>Lay new secondary cable through the saw cut — no joints, manhole to light</a:t>
+                      </a:r>
+                    </a:p>
+                  </a:txBody>
+                  <a:tcPr marL="91440" marR="91440" marT="45720" marB="45720">
+                    <a:lnB w="6350" cap="flat" cmpd="sng" algn="ctr">
+                      <a:solidFill>
+                        <a:srgbClr val="C8CDD3"/>
+                      </a:solidFill>
+                    </a:lnB>
+                    <a:lnT w="6350" cap="flat" cmpd="sng" algn="ctr">
+                      <a:solidFill>
+                        <a:srgbClr val="C8CDD3"/>
+                      </a:solidFill>
+                    </a:lnT>
+                    <a:lnR w="6350" cap="flat" cmpd="sng" algn="ctr">
+                      <a:solidFill>
+                        <a:srgbClr val="C8CDD3"/>
+                      </a:solidFill>
+                    </a:lnR>
+                    <a:lnL w="6350" cap="flat" cmpd="sng" algn="ctr">
+                      <a:solidFill>
+                        <a:srgbClr val="C8CDD3"/>
+                      </a:solidFill>
+                    </a:lnL>
+                    <a:solidFill>
+                      <a:srgbClr val="FFFFFF"/>
+                    </a:solidFill>
+                  </a:tcPr>
+                </a:tc>
+                <a:tc>
+                  <a:txBody>
+                    <a:bodyPr/>
+                    <a:lstStyle/>
+                    <a:p>
+                      <a:r>
+                        <a:rPr sz="800" b="0" i="0">
+                          <a:solidFill>
+                            <a:srgbClr val="1F2937"/>
+                          </a:solidFill>
+                          <a:latin typeface="Arial"/>
+                        </a:rPr>
+                        <a:t>LOC-01 · 1001</a:t>
+                      </a:r>
+                    </a:p>
+                  </a:txBody>
+                  <a:tcPr marL="91440" marR="91440" marT="45720" marB="45720">
+                    <a:lnB w="6350" cap="flat" cmpd="sng" algn="ctr">
+                      <a:solidFill>
+                        <a:srgbClr val="C8CDD3"/>
+                      </a:solidFill>
+                    </a:lnB>
+                    <a:lnT w="6350" cap="flat" cmpd="sng" algn="ctr">
+                      <a:solidFill>
+                        <a:srgbClr val="C8CDD3"/>
+                      </a:solidFill>
+                    </a:lnT>
+                    <a:lnR w="6350" cap="flat" cmpd="sng" algn="ctr">
+                      <a:solidFill>
+                        <a:srgbClr val="C8CDD3"/>
+                      </a:solidFill>
+                    </a:lnR>
+                    <a:lnL w="6350" cap="flat" cmpd="sng" algn="ctr">
+                      <a:solidFill>
+                        <a:srgbClr val="C8CDD3"/>
+                      </a:solidFill>
+                    </a:lnL>
+                    <a:solidFill>
+                      <a:srgbClr val="FFFFFF"/>
+                    </a:solidFill>
+                  </a:tcPr>
+                </a:tc>
+                <a:tc>
+                  <a:txBody>
+                    <a:bodyPr/>
+                    <a:lstStyle/>
+                    <a:p>
+                      <a:r>
+                        <a:rPr sz="800" b="0" i="0">
+                          <a:solidFill>
+                            <a:srgbClr val="1F2937"/>
+                          </a:solidFill>
+                          <a:latin typeface="Arial"/>
+                        </a:rPr>
+                        <a:t>11 No. runs</a:t>
+                      </a:r>
+                    </a:p>
+                  </a:txBody>
+                  <a:tcPr marL="91440" marR="91440" marT="45720" marB="45720">
+                    <a:lnB w="6350" cap="flat" cmpd="sng" algn="ctr">
+                      <a:solidFill>
+                        <a:srgbClr val="C8CDD3"/>
+                      </a:solidFill>
+                    </a:lnB>
+                    <a:lnT w="6350" cap="flat" cmpd="sng" algn="ctr">
+                      <a:solidFill>
+                        <a:srgbClr val="C8CDD3"/>
+                      </a:solidFill>
+                    </a:lnT>
+                    <a:lnR w="6350" cap="flat" cmpd="sng" algn="ctr">
+                      <a:solidFill>
+                        <a:srgbClr val="C8CDD3"/>
+                      </a:solidFill>
+                    </a:lnR>
+                    <a:lnL w="6350" cap="flat" cmpd="sng" algn="ctr">
+                      <a:solidFill>
+                        <a:srgbClr val="C8CDD3"/>
+                      </a:solidFill>
+                    </a:lnL>
+                    <a:solidFill>
+                      <a:srgbClr val="FFFFFF"/>
+                    </a:solidFill>
+                  </a:tcPr>
+                </a:tc>
+                <a:tc>
+                  <a:txBody>
+                    <a:bodyPr/>
+                    <a:lstStyle/>
+                    <a:p>
+                      <a:r>
+                        <a:rPr sz="800" b="0" i="0">
+                          <a:solidFill>
+                            <a:srgbClr val="1F2937"/>
+                          </a:solidFill>
+                          <a:latin typeface="Arial"/>
+                        </a:rPr>
+                        <a:t>—</a:t>
+                      </a:r>
+                    </a:p>
+                  </a:txBody>
+                  <a:tcPr marL="91440" marR="91440" marT="45720" marB="45720">
+                    <a:lnB w="6350" cap="flat" cmpd="sng" algn="ctr">
+                      <a:solidFill>
+                        <a:srgbClr val="C8CDD3"/>
+                      </a:solidFill>
+                    </a:lnB>
+                    <a:lnT w="6350" cap="flat" cmpd="sng" algn="ctr">
+                      <a:solidFill>
+                        <a:srgbClr val="C8CDD3"/>
+                      </a:solidFill>
+                    </a:lnT>
+                    <a:lnR w="6350" cap="flat" cmpd="sng" algn="ctr">
+                      <a:solidFill>
+                        <a:srgbClr val="C8CDD3"/>
+                      </a:solidFill>
+                    </a:lnR>
+                    <a:lnL w="6350" cap="flat" cmpd="sng" algn="ctr">
+                      <a:solidFill>
+                        <a:srgbClr val="C8CDD3"/>
+                      </a:solidFill>
+                    </a:lnL>
+                    <a:solidFill>
+                      <a:srgbClr val="FFFFFF"/>
+                    </a:solidFill>
+                  </a:tcPr>
+                </a:tc>
+                <a:tc>
+                  <a:txBody>
+                    <a:bodyPr/>
+                    <a:lstStyle/>
+                    <a:p>
+                      <a:r>
+                        <a:rPr sz="800" b="0" i="0">
+                          <a:solidFill>
+                            <a:srgbClr val="1F2937"/>
+                          </a:solidFill>
+                          <a:latin typeface="Arial"/>
+                        </a:rPr>
+                        <a:t>LOC-01 cabled</a:t>
+                      </a:r>
+                    </a:p>
+                  </a:txBody>
+                  <a:tcPr marL="91440" marR="91440" marT="45720" marB="45720">
+                    <a:lnB w="6350" cap="flat" cmpd="sng" algn="ctr">
+                      <a:solidFill>
+                        <a:srgbClr val="C8CDD3"/>
+                      </a:solidFill>
+                    </a:lnB>
+                    <a:lnT w="6350" cap="flat" cmpd="sng" algn="ctr">
+                      <a:solidFill>
+                        <a:srgbClr val="C8CDD3"/>
+                      </a:solidFill>
+                    </a:lnT>
+                    <a:lnR w="6350" cap="flat" cmpd="sng" algn="ctr">
+                      <a:solidFill>
+                        <a:srgbClr val="C8CDD3"/>
+                      </a:solidFill>
+                    </a:lnR>
+                    <a:lnL w="6350" cap="flat" cmpd="sng" algn="ctr">
+                      <a:solidFill>
+                        <a:srgbClr val="C8CDD3"/>
+                      </a:solidFill>
+                    </a:lnL>
+                    <a:solidFill>
+                      <a:srgbClr val="FFFFFF"/>
+                    </a:solidFill>
+                  </a:tcPr>
+                </a:tc>
+              </a:tr>
+              <a:tr h="241442">
+                <a:tc>
+                  <a:txBody>
+                    <a:bodyPr/>
+                    <a:lstStyle/>
+                    <a:p>
+                      <a:r>
+                        <a:rPr sz="800" b="1" i="0">
+                          <a:solidFill>
+                            <a:srgbClr val="1F2937"/>
+                          </a:solidFill>
+                          <a:latin typeface="Arial"/>
+                        </a:rPr>
+                        <a:t>3</a:t>
+                      </a:r>
+                    </a:p>
+                  </a:txBody>
+                  <a:tcPr marL="91440" marR="91440" marT="45720" marB="45720">
+                    <a:lnB w="6350" cap="flat" cmpd="sng" algn="ctr">
+                      <a:solidFill>
+                        <a:srgbClr val="C8CDD3"/>
+                      </a:solidFill>
+                    </a:lnB>
+                    <a:lnT w="6350" cap="flat" cmpd="sng" algn="ctr">
+                      <a:solidFill>
+                        <a:srgbClr val="C8CDD3"/>
+                      </a:solidFill>
+                    </a:lnT>
+                    <a:lnR w="6350" cap="flat" cmpd="sng" algn="ctr">
+                      <a:solidFill>
+                        <a:srgbClr val="C8CDD3"/>
+                      </a:solidFill>
+                    </a:lnR>
+                    <a:lnL w="6350" cap="flat" cmpd="sng" algn="ctr">
+                      <a:solidFill>
+                        <a:srgbClr val="C8CDD3"/>
+                      </a:solidFill>
+                    </a:lnL>
+                    <a:solidFill>
+                      <a:srgbClr val="FFFFFF"/>
+                    </a:solidFill>
+                  </a:tcPr>
+                </a:tc>
+                <a:tc>
+                  <a:txBody>
+                    <a:bodyPr/>
+                    <a:lstStyle/>
+                    <a:p>
+                      <a:r>
+                        <a:rPr sz="800" b="0" i="0">
+                          <a:solidFill>
+                            <a:srgbClr val="1F2937"/>
+                          </a:solidFill>
+                          <a:latin typeface="Arial"/>
+                        </a:rPr>
+                        <a:t>Termination, insulation resistance and continuity testing</a:t>
+                      </a:r>
+                    </a:p>
+                  </a:txBody>
+                  <a:tcPr marL="91440" marR="91440" marT="45720" marB="45720">
+                    <a:lnB w="6350" cap="flat" cmpd="sng" algn="ctr">
+                      <a:solidFill>
+                        <a:srgbClr val="C8CDD3"/>
+                      </a:solidFill>
+                    </a:lnB>
+                    <a:lnT w="6350" cap="flat" cmpd="sng" algn="ctr">
+                      <a:solidFill>
+                        <a:srgbClr val="C8CDD3"/>
+                      </a:solidFill>
+                    </a:lnT>
+                    <a:lnR w="6350" cap="flat" cmpd="sng" algn="ctr">
+                      <a:solidFill>
+                        <a:srgbClr val="C8CDD3"/>
+                      </a:solidFill>
+                    </a:lnR>
+                    <a:lnL w="6350" cap="flat" cmpd="sng" algn="ctr">
+                      <a:solidFill>
+                        <a:srgbClr val="C8CDD3"/>
+                      </a:solidFill>
+                    </a:lnL>
+                    <a:solidFill>
+                      <a:srgbClr val="FFFFFF"/>
+                    </a:solidFill>
+                  </a:tcPr>
+                </a:tc>
+                <a:tc>
+                  <a:txBody>
+                    <a:bodyPr/>
+                    <a:lstStyle/>
+                    <a:p>
+                      <a:r>
+                        <a:rPr sz="800" b="0" i="0">
+                          <a:solidFill>
+                            <a:srgbClr val="1F2937"/>
+                          </a:solidFill>
+                          <a:latin typeface="Arial"/>
+                        </a:rPr>
+                        <a:t>LOC-01 · 1001</a:t>
+                      </a:r>
+                    </a:p>
+                  </a:txBody>
+                  <a:tcPr marL="91440" marR="91440" marT="45720" marB="45720">
+                    <a:lnB w="6350" cap="flat" cmpd="sng" algn="ctr">
+                      <a:solidFill>
+                        <a:srgbClr val="C8CDD3"/>
+                      </a:solidFill>
+                    </a:lnB>
+                    <a:lnT w="6350" cap="flat" cmpd="sng" algn="ctr">
+                      <a:solidFill>
+                        <a:srgbClr val="C8CDD3"/>
+                      </a:solidFill>
+                    </a:lnT>
+                    <a:lnR w="6350" cap="flat" cmpd="sng" algn="ctr">
+                      <a:solidFill>
+                        <a:srgbClr val="C8CDD3"/>
+                      </a:solidFill>
+                    </a:lnR>
+                    <a:lnL w="6350" cap="flat" cmpd="sng" algn="ctr">
+                      <a:solidFill>
+                        <a:srgbClr val="C8CDD3"/>
+                      </a:solidFill>
+                    </a:lnL>
+                    <a:solidFill>
+                      <a:srgbClr val="FFFFFF"/>
+                    </a:solidFill>
+                  </a:tcPr>
+                </a:tc>
+                <a:tc>
+                  <a:txBody>
+                    <a:bodyPr/>
+                    <a:lstStyle/>
+                    <a:p>
+                      <a:r>
+                        <a:rPr sz="800" b="0" i="0">
+                          <a:solidFill>
+                            <a:srgbClr val="1F2937"/>
+                          </a:solidFill>
+                          <a:latin typeface="Arial"/>
+                        </a:rPr>
+                        <a:t>11 No. fittings</a:t>
+                      </a:r>
+                    </a:p>
+                  </a:txBody>
+                  <a:tcPr marL="91440" marR="91440" marT="45720" marB="45720">
+                    <a:lnB w="6350" cap="flat" cmpd="sng" algn="ctr">
+                      <a:solidFill>
+                        <a:srgbClr val="C8CDD3"/>
+                      </a:solidFill>
+                    </a:lnB>
+                    <a:lnT w="6350" cap="flat" cmpd="sng" algn="ctr">
+                      <a:solidFill>
+                        <a:srgbClr val="C8CDD3"/>
+                      </a:solidFill>
+                    </a:lnT>
+                    <a:lnR w="6350" cap="flat" cmpd="sng" algn="ctr">
+                      <a:solidFill>
+                        <a:srgbClr val="C8CDD3"/>
+                      </a:solidFill>
+                    </a:lnR>
+                    <a:lnL w="6350" cap="flat" cmpd="sng" algn="ctr">
+                      <a:solidFill>
+                        <a:srgbClr val="C8CDD3"/>
+                      </a:solidFill>
+                    </a:lnL>
+                    <a:solidFill>
+                      <a:srgbClr val="FFFFFF"/>
+                    </a:solidFill>
+                  </a:tcPr>
+                </a:tc>
+                <a:tc>
+                  <a:txBody>
+                    <a:bodyPr/>
+                    <a:lstStyle/>
+                    <a:p>
+                      <a:r>
+                        <a:rPr sz="800" b="0" i="0">
+                          <a:solidFill>
+                            <a:srgbClr val="1F2937"/>
+                          </a:solidFill>
+                          <a:latin typeface="Arial"/>
+                        </a:rPr>
+                        <a:t>—</a:t>
+                      </a:r>
+                    </a:p>
+                  </a:txBody>
+                  <a:tcPr marL="91440" marR="91440" marT="45720" marB="45720">
+                    <a:lnB w="6350" cap="flat" cmpd="sng" algn="ctr">
+                      <a:solidFill>
+                        <a:srgbClr val="C8CDD3"/>
+                      </a:solidFill>
+                    </a:lnB>
+                    <a:lnT w="6350" cap="flat" cmpd="sng" algn="ctr">
+                      <a:solidFill>
+                        <a:srgbClr val="C8CDD3"/>
+                      </a:solidFill>
+                    </a:lnT>
+                    <a:lnR w="6350" cap="flat" cmpd="sng" algn="ctr">
+                      <a:solidFill>
+                        <a:srgbClr val="C8CDD3"/>
+                      </a:solidFill>
+                    </a:lnR>
+                    <a:lnL w="6350" cap="flat" cmpd="sng" algn="ctr">
+                      <a:solidFill>
+                        <a:srgbClr val="C8CDD3"/>
+                      </a:solidFill>
+                    </a:lnL>
+                    <a:solidFill>
+                      <a:srgbClr val="FFFFFF"/>
+                    </a:solidFill>
+                  </a:tcPr>
+                </a:tc>
+                <a:tc>
+                  <a:txBody>
+                    <a:bodyPr/>
+                    <a:lstStyle/>
+                    <a:p>
+                      <a:r>
+                        <a:rPr sz="800" b="0" i="0">
+                          <a:solidFill>
+                            <a:srgbClr val="1F2937"/>
+                          </a:solidFill>
+                          <a:latin typeface="Arial"/>
+                        </a:rPr>
+                        <a:t>LOC-01 test records issued</a:t>
+                      </a:r>
+                    </a:p>
+                  </a:txBody>
+                  <a:tcPr marL="91440" marR="91440" marT="45720" marB="45720">
+                    <a:lnB w="6350" cap="flat" cmpd="sng" algn="ctr">
+                      <a:solidFill>
+                        <a:srgbClr val="C8CDD3"/>
+                      </a:solidFill>
+                    </a:lnB>
+                    <a:lnT w="6350" cap="flat" cmpd="sng" algn="ctr">
+                      <a:solidFill>
+                        <a:srgbClr val="C8CDD3"/>
+                      </a:solidFill>
+                    </a:lnT>
+                    <a:lnR w="6350" cap="flat" cmpd="sng" algn="ctr">
+                      <a:solidFill>
+                        <a:srgbClr val="C8CDD3"/>
+                      </a:solidFill>
+                    </a:lnR>
+                    <a:lnL w="6350" cap="flat" cmpd="sng" algn="ctr">
+                      <a:solidFill>
+                        <a:srgbClr val="C8CDD3"/>
+                      </a:solidFill>
+                    </a:lnL>
+                    <a:solidFill>
+                      <a:srgbClr val="FFFFFF"/>
+                    </a:solidFill>
+                  </a:tcPr>
+                </a:tc>
+              </a:tr>
+              <a:tr h="241442">
+                <a:tc>
+                  <a:txBody>
+                    <a:bodyPr/>
+                    <a:lstStyle/>
+                    <a:p>
+                      <a:r>
+                        <a:rPr sz="800" b="1" i="0">
+                          <a:solidFill>
+                            <a:srgbClr val="1F2937"/>
+                          </a:solidFill>
+                          <a:latin typeface="Arial"/>
+                        </a:rPr>
+                        <a:t>3</a:t>
+                      </a:r>
+                    </a:p>
+                  </a:txBody>
+                  <a:tcPr marL="91440" marR="91440" marT="45720" marB="45720">
+                    <a:lnB w="6350" cap="flat" cmpd="sng" algn="ctr">
+                      <a:solidFill>
+                        <a:srgbClr val="C8CDD3"/>
+                      </a:solidFill>
+                    </a:lnB>
+                    <a:lnT w="6350" cap="flat" cmpd="sng" algn="ctr">
+                      <a:solidFill>
+                        <a:srgbClr val="C8CDD3"/>
+                      </a:solidFill>
+                    </a:lnT>
+                    <a:lnR w="6350" cap="flat" cmpd="sng" algn="ctr">
+                      <a:solidFill>
+                        <a:srgbClr val="C8CDD3"/>
+                      </a:solidFill>
+                    </a:lnR>
+                    <a:lnL w="6350" cap="flat" cmpd="sng" algn="ctr">
+                      <a:solidFill>
+                        <a:srgbClr val="C8CDD3"/>
+                      </a:solidFill>
+                    </a:lnL>
+                    <a:solidFill>
+                      <a:srgbClr val="FFFFFF"/>
+                    </a:solidFill>
+                  </a:tcPr>
+                </a:tc>
+                <a:tc>
+                  <a:txBody>
+                    <a:bodyPr/>
+                    <a:lstStyle/>
+                    <a:p>
+                      <a:r>
+                        <a:rPr sz="800" b="0" i="0">
+                          <a:solidFill>
+                            <a:srgbClr val="1F2937"/>
+                          </a:solidFill>
+                          <a:latin typeface="Arial"/>
+                        </a:rPr>
+                        <a:t>Backfill, sealant and pavement reinstatement of the saw cut</a:t>
+                      </a:r>
+                    </a:p>
+                  </a:txBody>
+                  <a:tcPr marL="91440" marR="91440" marT="45720" marB="45720">
+                    <a:lnB w="6350" cap="flat" cmpd="sng" algn="ctr">
+                      <a:solidFill>
+                        <a:srgbClr val="C8CDD3"/>
+                      </a:solidFill>
+                    </a:lnB>
+                    <a:lnT w="6350" cap="flat" cmpd="sng" algn="ctr">
+                      <a:solidFill>
+                        <a:srgbClr val="C8CDD3"/>
+                      </a:solidFill>
+                    </a:lnT>
+                    <a:lnR w="6350" cap="flat" cmpd="sng" algn="ctr">
+                      <a:solidFill>
+                        <a:srgbClr val="C8CDD3"/>
+                      </a:solidFill>
+                    </a:lnR>
+                    <a:lnL w="6350" cap="flat" cmpd="sng" algn="ctr">
+                      <a:solidFill>
+                        <a:srgbClr val="C8CDD3"/>
+                      </a:solidFill>
+                    </a:lnL>
+                    <a:solidFill>
+                      <a:srgbClr val="FFFFFF"/>
+                    </a:solidFill>
+                  </a:tcPr>
+                </a:tc>
+                <a:tc>
+                  <a:txBody>
+                    <a:bodyPr/>
+                    <a:lstStyle/>
+                    <a:p>
+                      <a:r>
+                        <a:rPr sz="800" b="0" i="0">
+                          <a:solidFill>
+                            <a:srgbClr val="1F2937"/>
+                          </a:solidFill>
+                          <a:latin typeface="Arial"/>
+                        </a:rPr>
+                        <a:t>LOC-01 · 1001</a:t>
+                      </a:r>
+                    </a:p>
+                  </a:txBody>
+                  <a:tcPr marL="91440" marR="91440" marT="45720" marB="45720">
+                    <a:lnB w="6350" cap="flat" cmpd="sng" algn="ctr">
+                      <a:solidFill>
+                        <a:srgbClr val="C8CDD3"/>
+                      </a:solidFill>
+                    </a:lnB>
+                    <a:lnT w="6350" cap="flat" cmpd="sng" algn="ctr">
+                      <a:solidFill>
+                        <a:srgbClr val="C8CDD3"/>
+                      </a:solidFill>
+                    </a:lnT>
+                    <a:lnR w="6350" cap="flat" cmpd="sng" algn="ctr">
+                      <a:solidFill>
+                        <a:srgbClr val="C8CDD3"/>
+                      </a:solidFill>
+                    </a:lnR>
+                    <a:lnL w="6350" cap="flat" cmpd="sng" algn="ctr">
+                      <a:solidFill>
+                        <a:srgbClr val="C8CDD3"/>
+                      </a:solidFill>
+                    </a:lnL>
+                    <a:solidFill>
+                      <a:srgbClr val="FFFFFF"/>
+                    </a:solidFill>
+                  </a:tcPr>
+                </a:tc>
+                <a:tc>
+                  <a:txBody>
+                    <a:bodyPr/>
+                    <a:lstStyle/>
+                    <a:p>
+                      <a:r>
+                        <a:rPr sz="800" b="0" i="0">
+                          <a:solidFill>
+                            <a:srgbClr val="1F2937"/>
+                          </a:solidFill>
+                          <a:latin typeface="Arial"/>
+                        </a:rPr>
+                        <a:t>approx. 300 m</a:t>
+                      </a:r>
+                    </a:p>
+                  </a:txBody>
+                  <a:tcPr marL="91440" marR="91440" marT="45720" marB="45720">
+                    <a:lnB w="6350" cap="flat" cmpd="sng" algn="ctr">
+                      <a:solidFill>
+                        <a:srgbClr val="C8CDD3"/>
+                      </a:solidFill>
+                    </a:lnB>
+                    <a:lnT w="6350" cap="flat" cmpd="sng" algn="ctr">
+                      <a:solidFill>
+                        <a:srgbClr val="C8CDD3"/>
+                      </a:solidFill>
+                    </a:lnT>
+                    <a:lnR w="6350" cap="flat" cmpd="sng" algn="ctr">
+                      <a:solidFill>
+                        <a:srgbClr val="C8CDD3"/>
+                      </a:solidFill>
+                    </a:lnR>
+                    <a:lnL w="6350" cap="flat" cmpd="sng" algn="ctr">
+                      <a:solidFill>
+                        <a:srgbClr val="C8CDD3"/>
+                      </a:solidFill>
+                    </a:lnL>
+                    <a:solidFill>
+                      <a:srgbClr val="FFFFFF"/>
+                    </a:solidFill>
+                  </a:tcPr>
+                </a:tc>
+                <a:tc>
+                  <a:txBody>
+                    <a:bodyPr/>
+                    <a:lstStyle/>
+                    <a:p>
+                      <a:r>
+                        <a:rPr sz="800" b="0" i="0">
+                          <a:solidFill>
+                            <a:srgbClr val="1F2937"/>
+                          </a:solidFill>
+                          <a:latin typeface="Arial"/>
+                        </a:rPr>
+                        <a:t>Per the awaited detail</a:t>
+                      </a:r>
+                    </a:p>
+                  </a:txBody>
+                  <a:tcPr marL="91440" marR="91440" marT="45720" marB="45720">
+                    <a:lnB w="6350" cap="flat" cmpd="sng" algn="ctr">
+                      <a:solidFill>
+                        <a:srgbClr val="C8CDD3"/>
+                      </a:solidFill>
+                    </a:lnB>
+                    <a:lnT w="6350" cap="flat" cmpd="sng" algn="ctr">
+                      <a:solidFill>
+                        <a:srgbClr val="C8CDD3"/>
+                      </a:solidFill>
+                    </a:lnT>
+                    <a:lnR w="6350" cap="flat" cmpd="sng" algn="ctr">
+                      <a:solidFill>
+                        <a:srgbClr val="C8CDD3"/>
+                      </a:solidFill>
+                    </a:lnR>
+                    <a:lnL w="6350" cap="flat" cmpd="sng" algn="ctr">
+                      <a:solidFill>
+                        <a:srgbClr val="C8CDD3"/>
+                      </a:solidFill>
+                    </a:lnL>
+                    <a:solidFill>
+                      <a:srgbClr val="FFFFFF"/>
+                    </a:solidFill>
+                  </a:tcPr>
+                </a:tc>
+                <a:tc>
+                  <a:txBody>
+                    <a:bodyPr/>
+                    <a:lstStyle/>
+                    <a:p>
+                      <a:r>
+                        <a:rPr sz="800" b="0" i="0">
+                          <a:solidFill>
+                            <a:srgbClr val="1F2937"/>
+                          </a:solidFill>
+                          <a:latin typeface="Arial"/>
+                        </a:rPr>
+                        <a:t>LOC-01 cut sealed; cure period started</a:t>
+                      </a:r>
+                    </a:p>
+                  </a:txBody>
+                  <a:tcPr marL="91440" marR="91440" marT="45720" marB="45720">
+                    <a:lnB w="6350" cap="flat" cmpd="sng" algn="ctr">
+                      <a:solidFill>
+                        <a:srgbClr val="C8CDD3"/>
+                      </a:solidFill>
+                    </a:lnB>
+                    <a:lnT w="6350" cap="flat" cmpd="sng" algn="ctr">
+                      <a:solidFill>
+                        <a:srgbClr val="C8CDD3"/>
+                      </a:solidFill>
+                    </a:lnT>
+                    <a:lnR w="6350" cap="flat" cmpd="sng" algn="ctr">
+                      <a:solidFill>
+                        <a:srgbClr val="C8CDD3"/>
+                      </a:solidFill>
+                    </a:lnR>
+                    <a:lnL w="6350" cap="flat" cmpd="sng" algn="ctr">
+                      <a:solidFill>
+                        <a:srgbClr val="C8CDD3"/>
+                      </a:solidFill>
+                    </a:lnL>
+                    <a:solidFill>
+                      <a:srgbClr val="FFFFFF"/>
+                    </a:solidFill>
+                  </a:tcPr>
+                </a:tc>
+              </a:tr>
+              <a:tr h="241442">
+                <a:tc>
+                  <a:txBody>
+                    <a:bodyPr/>
+                    <a:lstStyle/>
+                    <a:p>
+                      <a:r>
+                        <a:rPr sz="800" b="1" i="0">
+                          <a:solidFill>
+                            <a:srgbClr val="1F2937"/>
+                          </a:solidFill>
+                          <a:latin typeface="Arial"/>
+                        </a:rPr>
+                        <a:t>4</a:t>
+                      </a:r>
+                    </a:p>
+                  </a:txBody>
+                  <a:tcPr marL="91440" marR="91440" marT="45720" marB="45720">
+                    <a:lnB w="6350" cap="flat" cmpd="sng" algn="ctr">
+                      <a:solidFill>
+                        <a:srgbClr val="C8CDD3"/>
+                      </a:solidFill>
+                    </a:lnB>
+                    <a:lnT w="6350" cap="flat" cmpd="sng" algn="ctr">
+                      <a:solidFill>
+                        <a:srgbClr val="C8CDD3"/>
+                      </a:solidFill>
+                    </a:lnT>
+                    <a:lnR w="6350" cap="flat" cmpd="sng" algn="ctr">
+                      <a:solidFill>
+                        <a:srgbClr val="C8CDD3"/>
+                      </a:solidFill>
+                    </a:lnR>
+                    <a:lnL w="6350" cap="flat" cmpd="sng" algn="ctr">
+                      <a:solidFill>
+                        <a:srgbClr val="C8CDD3"/>
+                      </a:solidFill>
+                    </a:lnL>
+                    <a:solidFill>
+                      <a:srgbClr val="F4F6F8"/>
                     </a:solidFill>
                   </a:tcPr>
                 </a:tc>
@@ -55482,7 +56244,7 @@
                       </a:solidFill>
                     </a:lnL>
                     <a:solidFill>
-                      <a:srgbClr val="FFFFFF"/>
+                      <a:srgbClr val="F4F6F8"/>
                     </a:solidFill>
                   </a:tcPr>
                 </a:tc>
@@ -55498,7 +56260,939 @@
                           </a:solidFill>
                           <a:latin typeface="Arial"/>
                         </a:rPr>
-                        <a:t>LOC-02 / 03</a:t>
+                        <a:t>LOC-03 · 1003</a:t>
+                      </a:r>
+                    </a:p>
+                  </a:txBody>
+                  <a:tcPr marL="91440" marR="91440" marT="45720" marB="45720">
+                    <a:lnB w="6350" cap="flat" cmpd="sng" algn="ctr">
+                      <a:solidFill>
+                        <a:srgbClr val="C8CDD3"/>
+                      </a:solidFill>
+                    </a:lnB>
+                    <a:lnT w="6350" cap="flat" cmpd="sng" algn="ctr">
+                      <a:solidFill>
+                        <a:srgbClr val="C8CDD3"/>
+                      </a:solidFill>
+                    </a:lnT>
+                    <a:lnR w="6350" cap="flat" cmpd="sng" algn="ctr">
+                      <a:solidFill>
+                        <a:srgbClr val="C8CDD3"/>
+                      </a:solidFill>
+                    </a:lnR>
+                    <a:lnL w="6350" cap="flat" cmpd="sng" algn="ctr">
+                      <a:solidFill>
+                        <a:srgbClr val="C8CDD3"/>
+                      </a:solidFill>
+                    </a:lnL>
+                    <a:solidFill>
+                      <a:srgbClr val="F4F6F8"/>
+                    </a:solidFill>
+                  </a:tcPr>
+                </a:tc>
+                <a:tc>
+                  <a:txBody>
+                    <a:bodyPr/>
+                    <a:lstStyle/>
+                    <a:p>
+                      <a:r>
+                        <a:rPr sz="800" b="0" i="0">
+                          <a:solidFill>
+                            <a:srgbClr val="1F2937"/>
+                          </a:solidFill>
+                          <a:latin typeface="Arial"/>
+                        </a:rPr>
+                        <a:t>approx. 95 m</a:t>
+                      </a:r>
+                    </a:p>
+                  </a:txBody>
+                  <a:tcPr marL="91440" marR="91440" marT="45720" marB="45720">
+                    <a:lnB w="6350" cap="flat" cmpd="sng" algn="ctr">
+                      <a:solidFill>
+                        <a:srgbClr val="C8CDD3"/>
+                      </a:solidFill>
+                    </a:lnB>
+                    <a:lnT w="6350" cap="flat" cmpd="sng" algn="ctr">
+                      <a:solidFill>
+                        <a:srgbClr val="C8CDD3"/>
+                      </a:solidFill>
+                    </a:lnT>
+                    <a:lnR w="6350" cap="flat" cmpd="sng" algn="ctr">
+                      <a:solidFill>
+                        <a:srgbClr val="C8CDD3"/>
+                      </a:solidFill>
+                    </a:lnR>
+                    <a:lnL w="6350" cap="flat" cmpd="sng" algn="ctr">
+                      <a:solidFill>
+                        <a:srgbClr val="C8CDD3"/>
+                      </a:solidFill>
+                    </a:lnL>
+                    <a:solidFill>
+                      <a:srgbClr val="F4F6F8"/>
+                    </a:solidFill>
+                  </a:tcPr>
+                </a:tc>
+                <a:tc>
+                  <a:txBody>
+                    <a:bodyPr/>
+                    <a:lstStyle/>
+                    <a:p>
+                      <a:r>
+                        <a:rPr sz="800" b="0" i="0">
+                          <a:solidFill>
+                            <a:srgbClr val="1F2937"/>
+                          </a:solidFill>
+                          <a:latin typeface="Arial"/>
+                        </a:rPr>
+                        <a:t>H5 — detail accepted</a:t>
+                      </a:r>
+                    </a:p>
+                  </a:txBody>
+                  <a:tcPr marL="91440" marR="91440" marT="45720" marB="45720">
+                    <a:lnB w="6350" cap="flat" cmpd="sng" algn="ctr">
+                      <a:solidFill>
+                        <a:srgbClr val="C8CDD3"/>
+                      </a:solidFill>
+                    </a:lnB>
+                    <a:lnT w="6350" cap="flat" cmpd="sng" algn="ctr">
+                      <a:solidFill>
+                        <a:srgbClr val="C8CDD3"/>
+                      </a:solidFill>
+                    </a:lnT>
+                    <a:lnR w="6350" cap="flat" cmpd="sng" algn="ctr">
+                      <a:solidFill>
+                        <a:srgbClr val="C8CDD3"/>
+                      </a:solidFill>
+                    </a:lnR>
+                    <a:lnL w="6350" cap="flat" cmpd="sng" algn="ctr">
+                      <a:solidFill>
+                        <a:srgbClr val="C8CDD3"/>
+                      </a:solidFill>
+                    </a:lnL>
+                    <a:solidFill>
+                      <a:srgbClr val="F4F6F8"/>
+                    </a:solidFill>
+                  </a:tcPr>
+                </a:tc>
+                <a:tc>
+                  <a:txBody>
+                    <a:bodyPr/>
+                    <a:lstStyle/>
+                    <a:p>
+                      <a:r>
+                        <a:rPr sz="800" b="0" i="0">
+                          <a:solidFill>
+                            <a:srgbClr val="1F2937"/>
+                          </a:solidFill>
+                          <a:latin typeface="Arial"/>
+                        </a:rPr>
+                        <a:t>LOC-03 route cut</a:t>
+                      </a:r>
+                    </a:p>
+                  </a:txBody>
+                  <a:tcPr marL="91440" marR="91440" marT="45720" marB="45720">
+                    <a:lnB w="6350" cap="flat" cmpd="sng" algn="ctr">
+                      <a:solidFill>
+                        <a:srgbClr val="C8CDD3"/>
+                      </a:solidFill>
+                    </a:lnB>
+                    <a:lnT w="6350" cap="flat" cmpd="sng" algn="ctr">
+                      <a:solidFill>
+                        <a:srgbClr val="C8CDD3"/>
+                      </a:solidFill>
+                    </a:lnT>
+                    <a:lnR w="6350" cap="flat" cmpd="sng" algn="ctr">
+                      <a:solidFill>
+                        <a:srgbClr val="C8CDD3"/>
+                      </a:solidFill>
+                    </a:lnR>
+                    <a:lnL w="6350" cap="flat" cmpd="sng" algn="ctr">
+                      <a:solidFill>
+                        <a:srgbClr val="C8CDD3"/>
+                      </a:solidFill>
+                    </a:lnL>
+                    <a:solidFill>
+                      <a:srgbClr val="F4F6F8"/>
+                    </a:solidFill>
+                  </a:tcPr>
+                </a:tc>
+              </a:tr>
+              <a:tr h="241442">
+                <a:tc>
+                  <a:txBody>
+                    <a:bodyPr/>
+                    <a:lstStyle/>
+                    <a:p>
+                      <a:r>
+                        <a:rPr sz="800" b="1" i="0">
+                          <a:solidFill>
+                            <a:srgbClr val="1F2937"/>
+                          </a:solidFill>
+                          <a:latin typeface="Arial"/>
+                        </a:rPr>
+                        <a:t>4</a:t>
+                      </a:r>
+                    </a:p>
+                  </a:txBody>
+                  <a:tcPr marL="91440" marR="91440" marT="45720" marB="45720">
+                    <a:lnB w="6350" cap="flat" cmpd="sng" algn="ctr">
+                      <a:solidFill>
+                        <a:srgbClr val="C8CDD3"/>
+                      </a:solidFill>
+                    </a:lnB>
+                    <a:lnT w="6350" cap="flat" cmpd="sng" algn="ctr">
+                      <a:solidFill>
+                        <a:srgbClr val="C8CDD3"/>
+                      </a:solidFill>
+                    </a:lnT>
+                    <a:lnR w="6350" cap="flat" cmpd="sng" algn="ctr">
+                      <a:solidFill>
+                        <a:srgbClr val="C8CDD3"/>
+                      </a:solidFill>
+                    </a:lnR>
+                    <a:lnL w="6350" cap="flat" cmpd="sng" algn="ctr">
+                      <a:solidFill>
+                        <a:srgbClr val="C8CDD3"/>
+                      </a:solidFill>
+                    </a:lnL>
+                    <a:solidFill>
+                      <a:srgbClr val="F4F6F8"/>
+                    </a:solidFill>
+                  </a:tcPr>
+                </a:tc>
+                <a:tc>
+                  <a:txBody>
+                    <a:bodyPr/>
+                    <a:lstStyle/>
+                    <a:p>
+                      <a:r>
+                        <a:rPr sz="800" b="0" i="0">
+                          <a:solidFill>
+                            <a:srgbClr val="1F2937"/>
+                          </a:solidFill>
+                          <a:latin typeface="Arial"/>
+                        </a:rPr>
+                        <a:t>Set 1 No. new base; the balance takes side entry into its existing base</a:t>
+                      </a:r>
+                    </a:p>
+                  </a:txBody>
+                  <a:tcPr marL="91440" marR="91440" marT="45720" marB="45720">
+                    <a:lnB w="6350" cap="flat" cmpd="sng" algn="ctr">
+                      <a:solidFill>
+                        <a:srgbClr val="C8CDD3"/>
+                      </a:solidFill>
+                    </a:lnB>
+                    <a:lnT w="6350" cap="flat" cmpd="sng" algn="ctr">
+                      <a:solidFill>
+                        <a:srgbClr val="C8CDD3"/>
+                      </a:solidFill>
+                    </a:lnT>
+                    <a:lnR w="6350" cap="flat" cmpd="sng" algn="ctr">
+                      <a:solidFill>
+                        <a:srgbClr val="C8CDD3"/>
+                      </a:solidFill>
+                    </a:lnR>
+                    <a:lnL w="6350" cap="flat" cmpd="sng" algn="ctr">
+                      <a:solidFill>
+                        <a:srgbClr val="C8CDD3"/>
+                      </a:solidFill>
+                    </a:lnL>
+                    <a:solidFill>
+                      <a:srgbClr val="F4F6F8"/>
+                    </a:solidFill>
+                  </a:tcPr>
+                </a:tc>
+                <a:tc>
+                  <a:txBody>
+                    <a:bodyPr/>
+                    <a:lstStyle/>
+                    <a:p>
+                      <a:r>
+                        <a:rPr sz="800" b="0" i="0">
+                          <a:solidFill>
+                            <a:srgbClr val="1F2937"/>
+                          </a:solidFill>
+                          <a:latin typeface="Arial"/>
+                        </a:rPr>
+                        <a:t>LOC-03 · 1003</a:t>
+                      </a:r>
+                    </a:p>
+                  </a:txBody>
+                  <a:tcPr marL="91440" marR="91440" marT="45720" marB="45720">
+                    <a:lnB w="6350" cap="flat" cmpd="sng" algn="ctr">
+                      <a:solidFill>
+                        <a:srgbClr val="C8CDD3"/>
+                      </a:solidFill>
+                    </a:lnB>
+                    <a:lnT w="6350" cap="flat" cmpd="sng" algn="ctr">
+                      <a:solidFill>
+                        <a:srgbClr val="C8CDD3"/>
+                      </a:solidFill>
+                    </a:lnT>
+                    <a:lnR w="6350" cap="flat" cmpd="sng" algn="ctr">
+                      <a:solidFill>
+                        <a:srgbClr val="C8CDD3"/>
+                      </a:solidFill>
+                    </a:lnR>
+                    <a:lnL w="6350" cap="flat" cmpd="sng" algn="ctr">
+                      <a:solidFill>
+                        <a:srgbClr val="C8CDD3"/>
+                      </a:solidFill>
+                    </a:lnL>
+                    <a:solidFill>
+                      <a:srgbClr val="F4F6F8"/>
+                    </a:solidFill>
+                  </a:tcPr>
+                </a:tc>
+                <a:tc>
+                  <a:txBody>
+                    <a:bodyPr/>
+                    <a:lstStyle/>
+                    <a:p>
+                      <a:r>
+                        <a:rPr sz="800" b="0" i="0">
+                          <a:solidFill>
+                            <a:srgbClr val="1F2937"/>
+                          </a:solidFill>
+                          <a:latin typeface="Arial"/>
+                        </a:rPr>
+                        <a:t>1 No. 12" + 3 No.</a:t>
+                      </a:r>
+                    </a:p>
+                  </a:txBody>
+                  <a:tcPr marL="91440" marR="91440" marT="45720" marB="45720">
+                    <a:lnB w="6350" cap="flat" cmpd="sng" algn="ctr">
+                      <a:solidFill>
+                        <a:srgbClr val="C8CDD3"/>
+                      </a:solidFill>
+                    </a:lnB>
+                    <a:lnT w="6350" cap="flat" cmpd="sng" algn="ctr">
+                      <a:solidFill>
+                        <a:srgbClr val="C8CDD3"/>
+                      </a:solidFill>
+                    </a:lnT>
+                    <a:lnR w="6350" cap="flat" cmpd="sng" algn="ctr">
+                      <a:solidFill>
+                        <a:srgbClr val="C8CDD3"/>
+                      </a:solidFill>
+                    </a:lnR>
+                    <a:lnL w="6350" cap="flat" cmpd="sng" algn="ctr">
+                      <a:solidFill>
+                        <a:srgbClr val="C8CDD3"/>
+                      </a:solidFill>
+                    </a:lnL>
+                    <a:solidFill>
+                      <a:srgbClr val="F4F6F8"/>
+                    </a:solidFill>
+                  </a:tcPr>
+                </a:tc>
+                <a:tc>
+                  <a:txBody>
+                    <a:bodyPr/>
+                    <a:lstStyle/>
+                    <a:p>
+                      <a:r>
+                        <a:rPr sz="800" b="0" i="0">
+                          <a:solidFill>
+                            <a:srgbClr val="1F2937"/>
+                          </a:solidFill>
+                          <a:latin typeface="Arial"/>
+                        </a:rPr>
+                        <a:t>—</a:t>
+                      </a:r>
+                    </a:p>
+                  </a:txBody>
+                  <a:tcPr marL="91440" marR="91440" marT="45720" marB="45720">
+                    <a:lnB w="6350" cap="flat" cmpd="sng" algn="ctr">
+                      <a:solidFill>
+                        <a:srgbClr val="C8CDD3"/>
+                      </a:solidFill>
+                    </a:lnB>
+                    <a:lnT w="6350" cap="flat" cmpd="sng" algn="ctr">
+                      <a:solidFill>
+                        <a:srgbClr val="C8CDD3"/>
+                      </a:solidFill>
+                    </a:lnT>
+                    <a:lnR w="6350" cap="flat" cmpd="sng" algn="ctr">
+                      <a:solidFill>
+                        <a:srgbClr val="C8CDD3"/>
+                      </a:solidFill>
+                    </a:lnR>
+                    <a:lnL w="6350" cap="flat" cmpd="sng" algn="ctr">
+                      <a:solidFill>
+                        <a:srgbClr val="C8CDD3"/>
+                      </a:solidFill>
+                    </a:lnL>
+                    <a:solidFill>
+                      <a:srgbClr val="F4F6F8"/>
+                    </a:solidFill>
+                  </a:tcPr>
+                </a:tc>
+                <a:tc>
+                  <a:txBody>
+                    <a:bodyPr/>
+                    <a:lstStyle/>
+                    <a:p>
+                      <a:r>
+                        <a:rPr sz="800" b="0" i="0">
+                          <a:solidFill>
+                            <a:srgbClr val="1F2937"/>
+                          </a:solidFill>
+                          <a:latin typeface="Arial"/>
+                        </a:rPr>
+                        <a:t>Bases ready to receive cable</a:t>
+                      </a:r>
+                    </a:p>
+                  </a:txBody>
+                  <a:tcPr marL="91440" marR="91440" marT="45720" marB="45720">
+                    <a:lnB w="6350" cap="flat" cmpd="sng" algn="ctr">
+                      <a:solidFill>
+                        <a:srgbClr val="C8CDD3"/>
+                      </a:solidFill>
+                    </a:lnB>
+                    <a:lnT w="6350" cap="flat" cmpd="sng" algn="ctr">
+                      <a:solidFill>
+                        <a:srgbClr val="C8CDD3"/>
+                      </a:solidFill>
+                    </a:lnT>
+                    <a:lnR w="6350" cap="flat" cmpd="sng" algn="ctr">
+                      <a:solidFill>
+                        <a:srgbClr val="C8CDD3"/>
+                      </a:solidFill>
+                    </a:lnR>
+                    <a:lnL w="6350" cap="flat" cmpd="sng" algn="ctr">
+                      <a:solidFill>
+                        <a:srgbClr val="C8CDD3"/>
+                      </a:solidFill>
+                    </a:lnL>
+                    <a:solidFill>
+                      <a:srgbClr val="F4F6F8"/>
+                    </a:solidFill>
+                  </a:tcPr>
+                </a:tc>
+              </a:tr>
+              <a:tr h="241442">
+                <a:tc>
+                  <a:txBody>
+                    <a:bodyPr/>
+                    <a:lstStyle/>
+                    <a:p>
+                      <a:r>
+                        <a:rPr sz="800" b="1" i="0">
+                          <a:solidFill>
+                            <a:srgbClr val="1F2937"/>
+                          </a:solidFill>
+                          <a:latin typeface="Arial"/>
+                        </a:rPr>
+                        <a:t>4</a:t>
+                      </a:r>
+                    </a:p>
+                  </a:txBody>
+                  <a:tcPr marL="91440" marR="91440" marT="45720" marB="45720">
+                    <a:lnB w="6350" cap="flat" cmpd="sng" algn="ctr">
+                      <a:solidFill>
+                        <a:srgbClr val="C8CDD3"/>
+                      </a:solidFill>
+                    </a:lnB>
+                    <a:lnT w="6350" cap="flat" cmpd="sng" algn="ctr">
+                      <a:solidFill>
+                        <a:srgbClr val="C8CDD3"/>
+                      </a:solidFill>
+                    </a:lnT>
+                    <a:lnR w="6350" cap="flat" cmpd="sng" algn="ctr">
+                      <a:solidFill>
+                        <a:srgbClr val="C8CDD3"/>
+                      </a:solidFill>
+                    </a:lnR>
+                    <a:lnL w="6350" cap="flat" cmpd="sng" algn="ctr">
+                      <a:solidFill>
+                        <a:srgbClr val="C8CDD3"/>
+                      </a:solidFill>
+                    </a:lnL>
+                    <a:solidFill>
+                      <a:srgbClr val="F4F6F8"/>
+                    </a:solidFill>
+                  </a:tcPr>
+                </a:tc>
+                <a:tc>
+                  <a:txBody>
+                    <a:bodyPr/>
+                    <a:lstStyle/>
+                    <a:p>
+                      <a:r>
+                        <a:rPr sz="800" b="0" i="0">
+                          <a:solidFill>
+                            <a:srgbClr val="1F2937"/>
+                          </a:solidFill>
+                          <a:latin typeface="Arial"/>
+                        </a:rPr>
+                        <a:t>Cable, termination, insulation resistance and continuity testing</a:t>
+                      </a:r>
+                    </a:p>
+                  </a:txBody>
+                  <a:tcPr marL="91440" marR="91440" marT="45720" marB="45720">
+                    <a:lnB w="6350" cap="flat" cmpd="sng" algn="ctr">
+                      <a:solidFill>
+                        <a:srgbClr val="C8CDD3"/>
+                      </a:solidFill>
+                    </a:lnB>
+                    <a:lnT w="6350" cap="flat" cmpd="sng" algn="ctr">
+                      <a:solidFill>
+                        <a:srgbClr val="C8CDD3"/>
+                      </a:solidFill>
+                    </a:lnT>
+                    <a:lnR w="6350" cap="flat" cmpd="sng" algn="ctr">
+                      <a:solidFill>
+                        <a:srgbClr val="C8CDD3"/>
+                      </a:solidFill>
+                    </a:lnR>
+                    <a:lnL w="6350" cap="flat" cmpd="sng" algn="ctr">
+                      <a:solidFill>
+                        <a:srgbClr val="C8CDD3"/>
+                      </a:solidFill>
+                    </a:lnL>
+                    <a:solidFill>
+                      <a:srgbClr val="F4F6F8"/>
+                    </a:solidFill>
+                  </a:tcPr>
+                </a:tc>
+                <a:tc>
+                  <a:txBody>
+                    <a:bodyPr/>
+                    <a:lstStyle/>
+                    <a:p>
+                      <a:r>
+                        <a:rPr sz="800" b="0" i="0">
+                          <a:solidFill>
+                            <a:srgbClr val="1F2937"/>
+                          </a:solidFill>
+                          <a:latin typeface="Arial"/>
+                        </a:rPr>
+                        <a:t>LOC-03 · 1003</a:t>
+                      </a:r>
+                    </a:p>
+                  </a:txBody>
+                  <a:tcPr marL="91440" marR="91440" marT="45720" marB="45720">
+                    <a:lnB w="6350" cap="flat" cmpd="sng" algn="ctr">
+                      <a:solidFill>
+                        <a:srgbClr val="C8CDD3"/>
+                      </a:solidFill>
+                    </a:lnB>
+                    <a:lnT w="6350" cap="flat" cmpd="sng" algn="ctr">
+                      <a:solidFill>
+                        <a:srgbClr val="C8CDD3"/>
+                      </a:solidFill>
+                    </a:lnT>
+                    <a:lnR w="6350" cap="flat" cmpd="sng" algn="ctr">
+                      <a:solidFill>
+                        <a:srgbClr val="C8CDD3"/>
+                      </a:solidFill>
+                    </a:lnR>
+                    <a:lnL w="6350" cap="flat" cmpd="sng" algn="ctr">
+                      <a:solidFill>
+                        <a:srgbClr val="C8CDD3"/>
+                      </a:solidFill>
+                    </a:lnL>
+                    <a:solidFill>
+                      <a:srgbClr val="F4F6F8"/>
+                    </a:solidFill>
+                  </a:tcPr>
+                </a:tc>
+                <a:tc>
+                  <a:txBody>
+                    <a:bodyPr/>
+                    <a:lstStyle/>
+                    <a:p>
+                      <a:r>
+                        <a:rPr sz="800" b="0" i="0">
+                          <a:solidFill>
+                            <a:srgbClr val="1F2937"/>
+                          </a:solidFill>
+                          <a:latin typeface="Arial"/>
+                        </a:rPr>
+                        <a:t>4 No. runs</a:t>
+                      </a:r>
+                    </a:p>
+                  </a:txBody>
+                  <a:tcPr marL="91440" marR="91440" marT="45720" marB="45720">
+                    <a:lnB w="6350" cap="flat" cmpd="sng" algn="ctr">
+                      <a:solidFill>
+                        <a:srgbClr val="C8CDD3"/>
+                      </a:solidFill>
+                    </a:lnB>
+                    <a:lnT w="6350" cap="flat" cmpd="sng" algn="ctr">
+                      <a:solidFill>
+                        <a:srgbClr val="C8CDD3"/>
+                      </a:solidFill>
+                    </a:lnT>
+                    <a:lnR w="6350" cap="flat" cmpd="sng" algn="ctr">
+                      <a:solidFill>
+                        <a:srgbClr val="C8CDD3"/>
+                      </a:solidFill>
+                    </a:lnR>
+                    <a:lnL w="6350" cap="flat" cmpd="sng" algn="ctr">
+                      <a:solidFill>
+                        <a:srgbClr val="C8CDD3"/>
+                      </a:solidFill>
+                    </a:lnL>
+                    <a:solidFill>
+                      <a:srgbClr val="F4F6F8"/>
+                    </a:solidFill>
+                  </a:tcPr>
+                </a:tc>
+                <a:tc>
+                  <a:txBody>
+                    <a:bodyPr/>
+                    <a:lstStyle/>
+                    <a:p>
+                      <a:r>
+                        <a:rPr sz="800" b="0" i="0">
+                          <a:solidFill>
+                            <a:srgbClr val="1F2937"/>
+                          </a:solidFill>
+                          <a:latin typeface="Arial"/>
+                        </a:rPr>
+                        <a:t>—</a:t>
+                      </a:r>
+                    </a:p>
+                  </a:txBody>
+                  <a:tcPr marL="91440" marR="91440" marT="45720" marB="45720">
+                    <a:lnB w="6350" cap="flat" cmpd="sng" algn="ctr">
+                      <a:solidFill>
+                        <a:srgbClr val="C8CDD3"/>
+                      </a:solidFill>
+                    </a:lnB>
+                    <a:lnT w="6350" cap="flat" cmpd="sng" algn="ctr">
+                      <a:solidFill>
+                        <a:srgbClr val="C8CDD3"/>
+                      </a:solidFill>
+                    </a:lnT>
+                    <a:lnR w="6350" cap="flat" cmpd="sng" algn="ctr">
+                      <a:solidFill>
+                        <a:srgbClr val="C8CDD3"/>
+                      </a:solidFill>
+                    </a:lnR>
+                    <a:lnL w="6350" cap="flat" cmpd="sng" algn="ctr">
+                      <a:solidFill>
+                        <a:srgbClr val="C8CDD3"/>
+                      </a:solidFill>
+                    </a:lnL>
+                    <a:solidFill>
+                      <a:srgbClr val="F4F6F8"/>
+                    </a:solidFill>
+                  </a:tcPr>
+                </a:tc>
+                <a:tc>
+                  <a:txBody>
+                    <a:bodyPr/>
+                    <a:lstStyle/>
+                    <a:p>
+                      <a:r>
+                        <a:rPr sz="800" b="0" i="0">
+                          <a:solidFill>
+                            <a:srgbClr val="1F2937"/>
+                          </a:solidFill>
+                          <a:latin typeface="Arial"/>
+                        </a:rPr>
+                        <a:t>LOC-03 test records issued</a:t>
+                      </a:r>
+                    </a:p>
+                  </a:txBody>
+                  <a:tcPr marL="91440" marR="91440" marT="45720" marB="45720">
+                    <a:lnB w="6350" cap="flat" cmpd="sng" algn="ctr">
+                      <a:solidFill>
+                        <a:srgbClr val="C8CDD3"/>
+                      </a:solidFill>
+                    </a:lnB>
+                    <a:lnT w="6350" cap="flat" cmpd="sng" algn="ctr">
+                      <a:solidFill>
+                        <a:srgbClr val="C8CDD3"/>
+                      </a:solidFill>
+                    </a:lnT>
+                    <a:lnR w="6350" cap="flat" cmpd="sng" algn="ctr">
+                      <a:solidFill>
+                        <a:srgbClr val="C8CDD3"/>
+                      </a:solidFill>
+                    </a:lnR>
+                    <a:lnL w="6350" cap="flat" cmpd="sng" algn="ctr">
+                      <a:solidFill>
+                        <a:srgbClr val="C8CDD3"/>
+                      </a:solidFill>
+                    </a:lnL>
+                    <a:solidFill>
+                      <a:srgbClr val="F4F6F8"/>
+                    </a:solidFill>
+                  </a:tcPr>
+                </a:tc>
+              </a:tr>
+              <a:tr h="241442">
+                <a:tc>
+                  <a:txBody>
+                    <a:bodyPr/>
+                    <a:lstStyle/>
+                    <a:p>
+                      <a:r>
+                        <a:rPr sz="800" b="1" i="0">
+                          <a:solidFill>
+                            <a:srgbClr val="1F2937"/>
+                          </a:solidFill>
+                          <a:latin typeface="Arial"/>
+                        </a:rPr>
+                        <a:t>4</a:t>
+                      </a:r>
+                    </a:p>
+                  </a:txBody>
+                  <a:tcPr marL="91440" marR="91440" marT="45720" marB="45720">
+                    <a:lnB w="6350" cap="flat" cmpd="sng" algn="ctr">
+                      <a:solidFill>
+                        <a:srgbClr val="C8CDD3"/>
+                      </a:solidFill>
+                    </a:lnB>
+                    <a:lnT w="6350" cap="flat" cmpd="sng" algn="ctr">
+                      <a:solidFill>
+                        <a:srgbClr val="C8CDD3"/>
+                      </a:solidFill>
+                    </a:lnT>
+                    <a:lnR w="6350" cap="flat" cmpd="sng" algn="ctr">
+                      <a:solidFill>
+                        <a:srgbClr val="C8CDD3"/>
+                      </a:solidFill>
+                    </a:lnR>
+                    <a:lnL w="6350" cap="flat" cmpd="sng" algn="ctr">
+                      <a:solidFill>
+                        <a:srgbClr val="C8CDD3"/>
+                      </a:solidFill>
+                    </a:lnL>
+                    <a:solidFill>
+                      <a:srgbClr val="F4F6F8"/>
+                    </a:solidFill>
+                  </a:tcPr>
+                </a:tc>
+                <a:tc>
+                  <a:txBody>
+                    <a:bodyPr/>
+                    <a:lstStyle/>
+                    <a:p>
+                      <a:r>
+                        <a:rPr sz="800" b="0" i="0">
+                          <a:solidFill>
+                            <a:srgbClr val="1F2937"/>
+                          </a:solidFill>
+                          <a:latin typeface="Arial"/>
+                        </a:rPr>
+                        <a:t>Reinstatement of the cut; re-fix RRM.557 and RRM.670</a:t>
+                      </a:r>
+                    </a:p>
+                  </a:txBody>
+                  <a:tcPr marL="91440" marR="91440" marT="45720" marB="45720">
+                    <a:lnB w="6350" cap="flat" cmpd="sng" algn="ctr">
+                      <a:solidFill>
+                        <a:srgbClr val="C8CDD3"/>
+                      </a:solidFill>
+                    </a:lnB>
+                    <a:lnT w="6350" cap="flat" cmpd="sng" algn="ctr">
+                      <a:solidFill>
+                        <a:srgbClr val="C8CDD3"/>
+                      </a:solidFill>
+                    </a:lnT>
+                    <a:lnR w="6350" cap="flat" cmpd="sng" algn="ctr">
+                      <a:solidFill>
+                        <a:srgbClr val="C8CDD3"/>
+                      </a:solidFill>
+                    </a:lnR>
+                    <a:lnL w="6350" cap="flat" cmpd="sng" algn="ctr">
+                      <a:solidFill>
+                        <a:srgbClr val="C8CDD3"/>
+                      </a:solidFill>
+                    </a:lnL>
+                    <a:solidFill>
+                      <a:srgbClr val="F4F6F8"/>
+                    </a:solidFill>
+                  </a:tcPr>
+                </a:tc>
+                <a:tc>
+                  <a:txBody>
+                    <a:bodyPr/>
+                    <a:lstStyle/>
+                    <a:p>
+                      <a:r>
+                        <a:rPr sz="800" b="0" i="0">
+                          <a:solidFill>
+                            <a:srgbClr val="1F2937"/>
+                          </a:solidFill>
+                          <a:latin typeface="Arial"/>
+                        </a:rPr>
+                        <a:t>LOC-03 · 1003</a:t>
+                      </a:r>
+                    </a:p>
+                  </a:txBody>
+                  <a:tcPr marL="91440" marR="91440" marT="45720" marB="45720">
+                    <a:lnB w="6350" cap="flat" cmpd="sng" algn="ctr">
+                      <a:solidFill>
+                        <a:srgbClr val="C8CDD3"/>
+                      </a:solidFill>
+                    </a:lnB>
+                    <a:lnT w="6350" cap="flat" cmpd="sng" algn="ctr">
+                      <a:solidFill>
+                        <a:srgbClr val="C8CDD3"/>
+                      </a:solidFill>
+                    </a:lnT>
+                    <a:lnR w="6350" cap="flat" cmpd="sng" algn="ctr">
+                      <a:solidFill>
+                        <a:srgbClr val="C8CDD3"/>
+                      </a:solidFill>
+                    </a:lnR>
+                    <a:lnL w="6350" cap="flat" cmpd="sng" algn="ctr">
+                      <a:solidFill>
+                        <a:srgbClr val="C8CDD3"/>
+                      </a:solidFill>
+                    </a:lnL>
+                    <a:solidFill>
+                      <a:srgbClr val="F4F6F8"/>
+                    </a:solidFill>
+                  </a:tcPr>
+                </a:tc>
+                <a:tc>
+                  <a:txBody>
+                    <a:bodyPr/>
+                    <a:lstStyle/>
+                    <a:p>
+                      <a:r>
+                        <a:rPr sz="800" b="0" i="0">
+                          <a:solidFill>
+                            <a:srgbClr val="1F2937"/>
+                          </a:solidFill>
+                          <a:latin typeface="Arial"/>
+                        </a:rPr>
+                        <a:t>approx. 95 m · 2 No. RRM</a:t>
+                      </a:r>
+                    </a:p>
+                  </a:txBody>
+                  <a:tcPr marL="91440" marR="91440" marT="45720" marB="45720">
+                    <a:lnB w="6350" cap="flat" cmpd="sng" algn="ctr">
+                      <a:solidFill>
+                        <a:srgbClr val="C8CDD3"/>
+                      </a:solidFill>
+                    </a:lnB>
+                    <a:lnT w="6350" cap="flat" cmpd="sng" algn="ctr">
+                      <a:solidFill>
+                        <a:srgbClr val="C8CDD3"/>
+                      </a:solidFill>
+                    </a:lnT>
+                    <a:lnR w="6350" cap="flat" cmpd="sng" algn="ctr">
+                      <a:solidFill>
+                        <a:srgbClr val="C8CDD3"/>
+                      </a:solidFill>
+                    </a:lnR>
+                    <a:lnL w="6350" cap="flat" cmpd="sng" algn="ctr">
+                      <a:solidFill>
+                        <a:srgbClr val="C8CDD3"/>
+                      </a:solidFill>
+                    </a:lnL>
+                    <a:solidFill>
+                      <a:srgbClr val="F4F6F8"/>
+                    </a:solidFill>
+                  </a:tcPr>
+                </a:tc>
+                <a:tc>
+                  <a:txBody>
+                    <a:bodyPr/>
+                    <a:lstStyle/>
+                    <a:p>
+                      <a:r>
+                        <a:rPr sz="800" b="0" i="0">
+                          <a:solidFill>
+                            <a:srgbClr val="1F2937"/>
+                          </a:solidFill>
+                          <a:latin typeface="Arial"/>
+                        </a:rPr>
+                        <a:t>Per the awaited detail</a:t>
+                      </a:r>
+                    </a:p>
+                  </a:txBody>
+                  <a:tcPr marL="91440" marR="91440" marT="45720" marB="45720">
+                    <a:lnB w="6350" cap="flat" cmpd="sng" algn="ctr">
+                      <a:solidFill>
+                        <a:srgbClr val="C8CDD3"/>
+                      </a:solidFill>
+                    </a:lnB>
+                    <a:lnT w="6350" cap="flat" cmpd="sng" algn="ctr">
+                      <a:solidFill>
+                        <a:srgbClr val="C8CDD3"/>
+                      </a:solidFill>
+                    </a:lnT>
+                    <a:lnR w="6350" cap="flat" cmpd="sng" algn="ctr">
+                      <a:solidFill>
+                        <a:srgbClr val="C8CDD3"/>
+                      </a:solidFill>
+                    </a:lnR>
+                    <a:lnL w="6350" cap="flat" cmpd="sng" algn="ctr">
+                      <a:solidFill>
+                        <a:srgbClr val="C8CDD3"/>
+                      </a:solidFill>
+                    </a:lnL>
+                    <a:solidFill>
+                      <a:srgbClr val="F4F6F8"/>
+                    </a:solidFill>
+                  </a:tcPr>
+                </a:tc>
+                <a:tc>
+                  <a:txBody>
+                    <a:bodyPr/>
+                    <a:lstStyle/>
+                    <a:p>
+                      <a:r>
+                        <a:rPr sz="800" b="0" i="0">
+                          <a:solidFill>
+                            <a:srgbClr val="1F2937"/>
+                          </a:solidFill>
+                          <a:latin typeface="Arial"/>
+                        </a:rPr>
+                        <a:t>LOC-03 sealed; RRMs re-fixed</a:t>
+                      </a:r>
+                    </a:p>
+                  </a:txBody>
+                  <a:tcPr marL="91440" marR="91440" marT="45720" marB="45720">
+                    <a:lnB w="6350" cap="flat" cmpd="sng" algn="ctr">
+                      <a:solidFill>
+                        <a:srgbClr val="C8CDD3"/>
+                      </a:solidFill>
+                    </a:lnB>
+                    <a:lnT w="6350" cap="flat" cmpd="sng" algn="ctr">
+                      <a:solidFill>
+                        <a:srgbClr val="C8CDD3"/>
+                      </a:solidFill>
+                    </a:lnT>
+                    <a:lnR w="6350" cap="flat" cmpd="sng" algn="ctr">
+                      <a:solidFill>
+                        <a:srgbClr val="C8CDD3"/>
+                      </a:solidFill>
+                    </a:lnR>
+                    <a:lnL w="6350" cap="flat" cmpd="sng" algn="ctr">
+                      <a:solidFill>
+                        <a:srgbClr val="C8CDD3"/>
+                      </a:solidFill>
+                    </a:lnL>
+                    <a:solidFill>
+                      <a:srgbClr val="F4F6F8"/>
+                    </a:solidFill>
+                  </a:tcPr>
+                </a:tc>
+              </a:tr>
+              <a:tr h="241442">
+                <a:tc>
+                  <a:txBody>
+                    <a:bodyPr/>
+                    <a:lstStyle/>
+                    <a:p>
+                      <a:r>
+                        <a:rPr sz="800" b="1" i="0">
+                          <a:solidFill>
+                            <a:srgbClr val="1F2937"/>
+                          </a:solidFill>
+                          <a:latin typeface="Arial"/>
+                        </a:rPr>
+                        <a:t>5</a:t>
                       </a:r>
                     </a:p>
                   </a:txBody>
@@ -55540,7 +57234,91 @@
                           </a:solidFill>
                           <a:latin typeface="Arial"/>
                         </a:rPr>
-                        <a:t>approx. 24 m / 95 m</a:t>
+                        <a:t>Saw cut, new base, cable, termination and testing</a:t>
+                      </a:r>
+                    </a:p>
+                  </a:txBody>
+                  <a:tcPr marL="91440" marR="91440" marT="45720" marB="45720">
+                    <a:lnB w="6350" cap="flat" cmpd="sng" algn="ctr">
+                      <a:solidFill>
+                        <a:srgbClr val="C8CDD3"/>
+                      </a:solidFill>
+                    </a:lnB>
+                    <a:lnT w="6350" cap="flat" cmpd="sng" algn="ctr">
+                      <a:solidFill>
+                        <a:srgbClr val="C8CDD3"/>
+                      </a:solidFill>
+                    </a:lnT>
+                    <a:lnR w="6350" cap="flat" cmpd="sng" algn="ctr">
+                      <a:solidFill>
+                        <a:srgbClr val="C8CDD3"/>
+                      </a:solidFill>
+                    </a:lnR>
+                    <a:lnL w="6350" cap="flat" cmpd="sng" algn="ctr">
+                      <a:solidFill>
+                        <a:srgbClr val="C8CDD3"/>
+                      </a:solidFill>
+                    </a:lnL>
+                    <a:solidFill>
+                      <a:srgbClr val="FFFFFF"/>
+                    </a:solidFill>
+                  </a:tcPr>
+                </a:tc>
+                <a:tc>
+                  <a:txBody>
+                    <a:bodyPr/>
+                    <a:lstStyle/>
+                    <a:p>
+                      <a:r>
+                        <a:rPr sz="800" b="0" i="0">
+                          <a:solidFill>
+                            <a:srgbClr val="1F2937"/>
+                          </a:solidFill>
+                          <a:latin typeface="Arial"/>
+                        </a:rPr>
+                        <a:t>LOC-02 · 1002</a:t>
+                      </a:r>
+                    </a:p>
+                  </a:txBody>
+                  <a:tcPr marL="91440" marR="91440" marT="45720" marB="45720">
+                    <a:lnB w="6350" cap="flat" cmpd="sng" algn="ctr">
+                      <a:solidFill>
+                        <a:srgbClr val="C8CDD3"/>
+                      </a:solidFill>
+                    </a:lnB>
+                    <a:lnT w="6350" cap="flat" cmpd="sng" algn="ctr">
+                      <a:solidFill>
+                        <a:srgbClr val="C8CDD3"/>
+                      </a:solidFill>
+                    </a:lnT>
+                    <a:lnR w="6350" cap="flat" cmpd="sng" algn="ctr">
+                      <a:solidFill>
+                        <a:srgbClr val="C8CDD3"/>
+                      </a:solidFill>
+                    </a:lnR>
+                    <a:lnL w="6350" cap="flat" cmpd="sng" algn="ctr">
+                      <a:solidFill>
+                        <a:srgbClr val="C8CDD3"/>
+                      </a:solidFill>
+                    </a:lnL>
+                    <a:solidFill>
+                      <a:srgbClr val="FFFFFF"/>
+                    </a:solidFill>
+                  </a:tcPr>
+                </a:tc>
+                <a:tc>
+                  <a:txBody>
+                    <a:bodyPr/>
+                    <a:lstStyle/>
+                    <a:p>
+                      <a:r>
+                        <a:rPr sz="800" b="0" i="0">
+                          <a:solidFill>
+                            <a:srgbClr val="1F2937"/>
+                          </a:solidFill>
+                          <a:latin typeface="Arial"/>
+                        </a:rPr>
+                        <a:t>approx. 24 m · 1 No. 12"</a:t>
                       </a:r>
                     </a:p>
                   </a:txBody>
@@ -55624,7 +57402,7 @@
                           </a:solidFill>
                           <a:latin typeface="Arial"/>
                         </a:rPr>
-                        <a:t>Both routes cut</a:t>
+                        <a:t>LOC-02 complete and tested</a:t>
                       </a:r>
                     </a:p>
                   </a:txBody>
@@ -55655,7 +57433,7 @@
                   </a:tcPr>
                 </a:tc>
               </a:tr>
-              <a:tr h="310413">
+              <a:tr h="241442">
                 <a:tc>
                   <a:txBody>
                     <a:bodyPr/>
@@ -55668,7 +57446,7 @@
                           </a:solidFill>
                           <a:latin typeface="Arial"/>
                         </a:rPr>
-                        <a:t>3</a:t>
+                        <a:t>5</a:t>
                       </a:r>
                     </a:p>
                   </a:txBody>
@@ -55710,7 +57488,7 @@
                           </a:solidFill>
                           <a:latin typeface="Arial"/>
                         </a:rPr>
-                        <a:t>Set the new side-entry shallow bases</a:t>
+                        <a:t>Reinstatement of the cut; re-fix RRM.555</a:t>
                       </a:r>
                     </a:p>
                   </a:txBody>
@@ -55752,7 +57530,7 @@
                           </a:solidFill>
                           <a:latin typeface="Arial"/>
                         </a:rPr>
-                        <a:t>LOC-02 / 03</a:t>
+                        <a:t>LOC-02 · 1002</a:t>
                       </a:r>
                     </a:p>
                   </a:txBody>
@@ -55794,7 +57572,261 @@
                           </a:solidFill>
                           <a:latin typeface="Arial"/>
                         </a:rPr>
-                        <a:t>1 No. 12" each</a:t>
+                        <a:t>approx. 24 m · 1 No. RRM</a:t>
+                      </a:r>
+                    </a:p>
+                  </a:txBody>
+                  <a:tcPr marL="91440" marR="91440" marT="45720" marB="45720">
+                    <a:lnB w="6350" cap="flat" cmpd="sng" algn="ctr">
+                      <a:solidFill>
+                        <a:srgbClr val="C8CDD3"/>
+                      </a:solidFill>
+                    </a:lnB>
+                    <a:lnT w="6350" cap="flat" cmpd="sng" algn="ctr">
+                      <a:solidFill>
+                        <a:srgbClr val="C8CDD3"/>
+                      </a:solidFill>
+                    </a:lnT>
+                    <a:lnR w="6350" cap="flat" cmpd="sng" algn="ctr">
+                      <a:solidFill>
+                        <a:srgbClr val="C8CDD3"/>
+                      </a:solidFill>
+                    </a:lnR>
+                    <a:lnL w="6350" cap="flat" cmpd="sng" algn="ctr">
+                      <a:solidFill>
+                        <a:srgbClr val="C8CDD3"/>
+                      </a:solidFill>
+                    </a:lnL>
+                    <a:solidFill>
+                      <a:srgbClr val="FFFFFF"/>
+                    </a:solidFill>
+                  </a:tcPr>
+                </a:tc>
+                <a:tc>
+                  <a:txBody>
+                    <a:bodyPr/>
+                    <a:lstStyle/>
+                    <a:p>
+                      <a:r>
+                        <a:rPr sz="800" b="0" i="0">
+                          <a:solidFill>
+                            <a:srgbClr val="1F2937"/>
+                          </a:solidFill>
+                          <a:latin typeface="Arial"/>
+                        </a:rPr>
+                        <a:t>Per the awaited detail</a:t>
+                      </a:r>
+                    </a:p>
+                  </a:txBody>
+                  <a:tcPr marL="91440" marR="91440" marT="45720" marB="45720">
+                    <a:lnB w="6350" cap="flat" cmpd="sng" algn="ctr">
+                      <a:solidFill>
+                        <a:srgbClr val="C8CDD3"/>
+                      </a:solidFill>
+                    </a:lnB>
+                    <a:lnT w="6350" cap="flat" cmpd="sng" algn="ctr">
+                      <a:solidFill>
+                        <a:srgbClr val="C8CDD3"/>
+                      </a:solidFill>
+                    </a:lnT>
+                    <a:lnR w="6350" cap="flat" cmpd="sng" algn="ctr">
+                      <a:solidFill>
+                        <a:srgbClr val="C8CDD3"/>
+                      </a:solidFill>
+                    </a:lnR>
+                    <a:lnL w="6350" cap="flat" cmpd="sng" algn="ctr">
+                      <a:solidFill>
+                        <a:srgbClr val="C8CDD3"/>
+                      </a:solidFill>
+                    </a:lnL>
+                    <a:solidFill>
+                      <a:srgbClr val="FFFFFF"/>
+                    </a:solidFill>
+                  </a:tcPr>
+                </a:tc>
+                <a:tc>
+                  <a:txBody>
+                    <a:bodyPr/>
+                    <a:lstStyle/>
+                    <a:p>
+                      <a:r>
+                        <a:rPr sz="800" b="0" i="0">
+                          <a:solidFill>
+                            <a:srgbClr val="1F2937"/>
+                          </a:solidFill>
+                          <a:latin typeface="Arial"/>
+                        </a:rPr>
+                        <a:t>LOC-02 sealed; RRM re-fixed</a:t>
+                      </a:r>
+                    </a:p>
+                  </a:txBody>
+                  <a:tcPr marL="91440" marR="91440" marT="45720" marB="45720">
+                    <a:lnB w="6350" cap="flat" cmpd="sng" algn="ctr">
+                      <a:solidFill>
+                        <a:srgbClr val="C8CDD3"/>
+                      </a:solidFill>
+                    </a:lnB>
+                    <a:lnT w="6350" cap="flat" cmpd="sng" algn="ctr">
+                      <a:solidFill>
+                        <a:srgbClr val="C8CDD3"/>
+                      </a:solidFill>
+                    </a:lnT>
+                    <a:lnR w="6350" cap="flat" cmpd="sng" algn="ctr">
+                      <a:solidFill>
+                        <a:srgbClr val="C8CDD3"/>
+                      </a:solidFill>
+                    </a:lnR>
+                    <a:lnL w="6350" cap="flat" cmpd="sng" algn="ctr">
+                      <a:solidFill>
+                        <a:srgbClr val="C8CDD3"/>
+                      </a:solidFill>
+                    </a:lnL>
+                    <a:solidFill>
+                      <a:srgbClr val="FFFFFF"/>
+                    </a:solidFill>
+                  </a:tcPr>
+                </a:tc>
+              </a:tr>
+              <a:tr h="241442">
+                <a:tc>
+                  <a:txBody>
+                    <a:bodyPr/>
+                    <a:lstStyle/>
+                    <a:p>
+                      <a:r>
+                        <a:rPr sz="800" b="1" i="0">
+                          <a:solidFill>
+                            <a:srgbClr val="1F2937"/>
+                          </a:solidFill>
+                          <a:latin typeface="Arial"/>
+                        </a:rPr>
+                        <a:t>5</a:t>
+                      </a:r>
+                    </a:p>
+                  </a:txBody>
+                  <a:tcPr marL="91440" marR="91440" marT="45720" marB="45720">
+                    <a:lnB w="6350" cap="flat" cmpd="sng" algn="ctr">
+                      <a:solidFill>
+                        <a:srgbClr val="C8CDD3"/>
+                      </a:solidFill>
+                    </a:lnB>
+                    <a:lnT w="6350" cap="flat" cmpd="sng" algn="ctr">
+                      <a:solidFill>
+                        <a:srgbClr val="C8CDD3"/>
+                      </a:solidFill>
+                    </a:lnT>
+                    <a:lnR w="6350" cap="flat" cmpd="sng" algn="ctr">
+                      <a:solidFill>
+                        <a:srgbClr val="C8CDD3"/>
+                      </a:solidFill>
+                    </a:lnR>
+                    <a:lnL w="6350" cap="flat" cmpd="sng" algn="ctr">
+                      <a:solidFill>
+                        <a:srgbClr val="C8CDD3"/>
+                      </a:solidFill>
+                    </a:lnL>
+                    <a:solidFill>
+                      <a:srgbClr val="FFFFFF"/>
+                    </a:solidFill>
+                  </a:tcPr>
+                </a:tc>
+                <a:tc>
+                  <a:txBody>
+                    <a:bodyPr/>
+                    <a:lstStyle/>
+                    <a:p>
+                      <a:r>
+                        <a:rPr sz="800" b="0" i="0">
+                          <a:solidFill>
+                            <a:srgbClr val="1F2937"/>
+                          </a:solidFill>
+                          <a:latin typeface="Arial"/>
+                        </a:rPr>
+                        <a:t>Testing and commissioning of the affected circuits — all three locations</a:t>
+                      </a:r>
+                    </a:p>
+                  </a:txBody>
+                  <a:tcPr marL="91440" marR="91440" marT="45720" marB="45720">
+                    <a:lnB w="6350" cap="flat" cmpd="sng" algn="ctr">
+                      <a:solidFill>
+                        <a:srgbClr val="C8CDD3"/>
+                      </a:solidFill>
+                    </a:lnB>
+                    <a:lnT w="6350" cap="flat" cmpd="sng" algn="ctr">
+                      <a:solidFill>
+                        <a:srgbClr val="C8CDD3"/>
+                      </a:solidFill>
+                    </a:lnT>
+                    <a:lnR w="6350" cap="flat" cmpd="sng" algn="ctr">
+                      <a:solidFill>
+                        <a:srgbClr val="C8CDD3"/>
+                      </a:solidFill>
+                    </a:lnR>
+                    <a:lnL w="6350" cap="flat" cmpd="sng" algn="ctr">
+                      <a:solidFill>
+                        <a:srgbClr val="C8CDD3"/>
+                      </a:solidFill>
+                    </a:lnL>
+                    <a:solidFill>
+                      <a:srgbClr val="FFFFFF"/>
+                    </a:solidFill>
+                  </a:tcPr>
+                </a:tc>
+                <a:tc>
+                  <a:txBody>
+                    <a:bodyPr/>
+                    <a:lstStyle/>
+                    <a:p>
+                      <a:r>
+                        <a:rPr sz="800" b="0" i="0">
+                          <a:solidFill>
+                            <a:srgbClr val="1F2937"/>
+                          </a:solidFill>
+                          <a:latin typeface="Arial"/>
+                        </a:rPr>
+                        <a:t>LOC-01 / 02 / 03</a:t>
+                      </a:r>
+                    </a:p>
+                  </a:txBody>
+                  <a:tcPr marL="91440" marR="91440" marT="45720" marB="45720">
+                    <a:lnB w="6350" cap="flat" cmpd="sng" algn="ctr">
+                      <a:solidFill>
+                        <a:srgbClr val="C8CDD3"/>
+                      </a:solidFill>
+                    </a:lnB>
+                    <a:lnT w="6350" cap="flat" cmpd="sng" algn="ctr">
+                      <a:solidFill>
+                        <a:srgbClr val="C8CDD3"/>
+                      </a:solidFill>
+                    </a:lnT>
+                    <a:lnR w="6350" cap="flat" cmpd="sng" algn="ctr">
+                      <a:solidFill>
+                        <a:srgbClr val="C8CDD3"/>
+                      </a:solidFill>
+                    </a:lnR>
+                    <a:lnL w="6350" cap="flat" cmpd="sng" algn="ctr">
+                      <a:solidFill>
+                        <a:srgbClr val="C8CDD3"/>
+                      </a:solidFill>
+                    </a:lnL>
+                    <a:solidFill>
+                      <a:srgbClr val="FFFFFF"/>
+                    </a:solidFill>
+                  </a:tcPr>
+                </a:tc>
+                <a:tc>
+                  <a:txBody>
+                    <a:bodyPr/>
+                    <a:lstStyle/>
+                    <a:p>
+                      <a:r>
+                        <a:rPr sz="800" b="0" i="0">
+                          <a:solidFill>
+                            <a:srgbClr val="1F2937"/>
+                          </a:solidFill>
+                          <a:latin typeface="Arial"/>
+                        </a:rPr>
+                        <a:t>4 No. circuits</a:t>
                       </a:r>
                     </a:p>
                   </a:txBody>
@@ -55878,7 +57910,7 @@
                           </a:solidFill>
                           <a:latin typeface="Arial"/>
                         </a:rPr>
-                        <a:t>2 No. bases set and levelled</a:t>
+                        <a:t>Circuits energised and proved</a:t>
                       </a:r>
                     </a:p>
                   </a:txBody>
@@ -55909,7 +57941,7 @@
                   </a:tcPr>
                 </a:tc>
               </a:tr>
-              <a:tr h="310413">
+              <a:tr h="241442">
                 <a:tc>
                   <a:txBody>
                     <a:bodyPr/>
@@ -55922,7 +57954,7 @@
                           </a:solidFill>
                           <a:latin typeface="Arial"/>
                         </a:rPr>
-                        <a:t>3</a:t>
+                        <a:t>5</a:t>
                       </a:r>
                     </a:p>
                   </a:txBody>
@@ -55964,1023 +57996,7 @@
                           </a:solidFill>
                           <a:latin typeface="Arial"/>
                         </a:rPr>
-                        <a:t>Lay new secondary cable through the saw cut — no joints, manhole to light</a:t>
-                      </a:r>
-                    </a:p>
-                  </a:txBody>
-                  <a:tcPr marL="91440" marR="91440" marT="45720" marB="45720">
-                    <a:lnB w="6350" cap="flat" cmpd="sng" algn="ctr">
-                      <a:solidFill>
-                        <a:srgbClr val="C8CDD3"/>
-                      </a:solidFill>
-                    </a:lnB>
-                    <a:lnT w="6350" cap="flat" cmpd="sng" algn="ctr">
-                      <a:solidFill>
-                        <a:srgbClr val="C8CDD3"/>
-                      </a:solidFill>
-                    </a:lnT>
-                    <a:lnR w="6350" cap="flat" cmpd="sng" algn="ctr">
-                      <a:solidFill>
-                        <a:srgbClr val="C8CDD3"/>
-                      </a:solidFill>
-                    </a:lnR>
-                    <a:lnL w="6350" cap="flat" cmpd="sng" algn="ctr">
-                      <a:solidFill>
-                        <a:srgbClr val="C8CDD3"/>
-                      </a:solidFill>
-                    </a:lnL>
-                    <a:solidFill>
-                      <a:srgbClr val="FFFFFF"/>
-                    </a:solidFill>
-                  </a:tcPr>
-                </a:tc>
-                <a:tc>
-                  <a:txBody>
-                    <a:bodyPr/>
-                    <a:lstStyle/>
-                    <a:p>
-                      <a:r>
-                        <a:rPr sz="800" b="0" i="0">
-                          <a:solidFill>
-                            <a:srgbClr val="1F2937"/>
-                          </a:solidFill>
-                          <a:latin typeface="Arial"/>
-                        </a:rPr>
-                        <a:t>LOC-01</a:t>
-                      </a:r>
-                    </a:p>
-                  </a:txBody>
-                  <a:tcPr marL="91440" marR="91440" marT="45720" marB="45720">
-                    <a:lnB w="6350" cap="flat" cmpd="sng" algn="ctr">
-                      <a:solidFill>
-                        <a:srgbClr val="C8CDD3"/>
-                      </a:solidFill>
-                    </a:lnB>
-                    <a:lnT w="6350" cap="flat" cmpd="sng" algn="ctr">
-                      <a:solidFill>
-                        <a:srgbClr val="C8CDD3"/>
-                      </a:solidFill>
-                    </a:lnT>
-                    <a:lnR w="6350" cap="flat" cmpd="sng" algn="ctr">
-                      <a:solidFill>
-                        <a:srgbClr val="C8CDD3"/>
-                      </a:solidFill>
-                    </a:lnR>
-                    <a:lnL w="6350" cap="flat" cmpd="sng" algn="ctr">
-                      <a:solidFill>
-                        <a:srgbClr val="C8CDD3"/>
-                      </a:solidFill>
-                    </a:lnL>
-                    <a:solidFill>
-                      <a:srgbClr val="FFFFFF"/>
-                    </a:solidFill>
-                  </a:tcPr>
-                </a:tc>
-                <a:tc>
-                  <a:txBody>
-                    <a:bodyPr/>
-                    <a:lstStyle/>
-                    <a:p>
-                      <a:r>
-                        <a:rPr sz="800" b="0" i="0">
-                          <a:solidFill>
-                            <a:srgbClr val="1F2937"/>
-                          </a:solidFill>
-                          <a:latin typeface="Arial"/>
-                        </a:rPr>
-                        <a:t>11 No. runs</a:t>
-                      </a:r>
-                    </a:p>
-                  </a:txBody>
-                  <a:tcPr marL="91440" marR="91440" marT="45720" marB="45720">
-                    <a:lnB w="6350" cap="flat" cmpd="sng" algn="ctr">
-                      <a:solidFill>
-                        <a:srgbClr val="C8CDD3"/>
-                      </a:solidFill>
-                    </a:lnB>
-                    <a:lnT w="6350" cap="flat" cmpd="sng" algn="ctr">
-                      <a:solidFill>
-                        <a:srgbClr val="C8CDD3"/>
-                      </a:solidFill>
-                    </a:lnT>
-                    <a:lnR w="6350" cap="flat" cmpd="sng" algn="ctr">
-                      <a:solidFill>
-                        <a:srgbClr val="C8CDD3"/>
-                      </a:solidFill>
-                    </a:lnR>
-                    <a:lnL w="6350" cap="flat" cmpd="sng" algn="ctr">
-                      <a:solidFill>
-                        <a:srgbClr val="C8CDD3"/>
-                      </a:solidFill>
-                    </a:lnL>
-                    <a:solidFill>
-                      <a:srgbClr val="FFFFFF"/>
-                    </a:solidFill>
-                  </a:tcPr>
-                </a:tc>
-                <a:tc>
-                  <a:txBody>
-                    <a:bodyPr/>
-                    <a:lstStyle/>
-                    <a:p>
-                      <a:r>
-                        <a:rPr sz="800" b="0" i="0">
-                          <a:solidFill>
-                            <a:srgbClr val="1F2937"/>
-                          </a:solidFill>
-                          <a:latin typeface="Arial"/>
-                        </a:rPr>
-                        <a:t>—</a:t>
-                      </a:r>
-                    </a:p>
-                  </a:txBody>
-                  <a:tcPr marL="91440" marR="91440" marT="45720" marB="45720">
-                    <a:lnB w="6350" cap="flat" cmpd="sng" algn="ctr">
-                      <a:solidFill>
-                        <a:srgbClr val="C8CDD3"/>
-                      </a:solidFill>
-                    </a:lnB>
-                    <a:lnT w="6350" cap="flat" cmpd="sng" algn="ctr">
-                      <a:solidFill>
-                        <a:srgbClr val="C8CDD3"/>
-                      </a:solidFill>
-                    </a:lnT>
-                    <a:lnR w="6350" cap="flat" cmpd="sng" algn="ctr">
-                      <a:solidFill>
-                        <a:srgbClr val="C8CDD3"/>
-                      </a:solidFill>
-                    </a:lnR>
-                    <a:lnL w="6350" cap="flat" cmpd="sng" algn="ctr">
-                      <a:solidFill>
-                        <a:srgbClr val="C8CDD3"/>
-                      </a:solidFill>
-                    </a:lnL>
-                    <a:solidFill>
-                      <a:srgbClr val="FFFFFF"/>
-                    </a:solidFill>
-                  </a:tcPr>
-                </a:tc>
-                <a:tc>
-                  <a:txBody>
-                    <a:bodyPr/>
-                    <a:lstStyle/>
-                    <a:p>
-                      <a:r>
-                        <a:rPr sz="800" b="0" i="0">
-                          <a:solidFill>
-                            <a:srgbClr val="1F2937"/>
-                          </a:solidFill>
-                          <a:latin typeface="Arial"/>
-                        </a:rPr>
-                        <a:t>LOC-01 cable in and protected</a:t>
-                      </a:r>
-                    </a:p>
-                  </a:txBody>
-                  <a:tcPr marL="91440" marR="91440" marT="45720" marB="45720">
-                    <a:lnB w="6350" cap="flat" cmpd="sng" algn="ctr">
-                      <a:solidFill>
-                        <a:srgbClr val="C8CDD3"/>
-                      </a:solidFill>
-                    </a:lnB>
-                    <a:lnT w="6350" cap="flat" cmpd="sng" algn="ctr">
-                      <a:solidFill>
-                        <a:srgbClr val="C8CDD3"/>
-                      </a:solidFill>
-                    </a:lnT>
-                    <a:lnR w="6350" cap="flat" cmpd="sng" algn="ctr">
-                      <a:solidFill>
-                        <a:srgbClr val="C8CDD3"/>
-                      </a:solidFill>
-                    </a:lnR>
-                    <a:lnL w="6350" cap="flat" cmpd="sng" algn="ctr">
-                      <a:solidFill>
-                        <a:srgbClr val="C8CDD3"/>
-                      </a:solidFill>
-                    </a:lnL>
-                    <a:solidFill>
-                      <a:srgbClr val="FFFFFF"/>
-                    </a:solidFill>
-                  </a:tcPr>
-                </a:tc>
-              </a:tr>
-              <a:tr h="310413">
-                <a:tc>
-                  <a:txBody>
-                    <a:bodyPr/>
-                    <a:lstStyle/>
-                    <a:p>
-                      <a:r>
-                        <a:rPr sz="800" b="1" i="0">
-                          <a:solidFill>
-                            <a:srgbClr val="1F2937"/>
-                          </a:solidFill>
-                          <a:latin typeface="Arial"/>
-                        </a:rPr>
-                        <a:t>4</a:t>
-                      </a:r>
-                    </a:p>
-                  </a:txBody>
-                  <a:tcPr marL="91440" marR="91440" marT="45720" marB="45720">
-                    <a:lnB w="6350" cap="flat" cmpd="sng" algn="ctr">
-                      <a:solidFill>
-                        <a:srgbClr val="C8CDD3"/>
-                      </a:solidFill>
-                    </a:lnB>
-                    <a:lnT w="6350" cap="flat" cmpd="sng" algn="ctr">
-                      <a:solidFill>
-                        <a:srgbClr val="C8CDD3"/>
-                      </a:solidFill>
-                    </a:lnT>
-                    <a:lnR w="6350" cap="flat" cmpd="sng" algn="ctr">
-                      <a:solidFill>
-                        <a:srgbClr val="C8CDD3"/>
-                      </a:solidFill>
-                    </a:lnR>
-                    <a:lnL w="6350" cap="flat" cmpd="sng" algn="ctr">
-                      <a:solidFill>
-                        <a:srgbClr val="C8CDD3"/>
-                      </a:solidFill>
-                    </a:lnL>
-                    <a:solidFill>
-                      <a:srgbClr val="F4F6F8"/>
-                    </a:solidFill>
-                  </a:tcPr>
-                </a:tc>
-                <a:tc>
-                  <a:txBody>
-                    <a:bodyPr/>
-                    <a:lstStyle/>
-                    <a:p>
-                      <a:r>
-                        <a:rPr sz="800" b="0" i="0">
-                          <a:solidFill>
-                            <a:srgbClr val="1F2937"/>
-                          </a:solidFill>
-                          <a:latin typeface="Arial"/>
-                        </a:rPr>
-                        <a:t>Lay new secondary cable through the saw cut</a:t>
-                      </a:r>
-                    </a:p>
-                  </a:txBody>
-                  <a:tcPr marL="91440" marR="91440" marT="45720" marB="45720">
-                    <a:lnB w="6350" cap="flat" cmpd="sng" algn="ctr">
-                      <a:solidFill>
-                        <a:srgbClr val="C8CDD3"/>
-                      </a:solidFill>
-                    </a:lnB>
-                    <a:lnT w="6350" cap="flat" cmpd="sng" algn="ctr">
-                      <a:solidFill>
-                        <a:srgbClr val="C8CDD3"/>
-                      </a:solidFill>
-                    </a:lnT>
-                    <a:lnR w="6350" cap="flat" cmpd="sng" algn="ctr">
-                      <a:solidFill>
-                        <a:srgbClr val="C8CDD3"/>
-                      </a:solidFill>
-                    </a:lnR>
-                    <a:lnL w="6350" cap="flat" cmpd="sng" algn="ctr">
-                      <a:solidFill>
-                        <a:srgbClr val="C8CDD3"/>
-                      </a:solidFill>
-                    </a:lnL>
-                    <a:solidFill>
-                      <a:srgbClr val="F4F6F8"/>
-                    </a:solidFill>
-                  </a:tcPr>
-                </a:tc>
-                <a:tc>
-                  <a:txBody>
-                    <a:bodyPr/>
-                    <a:lstStyle/>
-                    <a:p>
-                      <a:r>
-                        <a:rPr sz="800" b="0" i="0">
-                          <a:solidFill>
-                            <a:srgbClr val="1F2937"/>
-                          </a:solidFill>
-                          <a:latin typeface="Arial"/>
-                        </a:rPr>
-                        <a:t>LOC-02 / 03</a:t>
-                      </a:r>
-                    </a:p>
-                  </a:txBody>
-                  <a:tcPr marL="91440" marR="91440" marT="45720" marB="45720">
-                    <a:lnB w="6350" cap="flat" cmpd="sng" algn="ctr">
-                      <a:solidFill>
-                        <a:srgbClr val="C8CDD3"/>
-                      </a:solidFill>
-                    </a:lnB>
-                    <a:lnT w="6350" cap="flat" cmpd="sng" algn="ctr">
-                      <a:solidFill>
-                        <a:srgbClr val="C8CDD3"/>
-                      </a:solidFill>
-                    </a:lnT>
-                    <a:lnR w="6350" cap="flat" cmpd="sng" algn="ctr">
-                      <a:solidFill>
-                        <a:srgbClr val="C8CDD3"/>
-                      </a:solidFill>
-                    </a:lnR>
-                    <a:lnL w="6350" cap="flat" cmpd="sng" algn="ctr">
-                      <a:solidFill>
-                        <a:srgbClr val="C8CDD3"/>
-                      </a:solidFill>
-                    </a:lnL>
-                    <a:solidFill>
-                      <a:srgbClr val="F4F6F8"/>
-                    </a:solidFill>
-                  </a:tcPr>
-                </a:tc>
-                <a:tc>
-                  <a:txBody>
-                    <a:bodyPr/>
-                    <a:lstStyle/>
-                    <a:p>
-                      <a:r>
-                        <a:rPr sz="800" b="0" i="0">
-                          <a:solidFill>
-                            <a:srgbClr val="1F2937"/>
-                          </a:solidFill>
-                          <a:latin typeface="Arial"/>
-                        </a:rPr>
-                        <a:t>5 No. runs</a:t>
-                      </a:r>
-                    </a:p>
-                  </a:txBody>
-                  <a:tcPr marL="91440" marR="91440" marT="45720" marB="45720">
-                    <a:lnB w="6350" cap="flat" cmpd="sng" algn="ctr">
-                      <a:solidFill>
-                        <a:srgbClr val="C8CDD3"/>
-                      </a:solidFill>
-                    </a:lnB>
-                    <a:lnT w="6350" cap="flat" cmpd="sng" algn="ctr">
-                      <a:solidFill>
-                        <a:srgbClr val="C8CDD3"/>
-                      </a:solidFill>
-                    </a:lnT>
-                    <a:lnR w="6350" cap="flat" cmpd="sng" algn="ctr">
-                      <a:solidFill>
-                        <a:srgbClr val="C8CDD3"/>
-                      </a:solidFill>
-                    </a:lnR>
-                    <a:lnL w="6350" cap="flat" cmpd="sng" algn="ctr">
-                      <a:solidFill>
-                        <a:srgbClr val="C8CDD3"/>
-                      </a:solidFill>
-                    </a:lnL>
-                    <a:solidFill>
-                      <a:srgbClr val="F4F6F8"/>
-                    </a:solidFill>
-                  </a:tcPr>
-                </a:tc>
-                <a:tc>
-                  <a:txBody>
-                    <a:bodyPr/>
-                    <a:lstStyle/>
-                    <a:p>
-                      <a:r>
-                        <a:rPr sz="800" b="0" i="0">
-                          <a:solidFill>
-                            <a:srgbClr val="1F2937"/>
-                          </a:solidFill>
-                          <a:latin typeface="Arial"/>
-                        </a:rPr>
-                        <a:t>—</a:t>
-                      </a:r>
-                    </a:p>
-                  </a:txBody>
-                  <a:tcPr marL="91440" marR="91440" marT="45720" marB="45720">
-                    <a:lnB w="6350" cap="flat" cmpd="sng" algn="ctr">
-                      <a:solidFill>
-                        <a:srgbClr val="C8CDD3"/>
-                      </a:solidFill>
-                    </a:lnB>
-                    <a:lnT w="6350" cap="flat" cmpd="sng" algn="ctr">
-                      <a:solidFill>
-                        <a:srgbClr val="C8CDD3"/>
-                      </a:solidFill>
-                    </a:lnT>
-                    <a:lnR w="6350" cap="flat" cmpd="sng" algn="ctr">
-                      <a:solidFill>
-                        <a:srgbClr val="C8CDD3"/>
-                      </a:solidFill>
-                    </a:lnR>
-                    <a:lnL w="6350" cap="flat" cmpd="sng" algn="ctr">
-                      <a:solidFill>
-                        <a:srgbClr val="C8CDD3"/>
-                      </a:solidFill>
-                    </a:lnL>
-                    <a:solidFill>
-                      <a:srgbClr val="F4F6F8"/>
-                    </a:solidFill>
-                  </a:tcPr>
-                </a:tc>
-                <a:tc>
-                  <a:txBody>
-                    <a:bodyPr/>
-                    <a:lstStyle/>
-                    <a:p>
-                      <a:r>
-                        <a:rPr sz="800" b="0" i="0">
-                          <a:solidFill>
-                            <a:srgbClr val="1F2937"/>
-                          </a:solidFill>
-                          <a:latin typeface="Arial"/>
-                        </a:rPr>
-                        <a:t>All 16 No. runs cabled</a:t>
-                      </a:r>
-                    </a:p>
-                  </a:txBody>
-                  <a:tcPr marL="91440" marR="91440" marT="45720" marB="45720">
-                    <a:lnB w="6350" cap="flat" cmpd="sng" algn="ctr">
-                      <a:solidFill>
-                        <a:srgbClr val="C8CDD3"/>
-                      </a:solidFill>
-                    </a:lnB>
-                    <a:lnT w="6350" cap="flat" cmpd="sng" algn="ctr">
-                      <a:solidFill>
-                        <a:srgbClr val="C8CDD3"/>
-                      </a:solidFill>
-                    </a:lnT>
-                    <a:lnR w="6350" cap="flat" cmpd="sng" algn="ctr">
-                      <a:solidFill>
-                        <a:srgbClr val="C8CDD3"/>
-                      </a:solidFill>
-                    </a:lnR>
-                    <a:lnL w="6350" cap="flat" cmpd="sng" algn="ctr">
-                      <a:solidFill>
-                        <a:srgbClr val="C8CDD3"/>
-                      </a:solidFill>
-                    </a:lnL>
-                    <a:solidFill>
-                      <a:srgbClr val="F4F6F8"/>
-                    </a:solidFill>
-                  </a:tcPr>
-                </a:tc>
-              </a:tr>
-              <a:tr h="310413">
-                <a:tc>
-                  <a:txBody>
-                    <a:bodyPr/>
-                    <a:lstStyle/>
-                    <a:p>
-                      <a:r>
-                        <a:rPr sz="800" b="1" i="0">
-                          <a:solidFill>
-                            <a:srgbClr val="1F2937"/>
-                          </a:solidFill>
-                          <a:latin typeface="Arial"/>
-                        </a:rPr>
-                        <a:t>4</a:t>
-                      </a:r>
-                    </a:p>
-                  </a:txBody>
-                  <a:tcPr marL="91440" marR="91440" marT="45720" marB="45720">
-                    <a:lnB w="6350" cap="flat" cmpd="sng" algn="ctr">
-                      <a:solidFill>
-                        <a:srgbClr val="C8CDD3"/>
-                      </a:solidFill>
-                    </a:lnB>
-                    <a:lnT w="6350" cap="flat" cmpd="sng" algn="ctr">
-                      <a:solidFill>
-                        <a:srgbClr val="C8CDD3"/>
-                      </a:solidFill>
-                    </a:lnT>
-                    <a:lnR w="6350" cap="flat" cmpd="sng" algn="ctr">
-                      <a:solidFill>
-                        <a:srgbClr val="C8CDD3"/>
-                      </a:solidFill>
-                    </a:lnR>
-                    <a:lnL w="6350" cap="flat" cmpd="sng" algn="ctr">
-                      <a:solidFill>
-                        <a:srgbClr val="C8CDD3"/>
-                      </a:solidFill>
-                    </a:lnL>
-                    <a:solidFill>
-                      <a:srgbClr val="F4F6F8"/>
-                    </a:solidFill>
-                  </a:tcPr>
-                </a:tc>
-                <a:tc>
-                  <a:txBody>
-                    <a:bodyPr/>
-                    <a:lstStyle/>
-                    <a:p>
-                      <a:r>
-                        <a:rPr sz="800" b="0" i="0">
-                          <a:solidFill>
-                            <a:srgbClr val="1F2937"/>
-                          </a:solidFill>
-                          <a:latin typeface="Arial"/>
-                        </a:rPr>
-                        <a:t>Cable termination at the bases and at the manholes</a:t>
-                      </a:r>
-                    </a:p>
-                  </a:txBody>
-                  <a:tcPr marL="91440" marR="91440" marT="45720" marB="45720">
-                    <a:lnB w="6350" cap="flat" cmpd="sng" algn="ctr">
-                      <a:solidFill>
-                        <a:srgbClr val="C8CDD3"/>
-                      </a:solidFill>
-                    </a:lnB>
-                    <a:lnT w="6350" cap="flat" cmpd="sng" algn="ctr">
-                      <a:solidFill>
-                        <a:srgbClr val="C8CDD3"/>
-                      </a:solidFill>
-                    </a:lnT>
-                    <a:lnR w="6350" cap="flat" cmpd="sng" algn="ctr">
-                      <a:solidFill>
-                        <a:srgbClr val="C8CDD3"/>
-                      </a:solidFill>
-                    </a:lnR>
-                    <a:lnL w="6350" cap="flat" cmpd="sng" algn="ctr">
-                      <a:solidFill>
-                        <a:srgbClr val="C8CDD3"/>
-                      </a:solidFill>
-                    </a:lnL>
-                    <a:solidFill>
-                      <a:srgbClr val="F4F6F8"/>
-                    </a:solidFill>
-                  </a:tcPr>
-                </a:tc>
-                <a:tc>
-                  <a:txBody>
-                    <a:bodyPr/>
-                    <a:lstStyle/>
-                    <a:p>
-                      <a:r>
-                        <a:rPr sz="800" b="0" i="0">
-                          <a:solidFill>
-                            <a:srgbClr val="1F2937"/>
-                          </a:solidFill>
-                          <a:latin typeface="Arial"/>
-                        </a:rPr>
-                        <a:t>LOC-01 / 02 / 03</a:t>
-                      </a:r>
-                    </a:p>
-                  </a:txBody>
-                  <a:tcPr marL="91440" marR="91440" marT="45720" marB="45720">
-                    <a:lnB w="6350" cap="flat" cmpd="sng" algn="ctr">
-                      <a:solidFill>
-                        <a:srgbClr val="C8CDD3"/>
-                      </a:solidFill>
-                    </a:lnB>
-                    <a:lnT w="6350" cap="flat" cmpd="sng" algn="ctr">
-                      <a:solidFill>
-                        <a:srgbClr val="C8CDD3"/>
-                      </a:solidFill>
-                    </a:lnT>
-                    <a:lnR w="6350" cap="flat" cmpd="sng" algn="ctr">
-                      <a:solidFill>
-                        <a:srgbClr val="C8CDD3"/>
-                      </a:solidFill>
-                    </a:lnR>
-                    <a:lnL w="6350" cap="flat" cmpd="sng" algn="ctr">
-                      <a:solidFill>
-                        <a:srgbClr val="C8CDD3"/>
-                      </a:solidFill>
-                    </a:lnL>
-                    <a:solidFill>
-                      <a:srgbClr val="F4F6F8"/>
-                    </a:solidFill>
-                  </a:tcPr>
-                </a:tc>
-                <a:tc>
-                  <a:txBody>
-                    <a:bodyPr/>
-                    <a:lstStyle/>
-                    <a:p>
-                      <a:r>
-                        <a:rPr sz="800" b="0" i="0">
-                          <a:solidFill>
-                            <a:srgbClr val="1F2937"/>
-                          </a:solidFill>
-                          <a:latin typeface="Arial"/>
-                        </a:rPr>
-                        <a:t>16 No. fittings</a:t>
-                      </a:r>
-                    </a:p>
-                  </a:txBody>
-                  <a:tcPr marL="91440" marR="91440" marT="45720" marB="45720">
-                    <a:lnB w="6350" cap="flat" cmpd="sng" algn="ctr">
-                      <a:solidFill>
-                        <a:srgbClr val="C8CDD3"/>
-                      </a:solidFill>
-                    </a:lnB>
-                    <a:lnT w="6350" cap="flat" cmpd="sng" algn="ctr">
-                      <a:solidFill>
-                        <a:srgbClr val="C8CDD3"/>
-                      </a:solidFill>
-                    </a:lnT>
-                    <a:lnR w="6350" cap="flat" cmpd="sng" algn="ctr">
-                      <a:solidFill>
-                        <a:srgbClr val="C8CDD3"/>
-                      </a:solidFill>
-                    </a:lnR>
-                    <a:lnL w="6350" cap="flat" cmpd="sng" algn="ctr">
-                      <a:solidFill>
-                        <a:srgbClr val="C8CDD3"/>
-                      </a:solidFill>
-                    </a:lnL>
-                    <a:solidFill>
-                      <a:srgbClr val="F4F6F8"/>
-                    </a:solidFill>
-                  </a:tcPr>
-                </a:tc>
-                <a:tc>
-                  <a:txBody>
-                    <a:bodyPr/>
-                    <a:lstStyle/>
-                    <a:p>
-                      <a:r>
-                        <a:rPr sz="800" b="0" i="0">
-                          <a:solidFill>
-                            <a:srgbClr val="1F2937"/>
-                          </a:solidFill>
-                          <a:latin typeface="Arial"/>
-                        </a:rPr>
-                        <a:t>—</a:t>
-                      </a:r>
-                    </a:p>
-                  </a:txBody>
-                  <a:tcPr marL="91440" marR="91440" marT="45720" marB="45720">
-                    <a:lnB w="6350" cap="flat" cmpd="sng" algn="ctr">
-                      <a:solidFill>
-                        <a:srgbClr val="C8CDD3"/>
-                      </a:solidFill>
-                    </a:lnB>
-                    <a:lnT w="6350" cap="flat" cmpd="sng" algn="ctr">
-                      <a:solidFill>
-                        <a:srgbClr val="C8CDD3"/>
-                      </a:solidFill>
-                    </a:lnT>
-                    <a:lnR w="6350" cap="flat" cmpd="sng" algn="ctr">
-                      <a:solidFill>
-                        <a:srgbClr val="C8CDD3"/>
-                      </a:solidFill>
-                    </a:lnR>
-                    <a:lnL w="6350" cap="flat" cmpd="sng" algn="ctr">
-                      <a:solidFill>
-                        <a:srgbClr val="C8CDD3"/>
-                      </a:solidFill>
-                    </a:lnL>
-                    <a:solidFill>
-                      <a:srgbClr val="F4F6F8"/>
-                    </a:solidFill>
-                  </a:tcPr>
-                </a:tc>
-                <a:tc>
-                  <a:txBody>
-                    <a:bodyPr/>
-                    <a:lstStyle/>
-                    <a:p>
-                      <a:r>
-                        <a:rPr sz="800" b="0" i="0">
-                          <a:solidFill>
-                            <a:srgbClr val="1F2937"/>
-                          </a:solidFill>
-                          <a:latin typeface="Arial"/>
-                        </a:rPr>
-                        <a:t>Terminations made off</a:t>
-                      </a:r>
-                    </a:p>
-                  </a:txBody>
-                  <a:tcPr marL="91440" marR="91440" marT="45720" marB="45720">
-                    <a:lnB w="6350" cap="flat" cmpd="sng" algn="ctr">
-                      <a:solidFill>
-                        <a:srgbClr val="C8CDD3"/>
-                      </a:solidFill>
-                    </a:lnB>
-                    <a:lnT w="6350" cap="flat" cmpd="sng" algn="ctr">
-                      <a:solidFill>
-                        <a:srgbClr val="C8CDD3"/>
-                      </a:solidFill>
-                    </a:lnT>
-                    <a:lnR w="6350" cap="flat" cmpd="sng" algn="ctr">
-                      <a:solidFill>
-                        <a:srgbClr val="C8CDD3"/>
-                      </a:solidFill>
-                    </a:lnR>
-                    <a:lnL w="6350" cap="flat" cmpd="sng" algn="ctr">
-                      <a:solidFill>
-                        <a:srgbClr val="C8CDD3"/>
-                      </a:solidFill>
-                    </a:lnL>
-                    <a:solidFill>
-                      <a:srgbClr val="F4F6F8"/>
-                    </a:solidFill>
-                  </a:tcPr>
-                </a:tc>
-              </a:tr>
-              <a:tr h="310413">
-                <a:tc>
-                  <a:txBody>
-                    <a:bodyPr/>
-                    <a:lstStyle/>
-                    <a:p>
-                      <a:r>
-                        <a:rPr sz="800" b="1" i="0">
-                          <a:solidFill>
-                            <a:srgbClr val="1F2937"/>
-                          </a:solidFill>
-                          <a:latin typeface="Arial"/>
-                        </a:rPr>
-                        <a:t>4</a:t>
-                      </a:r>
-                    </a:p>
-                  </a:txBody>
-                  <a:tcPr marL="91440" marR="91440" marT="45720" marB="45720">
-                    <a:lnB w="6350" cap="flat" cmpd="sng" algn="ctr">
-                      <a:solidFill>
-                        <a:srgbClr val="C8CDD3"/>
-                      </a:solidFill>
-                    </a:lnB>
-                    <a:lnT w="6350" cap="flat" cmpd="sng" algn="ctr">
-                      <a:solidFill>
-                        <a:srgbClr val="C8CDD3"/>
-                      </a:solidFill>
-                    </a:lnT>
-                    <a:lnR w="6350" cap="flat" cmpd="sng" algn="ctr">
-                      <a:solidFill>
-                        <a:srgbClr val="C8CDD3"/>
-                      </a:solidFill>
-                    </a:lnR>
-                    <a:lnL w="6350" cap="flat" cmpd="sng" algn="ctr">
-                      <a:solidFill>
-                        <a:srgbClr val="C8CDD3"/>
-                      </a:solidFill>
-                    </a:lnL>
-                    <a:solidFill>
-                      <a:srgbClr val="F4F6F8"/>
-                    </a:solidFill>
-                  </a:tcPr>
-                </a:tc>
-                <a:tc>
-                  <a:txBody>
-                    <a:bodyPr/>
-                    <a:lstStyle/>
-                    <a:p>
-                      <a:r>
-                        <a:rPr sz="800" b="0" i="0">
-                          <a:solidFill>
-                            <a:srgbClr val="1F2937"/>
-                          </a:solidFill>
-                          <a:latin typeface="Arial"/>
-                        </a:rPr>
-                        <a:t>Insulation resistance and continuity testing</a:t>
-                      </a:r>
-                    </a:p>
-                  </a:txBody>
-                  <a:tcPr marL="91440" marR="91440" marT="45720" marB="45720">
-                    <a:lnB w="6350" cap="flat" cmpd="sng" algn="ctr">
-                      <a:solidFill>
-                        <a:srgbClr val="C8CDD3"/>
-                      </a:solidFill>
-                    </a:lnB>
-                    <a:lnT w="6350" cap="flat" cmpd="sng" algn="ctr">
-                      <a:solidFill>
-                        <a:srgbClr val="C8CDD3"/>
-                      </a:solidFill>
-                    </a:lnT>
-                    <a:lnR w="6350" cap="flat" cmpd="sng" algn="ctr">
-                      <a:solidFill>
-                        <a:srgbClr val="C8CDD3"/>
-                      </a:solidFill>
-                    </a:lnR>
-                    <a:lnL w="6350" cap="flat" cmpd="sng" algn="ctr">
-                      <a:solidFill>
-                        <a:srgbClr val="C8CDD3"/>
-                      </a:solidFill>
-                    </a:lnL>
-                    <a:solidFill>
-                      <a:srgbClr val="F4F6F8"/>
-                    </a:solidFill>
-                  </a:tcPr>
-                </a:tc>
-                <a:tc>
-                  <a:txBody>
-                    <a:bodyPr/>
-                    <a:lstStyle/>
-                    <a:p>
-                      <a:r>
-                        <a:rPr sz="800" b="0" i="0">
-                          <a:solidFill>
-                            <a:srgbClr val="1F2937"/>
-                          </a:solidFill>
-                          <a:latin typeface="Arial"/>
-                        </a:rPr>
-                        <a:t>LOC-01 / 02 / 03</a:t>
-                      </a:r>
-                    </a:p>
-                  </a:txBody>
-                  <a:tcPr marL="91440" marR="91440" marT="45720" marB="45720">
-                    <a:lnB w="6350" cap="flat" cmpd="sng" algn="ctr">
-                      <a:solidFill>
-                        <a:srgbClr val="C8CDD3"/>
-                      </a:solidFill>
-                    </a:lnB>
-                    <a:lnT w="6350" cap="flat" cmpd="sng" algn="ctr">
-                      <a:solidFill>
-                        <a:srgbClr val="C8CDD3"/>
-                      </a:solidFill>
-                    </a:lnT>
-                    <a:lnR w="6350" cap="flat" cmpd="sng" algn="ctr">
-                      <a:solidFill>
-                        <a:srgbClr val="C8CDD3"/>
-                      </a:solidFill>
-                    </a:lnR>
-                    <a:lnL w="6350" cap="flat" cmpd="sng" algn="ctr">
-                      <a:solidFill>
-                        <a:srgbClr val="C8CDD3"/>
-                      </a:solidFill>
-                    </a:lnL>
-                    <a:solidFill>
-                      <a:srgbClr val="F4F6F8"/>
-                    </a:solidFill>
-                  </a:tcPr>
-                </a:tc>
-                <a:tc>
-                  <a:txBody>
-                    <a:bodyPr/>
-                    <a:lstStyle/>
-                    <a:p>
-                      <a:r>
-                        <a:rPr sz="800" b="0" i="0">
-                          <a:solidFill>
-                            <a:srgbClr val="1F2937"/>
-                          </a:solidFill>
-                          <a:latin typeface="Arial"/>
-                        </a:rPr>
-                        <a:t>4 No. circuits</a:t>
-                      </a:r>
-                    </a:p>
-                  </a:txBody>
-                  <a:tcPr marL="91440" marR="91440" marT="45720" marB="45720">
-                    <a:lnB w="6350" cap="flat" cmpd="sng" algn="ctr">
-                      <a:solidFill>
-                        <a:srgbClr val="C8CDD3"/>
-                      </a:solidFill>
-                    </a:lnB>
-                    <a:lnT w="6350" cap="flat" cmpd="sng" algn="ctr">
-                      <a:solidFill>
-                        <a:srgbClr val="C8CDD3"/>
-                      </a:solidFill>
-                    </a:lnT>
-                    <a:lnR w="6350" cap="flat" cmpd="sng" algn="ctr">
-                      <a:solidFill>
-                        <a:srgbClr val="C8CDD3"/>
-                      </a:solidFill>
-                    </a:lnR>
-                    <a:lnL w="6350" cap="flat" cmpd="sng" algn="ctr">
-                      <a:solidFill>
-                        <a:srgbClr val="C8CDD3"/>
-                      </a:solidFill>
-                    </a:lnL>
-                    <a:solidFill>
-                      <a:srgbClr val="F4F6F8"/>
-                    </a:solidFill>
-                  </a:tcPr>
-                </a:tc>
-                <a:tc>
-                  <a:txBody>
-                    <a:bodyPr/>
-                    <a:lstStyle/>
-                    <a:p>
-                      <a:r>
-                        <a:rPr sz="800" b="0" i="0">
-                          <a:solidFill>
-                            <a:srgbClr val="1F2937"/>
-                          </a:solidFill>
-                          <a:latin typeface="Arial"/>
-                        </a:rPr>
-                        <a:t>—</a:t>
-                      </a:r>
-                    </a:p>
-                  </a:txBody>
-                  <a:tcPr marL="91440" marR="91440" marT="45720" marB="45720">
-                    <a:lnB w="6350" cap="flat" cmpd="sng" algn="ctr">
-                      <a:solidFill>
-                        <a:srgbClr val="C8CDD3"/>
-                      </a:solidFill>
-                    </a:lnB>
-                    <a:lnT w="6350" cap="flat" cmpd="sng" algn="ctr">
-                      <a:solidFill>
-                        <a:srgbClr val="C8CDD3"/>
-                      </a:solidFill>
-                    </a:lnT>
-                    <a:lnR w="6350" cap="flat" cmpd="sng" algn="ctr">
-                      <a:solidFill>
-                        <a:srgbClr val="C8CDD3"/>
-                      </a:solidFill>
-                    </a:lnR>
-                    <a:lnL w="6350" cap="flat" cmpd="sng" algn="ctr">
-                      <a:solidFill>
-                        <a:srgbClr val="C8CDD3"/>
-                      </a:solidFill>
-                    </a:lnL>
-                    <a:solidFill>
-                      <a:srgbClr val="F4F6F8"/>
-                    </a:solidFill>
-                  </a:tcPr>
-                </a:tc>
-                <a:tc>
-                  <a:txBody>
-                    <a:bodyPr/>
-                    <a:lstStyle/>
-                    <a:p>
-                      <a:r>
-                        <a:rPr sz="800" b="0" i="0">
-                          <a:solidFill>
-                            <a:srgbClr val="1F2937"/>
-                          </a:solidFill>
-                          <a:latin typeface="Arial"/>
-                        </a:rPr>
-                        <a:t>Test records issued</a:t>
-                      </a:r>
-                    </a:p>
-                  </a:txBody>
-                  <a:tcPr marL="91440" marR="91440" marT="45720" marB="45720">
-                    <a:lnB w="6350" cap="flat" cmpd="sng" algn="ctr">
-                      <a:solidFill>
-                        <a:srgbClr val="C8CDD3"/>
-                      </a:solidFill>
-                    </a:lnB>
-                    <a:lnT w="6350" cap="flat" cmpd="sng" algn="ctr">
-                      <a:solidFill>
-                        <a:srgbClr val="C8CDD3"/>
-                      </a:solidFill>
-                    </a:lnT>
-                    <a:lnR w="6350" cap="flat" cmpd="sng" algn="ctr">
-                      <a:solidFill>
-                        <a:srgbClr val="C8CDD3"/>
-                      </a:solidFill>
-                    </a:lnR>
-                    <a:lnL w="6350" cap="flat" cmpd="sng" algn="ctr">
-                      <a:solidFill>
-                        <a:srgbClr val="C8CDD3"/>
-                      </a:solidFill>
-                    </a:lnL>
-                    <a:solidFill>
-                      <a:srgbClr val="F4F6F8"/>
-                    </a:solidFill>
-                  </a:tcPr>
-                </a:tc>
-              </a:tr>
-              <a:tr h="310413">
-                <a:tc>
-                  <a:txBody>
-                    <a:bodyPr/>
-                    <a:lstStyle/>
-                    <a:p>
-                      <a:r>
-                        <a:rPr sz="800" b="1" i="0">
-                          <a:solidFill>
-                            <a:srgbClr val="1F2937"/>
-                          </a:solidFill>
-                          <a:latin typeface="Arial"/>
-                        </a:rPr>
-                        <a:t>5</a:t>
-                      </a:r>
-                    </a:p>
-                  </a:txBody>
-                  <a:tcPr marL="91440" marR="91440" marT="45720" marB="45720">
-                    <a:lnB w="6350" cap="flat" cmpd="sng" algn="ctr">
-                      <a:solidFill>
-                        <a:srgbClr val="C8CDD3"/>
-                      </a:solidFill>
-                    </a:lnB>
-                    <a:lnT w="6350" cap="flat" cmpd="sng" algn="ctr">
-                      <a:solidFill>
-                        <a:srgbClr val="C8CDD3"/>
-                      </a:solidFill>
-                    </a:lnT>
-                    <a:lnR w="6350" cap="flat" cmpd="sng" algn="ctr">
-                      <a:solidFill>
-                        <a:srgbClr val="C8CDD3"/>
-                      </a:solidFill>
-                    </a:lnR>
-                    <a:lnL w="6350" cap="flat" cmpd="sng" algn="ctr">
-                      <a:solidFill>
-                        <a:srgbClr val="C8CDD3"/>
-                      </a:solidFill>
-                    </a:lnL>
-                    <a:solidFill>
-                      <a:srgbClr val="FFFFFF"/>
-                    </a:solidFill>
-                  </a:tcPr>
-                </a:tc>
-                <a:tc>
-                  <a:txBody>
-                    <a:bodyPr/>
-                    <a:lstStyle/>
-                    <a:p>
-                      <a:r>
-                        <a:rPr sz="800" b="0" i="0">
-                          <a:solidFill>
-                            <a:srgbClr val="1F2937"/>
-                          </a:solidFill>
-                          <a:latin typeface="Arial"/>
-                        </a:rPr>
-                        <a:t>Backfill, sealant and pavement reinstatement of the saw cut</a:t>
+                        <a:t>Final functionality check, then handover to Operations</a:t>
                       </a:r>
                     </a:p>
                   </a:txBody>
@@ -57064,768 +58080,6 @@
                           </a:solidFill>
                           <a:latin typeface="Arial"/>
                         </a:rPr>
-                        <a:t>approx. 420 m</a:t>
-                      </a:r>
-                    </a:p>
-                  </a:txBody>
-                  <a:tcPr marL="91440" marR="91440" marT="45720" marB="45720">
-                    <a:lnB w="6350" cap="flat" cmpd="sng" algn="ctr">
-                      <a:solidFill>
-                        <a:srgbClr val="C8CDD3"/>
-                      </a:solidFill>
-                    </a:lnB>
-                    <a:lnT w="6350" cap="flat" cmpd="sng" algn="ctr">
-                      <a:solidFill>
-                        <a:srgbClr val="C8CDD3"/>
-                      </a:solidFill>
-                    </a:lnT>
-                    <a:lnR w="6350" cap="flat" cmpd="sng" algn="ctr">
-                      <a:solidFill>
-                        <a:srgbClr val="C8CDD3"/>
-                      </a:solidFill>
-                    </a:lnR>
-                    <a:lnL w="6350" cap="flat" cmpd="sng" algn="ctr">
-                      <a:solidFill>
-                        <a:srgbClr val="C8CDD3"/>
-                      </a:solidFill>
-                    </a:lnL>
-                    <a:solidFill>
-                      <a:srgbClr val="FFFFFF"/>
-                    </a:solidFill>
-                  </a:tcPr>
-                </a:tc>
-                <a:tc>
-                  <a:txBody>
-                    <a:bodyPr/>
-                    <a:lstStyle/>
-                    <a:p>
-                      <a:r>
-                        <a:rPr sz="800" b="0" i="0">
-                          <a:solidFill>
-                            <a:srgbClr val="1F2937"/>
-                          </a:solidFill>
-                          <a:latin typeface="Arial"/>
-                        </a:rPr>
-                        <a:t>Per the awaited detail</a:t>
-                      </a:r>
-                    </a:p>
-                  </a:txBody>
-                  <a:tcPr marL="91440" marR="91440" marT="45720" marB="45720">
-                    <a:lnB w="6350" cap="flat" cmpd="sng" algn="ctr">
-                      <a:solidFill>
-                        <a:srgbClr val="C8CDD3"/>
-                      </a:solidFill>
-                    </a:lnB>
-                    <a:lnT w="6350" cap="flat" cmpd="sng" algn="ctr">
-                      <a:solidFill>
-                        <a:srgbClr val="C8CDD3"/>
-                      </a:solidFill>
-                    </a:lnT>
-                    <a:lnR w="6350" cap="flat" cmpd="sng" algn="ctr">
-                      <a:solidFill>
-                        <a:srgbClr val="C8CDD3"/>
-                      </a:solidFill>
-                    </a:lnR>
-                    <a:lnL w="6350" cap="flat" cmpd="sng" algn="ctr">
-                      <a:solidFill>
-                        <a:srgbClr val="C8CDD3"/>
-                      </a:solidFill>
-                    </a:lnL>
-                    <a:solidFill>
-                      <a:srgbClr val="FFFFFF"/>
-                    </a:solidFill>
-                  </a:tcPr>
-                </a:tc>
-                <a:tc>
-                  <a:txBody>
-                    <a:bodyPr/>
-                    <a:lstStyle/>
-                    <a:p>
-                      <a:r>
-                        <a:rPr sz="800" b="0" i="0">
-                          <a:solidFill>
-                            <a:srgbClr val="1F2937"/>
-                          </a:solidFill>
-                          <a:latin typeface="Arial"/>
-                        </a:rPr>
-                        <a:t>Cut sealed; cure period started</a:t>
-                      </a:r>
-                    </a:p>
-                  </a:txBody>
-                  <a:tcPr marL="91440" marR="91440" marT="45720" marB="45720">
-                    <a:lnB w="6350" cap="flat" cmpd="sng" algn="ctr">
-                      <a:solidFill>
-                        <a:srgbClr val="C8CDD3"/>
-                      </a:solidFill>
-                    </a:lnB>
-                    <a:lnT w="6350" cap="flat" cmpd="sng" algn="ctr">
-                      <a:solidFill>
-                        <a:srgbClr val="C8CDD3"/>
-                      </a:solidFill>
-                    </a:lnT>
-                    <a:lnR w="6350" cap="flat" cmpd="sng" algn="ctr">
-                      <a:solidFill>
-                        <a:srgbClr val="C8CDD3"/>
-                      </a:solidFill>
-                    </a:lnR>
-                    <a:lnL w="6350" cap="flat" cmpd="sng" algn="ctr">
-                      <a:solidFill>
-                        <a:srgbClr val="C8CDD3"/>
-                      </a:solidFill>
-                    </a:lnL>
-                    <a:solidFill>
-                      <a:srgbClr val="FFFFFF"/>
-                    </a:solidFill>
-                  </a:tcPr>
-                </a:tc>
-              </a:tr>
-              <a:tr h="310413">
-                <a:tc>
-                  <a:txBody>
-                    <a:bodyPr/>
-                    <a:lstStyle/>
-                    <a:p>
-                      <a:r>
-                        <a:rPr sz="800" b="1" i="0">
-                          <a:solidFill>
-                            <a:srgbClr val="1F2937"/>
-                          </a:solidFill>
-                          <a:latin typeface="Arial"/>
-                        </a:rPr>
-                        <a:t>5</a:t>
-                      </a:r>
-                    </a:p>
-                  </a:txBody>
-                  <a:tcPr marL="91440" marR="91440" marT="45720" marB="45720">
-                    <a:lnB w="6350" cap="flat" cmpd="sng" algn="ctr">
-                      <a:solidFill>
-                        <a:srgbClr val="C8CDD3"/>
-                      </a:solidFill>
-                    </a:lnB>
-                    <a:lnT w="6350" cap="flat" cmpd="sng" algn="ctr">
-                      <a:solidFill>
-                        <a:srgbClr val="C8CDD3"/>
-                      </a:solidFill>
-                    </a:lnT>
-                    <a:lnR w="6350" cap="flat" cmpd="sng" algn="ctr">
-                      <a:solidFill>
-                        <a:srgbClr val="C8CDD3"/>
-                      </a:solidFill>
-                    </a:lnR>
-                    <a:lnL w="6350" cap="flat" cmpd="sng" algn="ctr">
-                      <a:solidFill>
-                        <a:srgbClr val="C8CDD3"/>
-                      </a:solidFill>
-                    </a:lnL>
-                    <a:solidFill>
-                      <a:srgbClr val="FFFFFF"/>
-                    </a:solidFill>
-                  </a:tcPr>
-                </a:tc>
-                <a:tc>
-                  <a:txBody>
-                    <a:bodyPr/>
-                    <a:lstStyle/>
-                    <a:p>
-                      <a:r>
-                        <a:rPr sz="800" b="0" i="0">
-                          <a:solidFill>
-                            <a:srgbClr val="1F2937"/>
-                          </a:solidFill>
-                          <a:latin typeface="Arial"/>
-                        </a:rPr>
-                        <a:t>Re-fix the runway guard lights removed under Phase 1</a:t>
-                      </a:r>
-                    </a:p>
-                  </a:txBody>
-                  <a:tcPr marL="91440" marR="91440" marT="45720" marB="45720">
-                    <a:lnB w="6350" cap="flat" cmpd="sng" algn="ctr">
-                      <a:solidFill>
-                        <a:srgbClr val="C8CDD3"/>
-                      </a:solidFill>
-                    </a:lnB>
-                    <a:lnT w="6350" cap="flat" cmpd="sng" algn="ctr">
-                      <a:solidFill>
-                        <a:srgbClr val="C8CDD3"/>
-                      </a:solidFill>
-                    </a:lnT>
-                    <a:lnR w="6350" cap="flat" cmpd="sng" algn="ctr">
-                      <a:solidFill>
-                        <a:srgbClr val="C8CDD3"/>
-                      </a:solidFill>
-                    </a:lnR>
-                    <a:lnL w="6350" cap="flat" cmpd="sng" algn="ctr">
-                      <a:solidFill>
-                        <a:srgbClr val="C8CDD3"/>
-                      </a:solidFill>
-                    </a:lnL>
-                    <a:solidFill>
-                      <a:srgbClr val="FFFFFF"/>
-                    </a:solidFill>
-                  </a:tcPr>
-                </a:tc>
-                <a:tc>
-                  <a:txBody>
-                    <a:bodyPr/>
-                    <a:lstStyle/>
-                    <a:p>
-                      <a:r>
-                        <a:rPr sz="800" b="0" i="0">
-                          <a:solidFill>
-                            <a:srgbClr val="1F2937"/>
-                          </a:solidFill>
-                          <a:latin typeface="Arial"/>
-                        </a:rPr>
-                        <a:t>LOC-02 / 03</a:t>
-                      </a:r>
-                    </a:p>
-                  </a:txBody>
-                  <a:tcPr marL="91440" marR="91440" marT="45720" marB="45720">
-                    <a:lnB w="6350" cap="flat" cmpd="sng" algn="ctr">
-                      <a:solidFill>
-                        <a:srgbClr val="C8CDD3"/>
-                      </a:solidFill>
-                    </a:lnB>
-                    <a:lnT w="6350" cap="flat" cmpd="sng" algn="ctr">
-                      <a:solidFill>
-                        <a:srgbClr val="C8CDD3"/>
-                      </a:solidFill>
-                    </a:lnT>
-                    <a:lnR w="6350" cap="flat" cmpd="sng" algn="ctr">
-                      <a:solidFill>
-                        <a:srgbClr val="C8CDD3"/>
-                      </a:solidFill>
-                    </a:lnR>
-                    <a:lnL w="6350" cap="flat" cmpd="sng" algn="ctr">
-                      <a:solidFill>
-                        <a:srgbClr val="C8CDD3"/>
-                      </a:solidFill>
-                    </a:lnL>
-                    <a:solidFill>
-                      <a:srgbClr val="FFFFFF"/>
-                    </a:solidFill>
-                  </a:tcPr>
-                </a:tc>
-                <a:tc>
-                  <a:txBody>
-                    <a:bodyPr/>
-                    <a:lstStyle/>
-                    <a:p>
-                      <a:r>
-                        <a:rPr sz="800" b="0" i="0">
-                          <a:solidFill>
-                            <a:srgbClr val="1F2937"/>
-                          </a:solidFill>
-                          <a:latin typeface="Arial"/>
-                        </a:rPr>
-                        <a:t>3 No. RRM</a:t>
-                      </a:r>
-                    </a:p>
-                  </a:txBody>
-                  <a:tcPr marL="91440" marR="91440" marT="45720" marB="45720">
-                    <a:lnB w="6350" cap="flat" cmpd="sng" algn="ctr">
-                      <a:solidFill>
-                        <a:srgbClr val="C8CDD3"/>
-                      </a:solidFill>
-                    </a:lnB>
-                    <a:lnT w="6350" cap="flat" cmpd="sng" algn="ctr">
-                      <a:solidFill>
-                        <a:srgbClr val="C8CDD3"/>
-                      </a:solidFill>
-                    </a:lnT>
-                    <a:lnR w="6350" cap="flat" cmpd="sng" algn="ctr">
-                      <a:solidFill>
-                        <a:srgbClr val="C8CDD3"/>
-                      </a:solidFill>
-                    </a:lnR>
-                    <a:lnL w="6350" cap="flat" cmpd="sng" algn="ctr">
-                      <a:solidFill>
-                        <a:srgbClr val="C8CDD3"/>
-                      </a:solidFill>
-                    </a:lnL>
-                    <a:solidFill>
-                      <a:srgbClr val="FFFFFF"/>
-                    </a:solidFill>
-                  </a:tcPr>
-                </a:tc>
-                <a:tc>
-                  <a:txBody>
-                    <a:bodyPr/>
-                    <a:lstStyle/>
-                    <a:p>
-                      <a:r>
-                        <a:rPr sz="800" b="0" i="0">
-                          <a:solidFill>
-                            <a:srgbClr val="1F2937"/>
-                          </a:solidFill>
-                          <a:latin typeface="Arial"/>
-                        </a:rPr>
-                        <a:t>—</a:t>
-                      </a:r>
-                    </a:p>
-                  </a:txBody>
-                  <a:tcPr marL="91440" marR="91440" marT="45720" marB="45720">
-                    <a:lnB w="6350" cap="flat" cmpd="sng" algn="ctr">
-                      <a:solidFill>
-                        <a:srgbClr val="C8CDD3"/>
-                      </a:solidFill>
-                    </a:lnB>
-                    <a:lnT w="6350" cap="flat" cmpd="sng" algn="ctr">
-                      <a:solidFill>
-                        <a:srgbClr val="C8CDD3"/>
-                      </a:solidFill>
-                    </a:lnT>
-                    <a:lnR w="6350" cap="flat" cmpd="sng" algn="ctr">
-                      <a:solidFill>
-                        <a:srgbClr val="C8CDD3"/>
-                      </a:solidFill>
-                    </a:lnR>
-                    <a:lnL w="6350" cap="flat" cmpd="sng" algn="ctr">
-                      <a:solidFill>
-                        <a:srgbClr val="C8CDD3"/>
-                      </a:solidFill>
-                    </a:lnL>
-                    <a:solidFill>
-                      <a:srgbClr val="FFFFFF"/>
-                    </a:solidFill>
-                  </a:tcPr>
-                </a:tc>
-                <a:tc>
-                  <a:txBody>
-                    <a:bodyPr/>
-                    <a:lstStyle/>
-                    <a:p>
-                      <a:r>
-                        <a:rPr sz="800" b="0" i="0">
-                          <a:solidFill>
-                            <a:srgbClr val="1F2937"/>
-                          </a:solidFill>
-                          <a:latin typeface="Arial"/>
-                        </a:rPr>
-                        <a:t>RRM.555 / 557 / 670 re-fixed and aligned</a:t>
-                      </a:r>
-                    </a:p>
-                  </a:txBody>
-                  <a:tcPr marL="91440" marR="91440" marT="45720" marB="45720">
-                    <a:lnB w="6350" cap="flat" cmpd="sng" algn="ctr">
-                      <a:solidFill>
-                        <a:srgbClr val="C8CDD3"/>
-                      </a:solidFill>
-                    </a:lnB>
-                    <a:lnT w="6350" cap="flat" cmpd="sng" algn="ctr">
-                      <a:solidFill>
-                        <a:srgbClr val="C8CDD3"/>
-                      </a:solidFill>
-                    </a:lnT>
-                    <a:lnR w="6350" cap="flat" cmpd="sng" algn="ctr">
-                      <a:solidFill>
-                        <a:srgbClr val="C8CDD3"/>
-                      </a:solidFill>
-                    </a:lnR>
-                    <a:lnL w="6350" cap="flat" cmpd="sng" algn="ctr">
-                      <a:solidFill>
-                        <a:srgbClr val="C8CDD3"/>
-                      </a:solidFill>
-                    </a:lnL>
-                    <a:solidFill>
-                      <a:srgbClr val="FFFFFF"/>
-                    </a:solidFill>
-                  </a:tcPr>
-                </a:tc>
-              </a:tr>
-              <a:tr h="310413">
-                <a:tc>
-                  <a:txBody>
-                    <a:bodyPr/>
-                    <a:lstStyle/>
-                    <a:p>
-                      <a:r>
-                        <a:rPr sz="800" b="1" i="0">
-                          <a:solidFill>
-                            <a:srgbClr val="1F2937"/>
-                          </a:solidFill>
-                          <a:latin typeface="Arial"/>
-                        </a:rPr>
-                        <a:t>5</a:t>
-                      </a:r>
-                    </a:p>
-                  </a:txBody>
-                  <a:tcPr marL="91440" marR="91440" marT="45720" marB="45720">
-                    <a:lnB w="6350" cap="flat" cmpd="sng" algn="ctr">
-                      <a:solidFill>
-                        <a:srgbClr val="C8CDD3"/>
-                      </a:solidFill>
-                    </a:lnB>
-                    <a:lnT w="6350" cap="flat" cmpd="sng" algn="ctr">
-                      <a:solidFill>
-                        <a:srgbClr val="C8CDD3"/>
-                      </a:solidFill>
-                    </a:lnT>
-                    <a:lnR w="6350" cap="flat" cmpd="sng" algn="ctr">
-                      <a:solidFill>
-                        <a:srgbClr val="C8CDD3"/>
-                      </a:solidFill>
-                    </a:lnR>
-                    <a:lnL w="6350" cap="flat" cmpd="sng" algn="ctr">
-                      <a:solidFill>
-                        <a:srgbClr val="C8CDD3"/>
-                      </a:solidFill>
-                    </a:lnL>
-                    <a:solidFill>
-                      <a:srgbClr val="FFFFFF"/>
-                    </a:solidFill>
-                  </a:tcPr>
-                </a:tc>
-                <a:tc>
-                  <a:txBody>
-                    <a:bodyPr/>
-                    <a:lstStyle/>
-                    <a:p>
-                      <a:r>
-                        <a:rPr sz="800" b="0" i="0">
-                          <a:solidFill>
-                            <a:srgbClr val="1F2937"/>
-                          </a:solidFill>
-                          <a:latin typeface="Arial"/>
-                        </a:rPr>
-                        <a:t>Testing and commissioning of the affected circuits</a:t>
-                      </a:r>
-                    </a:p>
-                  </a:txBody>
-                  <a:tcPr marL="91440" marR="91440" marT="45720" marB="45720">
-                    <a:lnB w="6350" cap="flat" cmpd="sng" algn="ctr">
-                      <a:solidFill>
-                        <a:srgbClr val="C8CDD3"/>
-                      </a:solidFill>
-                    </a:lnB>
-                    <a:lnT w="6350" cap="flat" cmpd="sng" algn="ctr">
-                      <a:solidFill>
-                        <a:srgbClr val="C8CDD3"/>
-                      </a:solidFill>
-                    </a:lnT>
-                    <a:lnR w="6350" cap="flat" cmpd="sng" algn="ctr">
-                      <a:solidFill>
-                        <a:srgbClr val="C8CDD3"/>
-                      </a:solidFill>
-                    </a:lnR>
-                    <a:lnL w="6350" cap="flat" cmpd="sng" algn="ctr">
-                      <a:solidFill>
-                        <a:srgbClr val="C8CDD3"/>
-                      </a:solidFill>
-                    </a:lnL>
-                    <a:solidFill>
-                      <a:srgbClr val="FFFFFF"/>
-                    </a:solidFill>
-                  </a:tcPr>
-                </a:tc>
-                <a:tc>
-                  <a:txBody>
-                    <a:bodyPr/>
-                    <a:lstStyle/>
-                    <a:p>
-                      <a:r>
-                        <a:rPr sz="800" b="0" i="0">
-                          <a:solidFill>
-                            <a:srgbClr val="1F2937"/>
-                          </a:solidFill>
-                          <a:latin typeface="Arial"/>
-                        </a:rPr>
-                        <a:t>LOC-01 / 02 / 03</a:t>
-                      </a:r>
-                    </a:p>
-                  </a:txBody>
-                  <a:tcPr marL="91440" marR="91440" marT="45720" marB="45720">
-                    <a:lnB w="6350" cap="flat" cmpd="sng" algn="ctr">
-                      <a:solidFill>
-                        <a:srgbClr val="C8CDD3"/>
-                      </a:solidFill>
-                    </a:lnB>
-                    <a:lnT w="6350" cap="flat" cmpd="sng" algn="ctr">
-                      <a:solidFill>
-                        <a:srgbClr val="C8CDD3"/>
-                      </a:solidFill>
-                    </a:lnT>
-                    <a:lnR w="6350" cap="flat" cmpd="sng" algn="ctr">
-                      <a:solidFill>
-                        <a:srgbClr val="C8CDD3"/>
-                      </a:solidFill>
-                    </a:lnR>
-                    <a:lnL w="6350" cap="flat" cmpd="sng" algn="ctr">
-                      <a:solidFill>
-                        <a:srgbClr val="C8CDD3"/>
-                      </a:solidFill>
-                    </a:lnL>
-                    <a:solidFill>
-                      <a:srgbClr val="FFFFFF"/>
-                    </a:solidFill>
-                  </a:tcPr>
-                </a:tc>
-                <a:tc>
-                  <a:txBody>
-                    <a:bodyPr/>
-                    <a:lstStyle/>
-                    <a:p>
-                      <a:r>
-                        <a:rPr sz="800" b="0" i="0">
-                          <a:solidFill>
-                            <a:srgbClr val="1F2937"/>
-                          </a:solidFill>
-                          <a:latin typeface="Arial"/>
-                        </a:rPr>
-                        <a:t>4 No. circuits</a:t>
-                      </a:r>
-                    </a:p>
-                  </a:txBody>
-                  <a:tcPr marL="91440" marR="91440" marT="45720" marB="45720">
-                    <a:lnB w="6350" cap="flat" cmpd="sng" algn="ctr">
-                      <a:solidFill>
-                        <a:srgbClr val="C8CDD3"/>
-                      </a:solidFill>
-                    </a:lnB>
-                    <a:lnT w="6350" cap="flat" cmpd="sng" algn="ctr">
-                      <a:solidFill>
-                        <a:srgbClr val="C8CDD3"/>
-                      </a:solidFill>
-                    </a:lnT>
-                    <a:lnR w="6350" cap="flat" cmpd="sng" algn="ctr">
-                      <a:solidFill>
-                        <a:srgbClr val="C8CDD3"/>
-                      </a:solidFill>
-                    </a:lnR>
-                    <a:lnL w="6350" cap="flat" cmpd="sng" algn="ctr">
-                      <a:solidFill>
-                        <a:srgbClr val="C8CDD3"/>
-                      </a:solidFill>
-                    </a:lnL>
-                    <a:solidFill>
-                      <a:srgbClr val="FFFFFF"/>
-                    </a:solidFill>
-                  </a:tcPr>
-                </a:tc>
-                <a:tc>
-                  <a:txBody>
-                    <a:bodyPr/>
-                    <a:lstStyle/>
-                    <a:p>
-                      <a:r>
-                        <a:rPr sz="800" b="0" i="0">
-                          <a:solidFill>
-                            <a:srgbClr val="1F2937"/>
-                          </a:solidFill>
-                          <a:latin typeface="Arial"/>
-                        </a:rPr>
-                        <a:t>—</a:t>
-                      </a:r>
-                    </a:p>
-                  </a:txBody>
-                  <a:tcPr marL="91440" marR="91440" marT="45720" marB="45720">
-                    <a:lnB w="6350" cap="flat" cmpd="sng" algn="ctr">
-                      <a:solidFill>
-                        <a:srgbClr val="C8CDD3"/>
-                      </a:solidFill>
-                    </a:lnB>
-                    <a:lnT w="6350" cap="flat" cmpd="sng" algn="ctr">
-                      <a:solidFill>
-                        <a:srgbClr val="C8CDD3"/>
-                      </a:solidFill>
-                    </a:lnT>
-                    <a:lnR w="6350" cap="flat" cmpd="sng" algn="ctr">
-                      <a:solidFill>
-                        <a:srgbClr val="C8CDD3"/>
-                      </a:solidFill>
-                    </a:lnR>
-                    <a:lnL w="6350" cap="flat" cmpd="sng" algn="ctr">
-                      <a:solidFill>
-                        <a:srgbClr val="C8CDD3"/>
-                      </a:solidFill>
-                    </a:lnL>
-                    <a:solidFill>
-                      <a:srgbClr val="FFFFFF"/>
-                    </a:solidFill>
-                  </a:tcPr>
-                </a:tc>
-                <a:tc>
-                  <a:txBody>
-                    <a:bodyPr/>
-                    <a:lstStyle/>
-                    <a:p>
-                      <a:r>
-                        <a:rPr sz="800" b="0" i="0">
-                          <a:solidFill>
-                            <a:srgbClr val="1F2937"/>
-                          </a:solidFill>
-                          <a:latin typeface="Arial"/>
-                        </a:rPr>
-                        <a:t>Circuits energised and proved</a:t>
-                      </a:r>
-                    </a:p>
-                  </a:txBody>
-                  <a:tcPr marL="91440" marR="91440" marT="45720" marB="45720">
-                    <a:lnB w="6350" cap="flat" cmpd="sng" algn="ctr">
-                      <a:solidFill>
-                        <a:srgbClr val="C8CDD3"/>
-                      </a:solidFill>
-                    </a:lnB>
-                    <a:lnT w="6350" cap="flat" cmpd="sng" algn="ctr">
-                      <a:solidFill>
-                        <a:srgbClr val="C8CDD3"/>
-                      </a:solidFill>
-                    </a:lnT>
-                    <a:lnR w="6350" cap="flat" cmpd="sng" algn="ctr">
-                      <a:solidFill>
-                        <a:srgbClr val="C8CDD3"/>
-                      </a:solidFill>
-                    </a:lnR>
-                    <a:lnL w="6350" cap="flat" cmpd="sng" algn="ctr">
-                      <a:solidFill>
-                        <a:srgbClr val="C8CDD3"/>
-                      </a:solidFill>
-                    </a:lnL>
-                    <a:solidFill>
-                      <a:srgbClr val="FFFFFF"/>
-                    </a:solidFill>
-                  </a:tcPr>
-                </a:tc>
-              </a:tr>
-              <a:tr h="310413">
-                <a:tc>
-                  <a:txBody>
-                    <a:bodyPr/>
-                    <a:lstStyle/>
-                    <a:p>
-                      <a:r>
-                        <a:rPr sz="800" b="1" i="0">
-                          <a:solidFill>
-                            <a:srgbClr val="1F2937"/>
-                          </a:solidFill>
-                          <a:latin typeface="Arial"/>
-                        </a:rPr>
-                        <a:t>5</a:t>
-                      </a:r>
-                    </a:p>
-                  </a:txBody>
-                  <a:tcPr marL="91440" marR="91440" marT="45720" marB="45720">
-                    <a:lnB w="6350" cap="flat" cmpd="sng" algn="ctr">
-                      <a:solidFill>
-                        <a:srgbClr val="C8CDD3"/>
-                      </a:solidFill>
-                    </a:lnB>
-                    <a:lnT w="6350" cap="flat" cmpd="sng" algn="ctr">
-                      <a:solidFill>
-                        <a:srgbClr val="C8CDD3"/>
-                      </a:solidFill>
-                    </a:lnT>
-                    <a:lnR w="6350" cap="flat" cmpd="sng" algn="ctr">
-                      <a:solidFill>
-                        <a:srgbClr val="C8CDD3"/>
-                      </a:solidFill>
-                    </a:lnR>
-                    <a:lnL w="6350" cap="flat" cmpd="sng" algn="ctr">
-                      <a:solidFill>
-                        <a:srgbClr val="C8CDD3"/>
-                      </a:solidFill>
-                    </a:lnL>
-                    <a:solidFill>
-                      <a:srgbClr val="FFFFFF"/>
-                    </a:solidFill>
-                  </a:tcPr>
-                </a:tc>
-                <a:tc>
-                  <a:txBody>
-                    <a:bodyPr/>
-                    <a:lstStyle/>
-                    <a:p>
-                      <a:r>
-                        <a:rPr sz="800" b="0" i="0">
-                          <a:solidFill>
-                            <a:srgbClr val="1F2937"/>
-                          </a:solidFill>
-                          <a:latin typeface="Arial"/>
-                        </a:rPr>
-                        <a:t>Final functionality check, then handover to Operations</a:t>
-                      </a:r>
-                    </a:p>
-                  </a:txBody>
-                  <a:tcPr marL="91440" marR="91440" marT="45720" marB="45720">
-                    <a:lnB w="6350" cap="flat" cmpd="sng" algn="ctr">
-                      <a:solidFill>
-                        <a:srgbClr val="C8CDD3"/>
-                      </a:solidFill>
-                    </a:lnB>
-                    <a:lnT w="6350" cap="flat" cmpd="sng" algn="ctr">
-                      <a:solidFill>
-                        <a:srgbClr val="C8CDD3"/>
-                      </a:solidFill>
-                    </a:lnT>
-                    <a:lnR w="6350" cap="flat" cmpd="sng" algn="ctr">
-                      <a:solidFill>
-                        <a:srgbClr val="C8CDD3"/>
-                      </a:solidFill>
-                    </a:lnR>
-                    <a:lnL w="6350" cap="flat" cmpd="sng" algn="ctr">
-                      <a:solidFill>
-                        <a:srgbClr val="C8CDD3"/>
-                      </a:solidFill>
-                    </a:lnL>
-                    <a:solidFill>
-                      <a:srgbClr val="FFFFFF"/>
-                    </a:solidFill>
-                  </a:tcPr>
-                </a:tc>
-                <a:tc>
-                  <a:txBody>
-                    <a:bodyPr/>
-                    <a:lstStyle/>
-                    <a:p>
-                      <a:r>
-                        <a:rPr sz="800" b="0" i="0">
-                          <a:solidFill>
-                            <a:srgbClr val="1F2937"/>
-                          </a:solidFill>
-                          <a:latin typeface="Arial"/>
-                        </a:rPr>
-                        <a:t>LOC-01 / 02 / 03</a:t>
-                      </a:r>
-                    </a:p>
-                  </a:txBody>
-                  <a:tcPr marL="91440" marR="91440" marT="45720" marB="45720">
-                    <a:lnB w="6350" cap="flat" cmpd="sng" algn="ctr">
-                      <a:solidFill>
-                        <a:srgbClr val="C8CDD3"/>
-                      </a:solidFill>
-                    </a:lnB>
-                    <a:lnT w="6350" cap="flat" cmpd="sng" algn="ctr">
-                      <a:solidFill>
-                        <a:srgbClr val="C8CDD3"/>
-                      </a:solidFill>
-                    </a:lnT>
-                    <a:lnR w="6350" cap="flat" cmpd="sng" algn="ctr">
-                      <a:solidFill>
-                        <a:srgbClr val="C8CDD3"/>
-                      </a:solidFill>
-                    </a:lnR>
-                    <a:lnL w="6350" cap="flat" cmpd="sng" algn="ctr">
-                      <a:solidFill>
-                        <a:srgbClr val="C8CDD3"/>
-                      </a:solidFill>
-                    </a:lnL>
-                    <a:solidFill>
-                      <a:srgbClr val="FFFFFF"/>
-                    </a:solidFill>
-                  </a:tcPr>
-                </a:tc>
-                <a:tc>
-                  <a:txBody>
-                    <a:bodyPr/>
-                    <a:lstStyle/>
-                    <a:p>
-                      <a:r>
-                        <a:rPr sz="800" b="0" i="0">
-                          <a:solidFill>
-                            <a:srgbClr val="1F2937"/>
-                          </a:solidFill>
-                          <a:latin typeface="Arial"/>
-                        </a:rPr>
                         <a:t>16 No. fittings</a:t>
                       </a:r>
                     </a:p>
@@ -57953,8 +58207,8 @@
         </p:nvSpPr>
         <p:spPr>
           <a:xfrm>
-            <a:off x="457200" y="7581519"/>
-            <a:ext cx="6958584" cy="2438781"/>
+            <a:off x="457200" y="6788404"/>
+            <a:ext cx="6958584" cy="3231896"/>
           </a:xfrm>
           <a:prstGeom prst="rect">
             <a:avLst/>
@@ -57999,7 +58253,7 @@
         </p:nvSpPr>
         <p:spPr>
           <a:xfrm>
-            <a:off x="603504" y="7691247"/>
+            <a:off x="603504" y="6898132"/>
             <a:ext cx="6665976" cy="237744"/>
           </a:xfrm>
           <a:prstGeom prst="rect">
@@ -58038,8 +58292,8 @@
         </p:nvSpPr>
         <p:spPr>
           <a:xfrm>
-            <a:off x="603504" y="8057007"/>
-            <a:ext cx="6665976" cy="1826133"/>
+            <a:off x="603504" y="7263892"/>
+            <a:ext cx="6665976" cy="2619248"/>
           </a:xfrm>
           <a:prstGeom prst="rect">
             <a:avLst/>
@@ -58141,8 +58395,8 @@
         </p:nvSpPr>
         <p:spPr>
           <a:xfrm>
-            <a:off x="7699248" y="7581519"/>
-            <a:ext cx="6958584" cy="2438781"/>
+            <a:off x="7699248" y="6788404"/>
+            <a:ext cx="6958584" cy="3231896"/>
           </a:xfrm>
           <a:prstGeom prst="rect">
             <a:avLst/>
@@ -58187,7 +58441,7 @@
         </p:nvSpPr>
         <p:spPr>
           <a:xfrm>
-            <a:off x="7845552" y="7691247"/>
+            <a:off x="7845552" y="6898132"/>
             <a:ext cx="6665976" cy="237744"/>
           </a:xfrm>
           <a:prstGeom prst="rect">
@@ -58226,8 +58480,8 @@
         </p:nvSpPr>
         <p:spPr>
           <a:xfrm>
-            <a:off x="7845552" y="8057007"/>
-            <a:ext cx="6665976" cy="1826133"/>
+            <a:off x="7845552" y="7263892"/>
+            <a:ext cx="6665976" cy="2619248"/>
           </a:xfrm>
           <a:prstGeom prst="rect">
             <a:avLst/>
@@ -58253,6 +58507,38 @@
                 <a:latin typeface="Arial"/>
               </a:rPr>
               <a:t>Covers Phase 3 AGL installation only. Phase 1 asset removal and coring is recorded complete (site record 23.07.2026); Phase 2 civil attendance sits outside these five days.</a:t>
+            </a:r>
+          </a:p>
+          <a:p>
+            <a:pPr>
+              <a:spcAft>
+                <a:spcPts val="400"/>
+              </a:spcAft>
+            </a:pPr>
+            <a:r>
+              <a:rPr sz="900" b="0" i="0">
+                <a:solidFill>
+                  <a:srgbClr val="1F2937"/>
+                </a:solidFill>
+                <a:latin typeface="Arial"/>
+              </a:rPr>
+              <a:t>The three locations are worked one front at a time — LOC-01 over Days 1–3, LOC-03 on Day 4, LOC-02 on Day 5 — so each is cut, cabled, tested and sealed before the next is opened. Days are allocated to the work each location carries: 11 No. fittings and approx. 300 m of cut at LOC-01, 4 No. and approx. 95 m at LOC-03, 1 No. and approx. 24 m at LOC-02.</a:t>
+            </a:r>
+          </a:p>
+          <a:p>
+            <a:pPr>
+              <a:spcAft>
+                <a:spcPts val="400"/>
+              </a:spcAft>
+            </a:pPr>
+            <a:r>
+              <a:rPr sz="900" b="0" i="0">
+                <a:solidFill>
+                  <a:srgbClr val="1F2937"/>
+                </a:solidFill>
+                <a:latin typeface="Arial"/>
+              </a:rPr>
+              <a:t>Only two items span all three locations: the setting-out on Day 1, taken in one survey visit, and the circuit testing and commissioning on Day 5, which cannot complete until every location is cabled because the circuits run through all three.</a:t>
             </a:r>
           </a:p>
           <a:p>
